--- a/teaching/ai_workshop/ai_coding_agents_workshop_slides.pptx
+++ b/teaching/ai_workshop/ai_coding_agents_workshop_slides.pptx
@@ -2,26 +2,31 @@
 <file path=ppt/presentation.xml><?xml version="1.0" encoding="utf-8"?>
 <p:presentation xmlns:a="http://schemas.openxmlformats.org/drawingml/2006/main" xmlns:r="http://schemas.openxmlformats.org/officeDocument/2006/relationships" xmlns:p="http://schemas.openxmlformats.org/presentationml/2006/main" saveSubsetFonts="1" autoCompressPictures="0">
   <p:sldMasterIdLst>
-    <p:sldMasterId id="2147483648" r:id="rId4"/>
+    <p:sldMasterId id="2147483680" r:id="rId4"/>
   </p:sldMasterIdLst>
   <p:notesMasterIdLst>
-    <p:notesMasterId r:id="rId16"/>
+    <p:notesMasterId r:id="rId21"/>
   </p:notesMasterIdLst>
   <p:handoutMasterIdLst>
-    <p:handoutMasterId r:id="rId17"/>
+    <p:handoutMasterId r:id="rId22"/>
   </p:handoutMasterIdLst>
   <p:sldIdLst>
-    <p:sldId id="256" r:id="rId5"/>
-    <p:sldId id="257" r:id="rId6"/>
-    <p:sldId id="259" r:id="rId7"/>
-    <p:sldId id="261" r:id="rId8"/>
-    <p:sldId id="267" r:id="rId9"/>
-    <p:sldId id="269" r:id="rId10"/>
-    <p:sldId id="260" r:id="rId11"/>
-    <p:sldId id="268" r:id="rId12"/>
-    <p:sldId id="266" r:id="rId13"/>
-    <p:sldId id="262" r:id="rId14"/>
-    <p:sldId id="264" r:id="rId15"/>
+    <p:sldId id="326" r:id="rId5"/>
+    <p:sldId id="340" r:id="rId6"/>
+    <p:sldId id="341" r:id="rId7"/>
+    <p:sldId id="327" r:id="rId8"/>
+    <p:sldId id="328" r:id="rId9"/>
+    <p:sldId id="329" r:id="rId10"/>
+    <p:sldId id="330" r:id="rId11"/>
+    <p:sldId id="304" r:id="rId12"/>
+    <p:sldId id="331" r:id="rId13"/>
+    <p:sldId id="337" r:id="rId14"/>
+    <p:sldId id="332" r:id="rId15"/>
+    <p:sldId id="333" r:id="rId16"/>
+    <p:sldId id="334" r:id="rId17"/>
+    <p:sldId id="343" r:id="rId18"/>
+    <p:sldId id="336" r:id="rId19"/>
+    <p:sldId id="339" r:id="rId20"/>
   </p:sldIdLst>
   <p:sldSz cx="9144000" cy="5143500" type="screen16x9"/>
   <p:notesSz cx="6858000" cy="9144000"/>
@@ -560,7 +565,7 @@
           <a:p>
             <a:fld id="{3C5ACD56-CA7D-3A42-9B42-9FD56464B91C}" type="datetimeFigureOut">
               <a:rPr lang="en-US" smtClean="0"/>
-              <a:t>2/20/2026</a:t>
+              <a:t>3/17/2026</a:t>
             </a:fld>
             <a:endParaRPr lang="en-US"/>
           </a:p>
@@ -725,7 +730,7 @@
           <a:p>
             <a:fld id="{541FD2D5-AB94-4C28-8208-573619E6539A}" type="datetimeFigureOut">
               <a:rPr lang="en-GB" smtClean="0"/>
-              <a:t>20/02/2026</a:t>
+              <a:t>17/03/2026</a:t>
             </a:fld>
             <a:endParaRPr lang="en-GB"/>
           </a:p>
@@ -996,9 +1001,12 @@
 <p:sldLayout xmlns:a="http://schemas.openxmlformats.org/drawingml/2006/main" xmlns:r="http://schemas.openxmlformats.org/officeDocument/2006/relationships" xmlns:p="http://schemas.openxmlformats.org/presentationml/2006/main" type="title" preserve="1">
   <p:cSld name="Durham Title Slide - Purple">
     <p:bg>
-      <p:bgRef idx="1001">
-        <a:schemeClr val="bg1"/>
-      </p:bgRef>
+      <p:bgPr>
+        <a:solidFill>
+          <a:srgbClr val="FFFFFF"/>
+        </a:solidFill>
+        <a:effectLst/>
+      </p:bgPr>
     </p:bg>
     <p:spTree>
       <p:nvGrpSpPr>
@@ -1041,7 +1049,7 @@
               </a:lnSpc>
               <a:defRPr sz="2800" b="1">
                 <a:solidFill>
-                  <a:srgbClr val="002A41"/>
+                  <a:schemeClr val="dk1"/>
                 </a:solidFill>
                 <a:latin typeface="Arial"/>
                 <a:cs typeface="Arial"/>
@@ -1081,7 +1089,7 @@
               <a:buNone/>
               <a:defRPr sz="2400">
                 <a:solidFill>
-                  <a:srgbClr val="002A41"/>
+                  <a:schemeClr val="dk1"/>
                 </a:solidFill>
                 <a:latin typeface="Arial"/>
                 <a:cs typeface="Arial"/>
@@ -1173,30 +1181,6 @@
           </a:p>
         </p:txBody>
       </p:sp>
-      <p:pic>
-        <p:nvPicPr>
-          <p:cNvPr id="12" name="Picture 11"/>
-          <p:cNvPicPr>
-            <a:picLocks noChangeAspect="1"/>
-          </p:cNvPicPr>
-          <p:nvPr userDrawn="1"/>
-        </p:nvPicPr>
-        <p:blipFill>
-          <a:blip r:embed="rId2"/>
-          <a:stretch>
-            <a:fillRect/>
-          </a:stretch>
-        </p:blipFill>
-        <p:spPr>
-          <a:xfrm>
-            <a:off x="255494" y="246301"/>
-            <a:ext cx="1588504" cy="659060"/>
-          </a:xfrm>
-          <a:prstGeom prst="rect">
-            <a:avLst/>
-          </a:prstGeom>
-        </p:spPr>
-      </p:pic>
       <p:sp>
         <p:nvSpPr>
           <p:cNvPr id="8" name="TextBox 7">
@@ -1242,9 +1226,17 @@
 </p:sldLayout>
 </file>
 
-<file path=ppt/slideLayouts/slideLayout2.xml><?xml version="1.0" encoding="utf-8"?>
+<file path=ppt/slideLayouts/slideLayout10.xml><?xml version="1.0" encoding="utf-8"?>
 <p:sldLayout xmlns:a="http://schemas.openxmlformats.org/drawingml/2006/main" xmlns:r="http://schemas.openxmlformats.org/officeDocument/2006/relationships" xmlns:p="http://schemas.openxmlformats.org/presentationml/2006/main" preserve="1" userDrawn="1">
   <p:cSld name="Durham Text Slide - 1 col">
+    <p:bg>
+      <p:bgPr>
+        <a:solidFill>
+          <a:srgbClr val="FFFFFF"/>
+        </a:solidFill>
+        <a:effectLst/>
+      </p:bgPr>
+    </p:bg>
     <p:spTree>
       <p:nvGrpSpPr>
         <p:cNvPr id="1" name=""/>
@@ -1298,36 +1290,6 @@
           </a:p>
         </p:txBody>
       </p:sp>
-      <p:pic>
-        <p:nvPicPr>
-          <p:cNvPr id="7" name="Picture 6"/>
-          <p:cNvPicPr>
-            <a:picLocks noChangeAspect="1"/>
-          </p:cNvPicPr>
-          <p:nvPr userDrawn="1"/>
-        </p:nvPicPr>
-        <p:blipFill>
-          <a:blip r:embed="rId2" cstate="print">
-            <a:extLst>
-              <a:ext uri="{28A0092B-C50C-407E-A947-70E740481C1C}">
-                <a14:useLocalDpi xmlns:a14="http://schemas.microsoft.com/office/drawing/2010/main"/>
-              </a:ext>
-            </a:extLst>
-          </a:blip>
-          <a:stretch>
-            <a:fillRect/>
-          </a:stretch>
-        </p:blipFill>
-        <p:spPr>
-          <a:xfrm>
-            <a:off x="238800" y="207145"/>
-            <a:ext cx="765505" cy="317603"/>
-          </a:xfrm>
-          <a:prstGeom prst="rect">
-            <a:avLst/>
-          </a:prstGeom>
-        </p:spPr>
-      </p:pic>
       <p:sp>
         <p:nvSpPr>
           <p:cNvPr id="4" name="Content Placeholder 3"/>
@@ -1442,13 +1404,1644 @@
 </p:sldLayout>
 </file>
 
+<file path=ppt/slideLayouts/slideLayout2.xml><?xml version="1.0" encoding="utf-8"?>
+<p:sldLayout xmlns:a="http://schemas.openxmlformats.org/drawingml/2006/main" xmlns:r="http://schemas.openxmlformats.org/officeDocument/2006/relationships" xmlns:p="http://schemas.openxmlformats.org/presentationml/2006/main" preserve="1" userDrawn="1">
+  <p:cSld name="Durham Text Slide - 1 col">
+    <p:bg>
+      <p:bgPr>
+        <a:solidFill>
+          <a:srgbClr val="FFFFFF"/>
+        </a:solidFill>
+        <a:effectLst/>
+      </p:bgPr>
+    </p:bg>
+    <p:spTree>
+      <p:nvGrpSpPr>
+        <p:cNvPr id="1" name=""/>
+        <p:cNvGrpSpPr/>
+        <p:nvPr/>
+      </p:nvGrpSpPr>
+      <p:grpSpPr>
+        <a:xfrm>
+          <a:off x="0" y="0"/>
+          <a:ext cx="0" cy="0"/>
+          <a:chOff x="0" y="0"/>
+          <a:chExt cx="0" cy="0"/>
+        </a:xfrm>
+      </p:grpSpPr>
+      <p:sp>
+        <p:nvSpPr>
+          <p:cNvPr id="2" name="Title 1"/>
+          <p:cNvSpPr>
+            <a:spLocks noGrp="1"/>
+          </p:cNvSpPr>
+          <p:nvPr>
+            <p:ph type="title"/>
+          </p:nvPr>
+        </p:nvSpPr>
+        <p:spPr>
+          <a:xfrm>
+            <a:off x="621553" y="277484"/>
+            <a:ext cx="7902388" cy="496239"/>
+          </a:xfrm>
+        </p:spPr>
+        <p:txBody>
+          <a:bodyPr lIns="0" tIns="0" rIns="0" bIns="0" anchor="t">
+            <a:noAutofit/>
+          </a:bodyPr>
+          <a:lstStyle>
+            <a:lvl1pPr algn="ctr">
+              <a:defRPr sz="2400" b="1">
+                <a:solidFill>
+                  <a:schemeClr val="dk1"/>
+                </a:solidFill>
+                <a:latin typeface="Arial"/>
+                <a:cs typeface="Arial"/>
+              </a:defRPr>
+            </a:lvl1pPr>
+          </a:lstStyle>
+          <a:p>
+            <a:r>
+              <a:rPr lang="en-US" dirty="0"/>
+              <a:t>Click to edit Master title style</a:t>
+            </a:r>
+          </a:p>
+        </p:txBody>
+      </p:sp>
+      <p:sp>
+        <p:nvSpPr>
+          <p:cNvPr id="4" name="Content Placeholder 3"/>
+          <p:cNvSpPr>
+            <a:spLocks noGrp="1"/>
+          </p:cNvSpPr>
+          <p:nvPr>
+            <p:ph sz="quarter" idx="11"/>
+          </p:nvPr>
+        </p:nvSpPr>
+        <p:spPr>
+          <a:xfrm>
+            <a:off x="621553" y="844062"/>
+            <a:ext cx="7902388" cy="3642528"/>
+          </a:xfrm>
+        </p:spPr>
+        <p:txBody>
+          <a:bodyPr lIns="0" tIns="0" rIns="0" bIns="0">
+            <a:noAutofit/>
+          </a:bodyPr>
+          <a:lstStyle>
+            <a:lvl1pPr marL="0" indent="0">
+              <a:spcBef>
+                <a:spcPts val="800"/>
+              </a:spcBef>
+              <a:buNone/>
+              <a:defRPr sz="1800">
+                <a:solidFill>
+                  <a:schemeClr val="dk1"/>
+                </a:solidFill>
+                <a:latin typeface="Arial"/>
+                <a:cs typeface="Arial"/>
+              </a:defRPr>
+            </a:lvl1pPr>
+            <a:lvl2pPr marL="288000" indent="-288000">
+              <a:spcBef>
+                <a:spcPts val="800"/>
+              </a:spcBef>
+              <a:buClr>
+                <a:srgbClr val="68246D"/>
+              </a:buClr>
+              <a:buFont typeface="Arial"/>
+              <a:buChar char="•"/>
+              <a:defRPr sz="1800">
+                <a:solidFill>
+                  <a:schemeClr val="dk1"/>
+                </a:solidFill>
+                <a:latin typeface="Arial"/>
+                <a:cs typeface="Arial"/>
+              </a:defRPr>
+            </a:lvl2pPr>
+            <a:lvl3pPr marL="576000" indent="-288000">
+              <a:spcBef>
+                <a:spcPts val="800"/>
+              </a:spcBef>
+              <a:buFont typeface="Lucida Grande"/>
+              <a:buChar char="–"/>
+              <a:defRPr sz="1600">
+                <a:solidFill>
+                  <a:schemeClr val="dk1"/>
+                </a:solidFill>
+                <a:latin typeface="Arial"/>
+                <a:cs typeface="Arial"/>
+              </a:defRPr>
+            </a:lvl3pPr>
+            <a:lvl4pPr>
+              <a:defRPr sz="1800">
+                <a:latin typeface="Arial"/>
+                <a:cs typeface="Arial"/>
+              </a:defRPr>
+            </a:lvl4pPr>
+            <a:lvl5pPr>
+              <a:defRPr sz="1800">
+                <a:latin typeface="Arial"/>
+                <a:cs typeface="Arial"/>
+              </a:defRPr>
+            </a:lvl5pPr>
+          </a:lstStyle>
+          <a:p>
+            <a:pPr lvl="0"/>
+            <a:r>
+              <a:rPr lang="en-US" dirty="0"/>
+              <a:t>Edit Master text styles</a:t>
+            </a:r>
+          </a:p>
+          <a:p>
+            <a:pPr lvl="1"/>
+            <a:r>
+              <a:rPr lang="en-US" dirty="0"/>
+              <a:t>Second level</a:t>
+            </a:r>
+          </a:p>
+          <a:p>
+            <a:pPr lvl="2"/>
+            <a:r>
+              <a:rPr lang="en-US" dirty="0"/>
+              <a:t>Third level</a:t>
+            </a:r>
+          </a:p>
+        </p:txBody>
+      </p:sp>
+    </p:spTree>
+    <p:extLst>
+      <p:ext uri="{BB962C8B-B14F-4D97-AF65-F5344CB8AC3E}">
+        <p14:creationId xmlns:p14="http://schemas.microsoft.com/office/powerpoint/2010/main" val="1449196509"/>
+      </p:ext>
+    </p:extLst>
+  </p:cSld>
+  <p:clrMapOvr>
+    <a:masterClrMapping/>
+  </p:clrMapOvr>
+</p:sldLayout>
+</file>
+
+<file path=ppt/slideLayouts/slideLayout3.xml><?xml version="1.0" encoding="utf-8"?>
+<p:sldLayout xmlns:a="http://schemas.openxmlformats.org/drawingml/2006/main" xmlns:r="http://schemas.openxmlformats.org/officeDocument/2006/relationships" xmlns:p="http://schemas.openxmlformats.org/presentationml/2006/main" type="title" preserve="1">
+  <p:cSld name="Durham Title Slide - Purple">
+    <p:bg>
+      <p:bgPr>
+        <a:solidFill>
+          <a:srgbClr val="FFFFFF"/>
+        </a:solidFill>
+        <a:effectLst/>
+      </p:bgPr>
+    </p:bg>
+    <p:spTree>
+      <p:nvGrpSpPr>
+        <p:cNvPr id="1" name=""/>
+        <p:cNvGrpSpPr/>
+        <p:nvPr/>
+      </p:nvGrpSpPr>
+      <p:grpSpPr>
+        <a:xfrm>
+          <a:off x="0" y="0"/>
+          <a:ext cx="0" cy="0"/>
+          <a:chOff x="0" y="0"/>
+          <a:chExt cx="0" cy="0"/>
+        </a:xfrm>
+      </p:grpSpPr>
+      <p:sp>
+        <p:nvSpPr>
+          <p:cNvPr id="2" name="Title 1"/>
+          <p:cNvSpPr>
+            <a:spLocks noGrp="1"/>
+          </p:cNvSpPr>
+          <p:nvPr>
+            <p:ph type="ctrTitle"/>
+          </p:nvPr>
+        </p:nvSpPr>
+        <p:spPr>
+          <a:xfrm>
+            <a:off x="658907" y="1252280"/>
+            <a:ext cx="7826186" cy="1102519"/>
+          </a:xfrm>
+        </p:spPr>
+        <p:txBody>
+          <a:bodyPr lIns="0" tIns="0" rIns="0" bIns="0" anchor="ctr">
+            <a:noAutofit/>
+          </a:bodyPr>
+          <a:lstStyle>
+            <a:lvl1pPr algn="ctr">
+              <a:lnSpc>
+                <a:spcPct val="85000"/>
+              </a:lnSpc>
+              <a:defRPr sz="2800" b="1">
+                <a:solidFill>
+                  <a:srgbClr val="002A41"/>
+                </a:solidFill>
+                <a:latin typeface="Arial"/>
+                <a:cs typeface="Arial"/>
+              </a:defRPr>
+            </a:lvl1pPr>
+          </a:lstStyle>
+          <a:p>
+            <a:endParaRPr lang="en-US" dirty="0"/>
+          </a:p>
+        </p:txBody>
+      </p:sp>
+      <p:sp>
+        <p:nvSpPr>
+          <p:cNvPr id="3" name="Subtitle 2"/>
+          <p:cNvSpPr>
+            <a:spLocks noGrp="1"/>
+          </p:cNvSpPr>
+          <p:nvPr>
+            <p:ph type="subTitle" idx="1"/>
+          </p:nvPr>
+        </p:nvSpPr>
+        <p:spPr>
+          <a:xfrm>
+            <a:off x="658906" y="2977658"/>
+            <a:ext cx="7826187" cy="1314450"/>
+          </a:xfrm>
+        </p:spPr>
+        <p:txBody>
+          <a:bodyPr lIns="0" tIns="0" rIns="0" bIns="0" anchor="ctr">
+            <a:noAutofit/>
+          </a:bodyPr>
+          <a:lstStyle>
+            <a:lvl1pPr marL="0" indent="0" algn="ctr">
+              <a:lnSpc>
+                <a:spcPct val="90000"/>
+              </a:lnSpc>
+              <a:buNone/>
+              <a:defRPr sz="2400">
+                <a:solidFill>
+                  <a:srgbClr val="002A41"/>
+                </a:solidFill>
+                <a:latin typeface="Arial"/>
+                <a:cs typeface="Arial"/>
+              </a:defRPr>
+            </a:lvl1pPr>
+            <a:lvl2pPr marL="457200" indent="0" algn="ctr">
+              <a:buNone/>
+              <a:defRPr>
+                <a:solidFill>
+                  <a:schemeClr val="tx1">
+                    <a:tint val="75000"/>
+                  </a:schemeClr>
+                </a:solidFill>
+              </a:defRPr>
+            </a:lvl2pPr>
+            <a:lvl3pPr marL="914400" indent="0" algn="ctr">
+              <a:buNone/>
+              <a:defRPr>
+                <a:solidFill>
+                  <a:schemeClr val="tx1">
+                    <a:tint val="75000"/>
+                  </a:schemeClr>
+                </a:solidFill>
+              </a:defRPr>
+            </a:lvl3pPr>
+            <a:lvl4pPr marL="1371600" indent="0" algn="ctr">
+              <a:buNone/>
+              <a:defRPr>
+                <a:solidFill>
+                  <a:schemeClr val="tx1">
+                    <a:tint val="75000"/>
+                  </a:schemeClr>
+                </a:solidFill>
+              </a:defRPr>
+            </a:lvl4pPr>
+            <a:lvl5pPr marL="1828800" indent="0" algn="ctr">
+              <a:buNone/>
+              <a:defRPr>
+                <a:solidFill>
+                  <a:schemeClr val="tx1">
+                    <a:tint val="75000"/>
+                  </a:schemeClr>
+                </a:solidFill>
+              </a:defRPr>
+            </a:lvl5pPr>
+            <a:lvl6pPr marL="2286000" indent="0" algn="ctr">
+              <a:buNone/>
+              <a:defRPr>
+                <a:solidFill>
+                  <a:schemeClr val="tx1">
+                    <a:tint val="75000"/>
+                  </a:schemeClr>
+                </a:solidFill>
+              </a:defRPr>
+            </a:lvl6pPr>
+            <a:lvl7pPr marL="2743200" indent="0" algn="ctr">
+              <a:buNone/>
+              <a:defRPr>
+                <a:solidFill>
+                  <a:schemeClr val="tx1">
+                    <a:tint val="75000"/>
+                  </a:schemeClr>
+                </a:solidFill>
+              </a:defRPr>
+            </a:lvl7pPr>
+            <a:lvl8pPr marL="3200400" indent="0" algn="ctr">
+              <a:buNone/>
+              <a:defRPr>
+                <a:solidFill>
+                  <a:schemeClr val="tx1">
+                    <a:tint val="75000"/>
+                  </a:schemeClr>
+                </a:solidFill>
+              </a:defRPr>
+            </a:lvl8pPr>
+            <a:lvl9pPr marL="3657600" indent="0" algn="ctr">
+              <a:buNone/>
+              <a:defRPr>
+                <a:solidFill>
+                  <a:schemeClr val="tx1">
+                    <a:tint val="75000"/>
+                  </a:schemeClr>
+                </a:solidFill>
+              </a:defRPr>
+            </a:lvl9pPr>
+          </a:lstStyle>
+          <a:p>
+            <a:endParaRPr lang="en-US" dirty="0"/>
+          </a:p>
+        </p:txBody>
+      </p:sp>
+      <p:sp>
+        <p:nvSpPr>
+          <p:cNvPr id="8" name="TextBox 7">
+            <a:extLst>
+              <a:ext uri="{FF2B5EF4-FFF2-40B4-BE49-F238E27FC236}">
+                <a16:creationId xmlns:a16="http://schemas.microsoft.com/office/drawing/2014/main" id="{2405C5DC-0311-DD3A-1694-FF867F036145}"/>
+              </a:ext>
+            </a:extLst>
+          </p:cNvPr>
+          <p:cNvSpPr txBox="1"/>
+          <p:nvPr userDrawn="1"/>
+        </p:nvSpPr>
+        <p:spPr>
+          <a:xfrm>
+            <a:off x="7145314" y="482321"/>
+            <a:ext cx="184731" cy="369332"/>
+          </a:xfrm>
+          <a:prstGeom prst="rect">
+            <a:avLst/>
+          </a:prstGeom>
+          <a:noFill/>
+        </p:spPr>
+        <p:txBody>
+          <a:bodyPr wrap="square" rtlCol="0">
+            <a:spAutoFit/>
+          </a:bodyPr>
+          <a:lstStyle/>
+          <a:p>
+            <a:endParaRPr lang="en-GB" dirty="0"/>
+          </a:p>
+        </p:txBody>
+      </p:sp>
+    </p:spTree>
+    <p:extLst>
+      <p:ext uri="{BB962C8B-B14F-4D97-AF65-F5344CB8AC3E}">
+        <p14:creationId xmlns:p14="http://schemas.microsoft.com/office/powerpoint/2010/main" val="3032838578"/>
+      </p:ext>
+    </p:extLst>
+  </p:cSld>
+  <p:clrMapOvr>
+    <a:overrideClrMapping bg1="lt1" tx1="dk1" bg2="lt2" tx2="dk2" accent1="accent1" accent2="accent2" accent3="accent3" accent4="accent4" accent5="accent5" accent6="accent6" hlink="hlink" folHlink="folHlink"/>
+  </p:clrMapOvr>
+</p:sldLayout>
+</file>
+
+<file path=ppt/slideLayouts/slideLayout4.xml><?xml version="1.0" encoding="utf-8"?>
+<p:sldLayout xmlns:a="http://schemas.openxmlformats.org/drawingml/2006/main" xmlns:r="http://schemas.openxmlformats.org/officeDocument/2006/relationships" xmlns:p="http://schemas.openxmlformats.org/presentationml/2006/main" preserve="1" userDrawn="1">
+  <p:cSld name="Durham Text Slide - 1 col">
+    <p:bg>
+      <p:bgPr>
+        <a:solidFill>
+          <a:srgbClr val="FFFFFF"/>
+        </a:solidFill>
+        <a:effectLst/>
+      </p:bgPr>
+    </p:bg>
+    <p:spTree>
+      <p:nvGrpSpPr>
+        <p:cNvPr id="1" name=""/>
+        <p:cNvGrpSpPr/>
+        <p:nvPr/>
+      </p:nvGrpSpPr>
+      <p:grpSpPr>
+        <a:xfrm>
+          <a:off x="0" y="0"/>
+          <a:ext cx="0" cy="0"/>
+          <a:chOff x="0" y="0"/>
+          <a:chExt cx="0" cy="0"/>
+        </a:xfrm>
+      </p:grpSpPr>
+      <p:sp>
+        <p:nvSpPr>
+          <p:cNvPr id="2" name="Title 1"/>
+          <p:cNvSpPr>
+            <a:spLocks noGrp="1"/>
+          </p:cNvSpPr>
+          <p:nvPr>
+            <p:ph type="title"/>
+          </p:nvPr>
+        </p:nvSpPr>
+        <p:spPr>
+          <a:xfrm>
+            <a:off x="621553" y="277484"/>
+            <a:ext cx="7902388" cy="496239"/>
+          </a:xfrm>
+        </p:spPr>
+        <p:txBody>
+          <a:bodyPr lIns="0" tIns="0" rIns="0" bIns="0" anchor="t">
+            <a:noAutofit/>
+          </a:bodyPr>
+          <a:lstStyle>
+            <a:lvl1pPr algn="ctr">
+              <a:defRPr sz="2400" b="1">
+                <a:solidFill>
+                  <a:srgbClr val="54145A"/>
+                </a:solidFill>
+                <a:latin typeface="Arial"/>
+                <a:cs typeface="Arial"/>
+              </a:defRPr>
+            </a:lvl1pPr>
+          </a:lstStyle>
+          <a:p>
+            <a:r>
+              <a:rPr lang="en-US" dirty="0"/>
+              <a:t>Click to edit Master title style</a:t>
+            </a:r>
+          </a:p>
+        </p:txBody>
+      </p:sp>
+      <p:sp>
+        <p:nvSpPr>
+          <p:cNvPr id="4" name="Content Placeholder 3"/>
+          <p:cNvSpPr>
+            <a:spLocks noGrp="1"/>
+          </p:cNvSpPr>
+          <p:nvPr>
+            <p:ph sz="quarter" idx="11"/>
+          </p:nvPr>
+        </p:nvSpPr>
+        <p:spPr>
+          <a:xfrm>
+            <a:off x="621553" y="844062"/>
+            <a:ext cx="7902388" cy="3642528"/>
+          </a:xfrm>
+        </p:spPr>
+        <p:txBody>
+          <a:bodyPr lIns="0" tIns="0" rIns="0" bIns="0">
+            <a:noAutofit/>
+          </a:bodyPr>
+          <a:lstStyle>
+            <a:lvl1pPr marL="0" indent="0">
+              <a:spcBef>
+                <a:spcPts val="800"/>
+              </a:spcBef>
+              <a:buNone/>
+              <a:defRPr sz="1800">
+                <a:solidFill>
+                  <a:srgbClr val="002A41"/>
+                </a:solidFill>
+                <a:latin typeface="Arial"/>
+                <a:cs typeface="Arial"/>
+              </a:defRPr>
+            </a:lvl1pPr>
+            <a:lvl2pPr marL="288000" indent="-288000">
+              <a:spcBef>
+                <a:spcPts val="800"/>
+              </a:spcBef>
+              <a:buClr>
+                <a:srgbClr val="68246D"/>
+              </a:buClr>
+              <a:buFont typeface="Arial"/>
+              <a:buChar char="•"/>
+              <a:defRPr sz="1800">
+                <a:solidFill>
+                  <a:srgbClr val="002A41"/>
+                </a:solidFill>
+                <a:latin typeface="Arial"/>
+                <a:cs typeface="Arial"/>
+              </a:defRPr>
+            </a:lvl2pPr>
+            <a:lvl3pPr marL="576000" indent="-288000">
+              <a:spcBef>
+                <a:spcPts val="800"/>
+              </a:spcBef>
+              <a:buFont typeface="Lucida Grande"/>
+              <a:buChar char="–"/>
+              <a:defRPr sz="1600">
+                <a:solidFill>
+                  <a:srgbClr val="002A41"/>
+                </a:solidFill>
+                <a:latin typeface="Arial"/>
+                <a:cs typeface="Arial"/>
+              </a:defRPr>
+            </a:lvl3pPr>
+            <a:lvl4pPr>
+              <a:defRPr sz="1800">
+                <a:latin typeface="Arial"/>
+                <a:cs typeface="Arial"/>
+              </a:defRPr>
+            </a:lvl4pPr>
+            <a:lvl5pPr>
+              <a:defRPr sz="1800">
+                <a:latin typeface="Arial"/>
+                <a:cs typeface="Arial"/>
+              </a:defRPr>
+            </a:lvl5pPr>
+          </a:lstStyle>
+          <a:p>
+            <a:pPr lvl="0"/>
+            <a:r>
+              <a:rPr lang="en-US" dirty="0"/>
+              <a:t>Edit Master text styles</a:t>
+            </a:r>
+          </a:p>
+          <a:p>
+            <a:pPr lvl="1"/>
+            <a:r>
+              <a:rPr lang="en-US" dirty="0"/>
+              <a:t>Second level</a:t>
+            </a:r>
+          </a:p>
+          <a:p>
+            <a:pPr lvl="2"/>
+            <a:r>
+              <a:rPr lang="en-US" dirty="0"/>
+              <a:t>Third level</a:t>
+            </a:r>
+          </a:p>
+        </p:txBody>
+      </p:sp>
+    </p:spTree>
+    <p:extLst>
+      <p:ext uri="{BB962C8B-B14F-4D97-AF65-F5344CB8AC3E}">
+        <p14:creationId xmlns:p14="http://schemas.microsoft.com/office/powerpoint/2010/main" val="1449196509"/>
+      </p:ext>
+    </p:extLst>
+  </p:cSld>
+  <p:clrMapOvr>
+    <a:masterClrMapping/>
+  </p:clrMapOvr>
+</p:sldLayout>
+</file>
+
+<file path=ppt/slideLayouts/slideLayout5.xml><?xml version="1.0" encoding="utf-8"?>
+<p:sldLayout xmlns:a="http://schemas.openxmlformats.org/drawingml/2006/main" xmlns:r="http://schemas.openxmlformats.org/officeDocument/2006/relationships" xmlns:p="http://schemas.openxmlformats.org/presentationml/2006/main" type="title" preserve="1">
+  <p:cSld name="Durham Title Slide - Purple">
+    <p:bg>
+      <p:bgPr>
+        <a:solidFill>
+          <a:srgbClr val="FFFFFF"/>
+        </a:solidFill>
+        <a:effectLst/>
+      </p:bgPr>
+    </p:bg>
+    <p:spTree>
+      <p:nvGrpSpPr>
+        <p:cNvPr id="1" name=""/>
+        <p:cNvGrpSpPr/>
+        <p:nvPr/>
+      </p:nvGrpSpPr>
+      <p:grpSpPr>
+        <a:xfrm>
+          <a:off x="0" y="0"/>
+          <a:ext cx="0" cy="0"/>
+          <a:chOff x="0" y="0"/>
+          <a:chExt cx="0" cy="0"/>
+        </a:xfrm>
+      </p:grpSpPr>
+      <p:sp>
+        <p:nvSpPr>
+          <p:cNvPr id="2" name="Title 1"/>
+          <p:cNvSpPr>
+            <a:spLocks noGrp="1"/>
+          </p:cNvSpPr>
+          <p:nvPr>
+            <p:ph type="ctrTitle"/>
+          </p:nvPr>
+        </p:nvSpPr>
+        <p:spPr>
+          <a:xfrm>
+            <a:off x="658907" y="1252280"/>
+            <a:ext cx="7826186" cy="1102519"/>
+          </a:xfrm>
+        </p:spPr>
+        <p:txBody>
+          <a:bodyPr lIns="0" tIns="0" rIns="0" bIns="0" anchor="ctr">
+            <a:noAutofit/>
+          </a:bodyPr>
+          <a:lstStyle>
+            <a:lvl1pPr algn="ctr">
+              <a:lnSpc>
+                <a:spcPct val="85000"/>
+              </a:lnSpc>
+              <a:defRPr sz="2800" b="1">
+                <a:solidFill>
+                  <a:srgbClr val="002A41"/>
+                </a:solidFill>
+                <a:latin typeface="Arial"/>
+                <a:cs typeface="Arial"/>
+              </a:defRPr>
+            </a:lvl1pPr>
+          </a:lstStyle>
+          <a:p>
+            <a:endParaRPr lang="en-US" dirty="0"/>
+          </a:p>
+        </p:txBody>
+      </p:sp>
+      <p:sp>
+        <p:nvSpPr>
+          <p:cNvPr id="3" name="Subtitle 2"/>
+          <p:cNvSpPr>
+            <a:spLocks noGrp="1"/>
+          </p:cNvSpPr>
+          <p:nvPr>
+            <p:ph type="subTitle" idx="1"/>
+          </p:nvPr>
+        </p:nvSpPr>
+        <p:spPr>
+          <a:xfrm>
+            <a:off x="658906" y="2977658"/>
+            <a:ext cx="7826187" cy="1314450"/>
+          </a:xfrm>
+        </p:spPr>
+        <p:txBody>
+          <a:bodyPr lIns="0" tIns="0" rIns="0" bIns="0" anchor="ctr">
+            <a:noAutofit/>
+          </a:bodyPr>
+          <a:lstStyle>
+            <a:lvl1pPr marL="0" indent="0" algn="ctr">
+              <a:lnSpc>
+                <a:spcPct val="90000"/>
+              </a:lnSpc>
+              <a:buNone/>
+              <a:defRPr sz="2400">
+                <a:solidFill>
+                  <a:srgbClr val="002A41"/>
+                </a:solidFill>
+                <a:latin typeface="Arial"/>
+                <a:cs typeface="Arial"/>
+              </a:defRPr>
+            </a:lvl1pPr>
+            <a:lvl2pPr marL="457200" indent="0" algn="ctr">
+              <a:buNone/>
+              <a:defRPr>
+                <a:solidFill>
+                  <a:schemeClr val="tx1">
+                    <a:tint val="75000"/>
+                  </a:schemeClr>
+                </a:solidFill>
+              </a:defRPr>
+            </a:lvl2pPr>
+            <a:lvl3pPr marL="914400" indent="0" algn="ctr">
+              <a:buNone/>
+              <a:defRPr>
+                <a:solidFill>
+                  <a:schemeClr val="tx1">
+                    <a:tint val="75000"/>
+                  </a:schemeClr>
+                </a:solidFill>
+              </a:defRPr>
+            </a:lvl3pPr>
+            <a:lvl4pPr marL="1371600" indent="0" algn="ctr">
+              <a:buNone/>
+              <a:defRPr>
+                <a:solidFill>
+                  <a:schemeClr val="tx1">
+                    <a:tint val="75000"/>
+                  </a:schemeClr>
+                </a:solidFill>
+              </a:defRPr>
+            </a:lvl4pPr>
+            <a:lvl5pPr marL="1828800" indent="0" algn="ctr">
+              <a:buNone/>
+              <a:defRPr>
+                <a:solidFill>
+                  <a:schemeClr val="tx1">
+                    <a:tint val="75000"/>
+                  </a:schemeClr>
+                </a:solidFill>
+              </a:defRPr>
+            </a:lvl5pPr>
+            <a:lvl6pPr marL="2286000" indent="0" algn="ctr">
+              <a:buNone/>
+              <a:defRPr>
+                <a:solidFill>
+                  <a:schemeClr val="tx1">
+                    <a:tint val="75000"/>
+                  </a:schemeClr>
+                </a:solidFill>
+              </a:defRPr>
+            </a:lvl6pPr>
+            <a:lvl7pPr marL="2743200" indent="0" algn="ctr">
+              <a:buNone/>
+              <a:defRPr>
+                <a:solidFill>
+                  <a:schemeClr val="tx1">
+                    <a:tint val="75000"/>
+                  </a:schemeClr>
+                </a:solidFill>
+              </a:defRPr>
+            </a:lvl7pPr>
+            <a:lvl8pPr marL="3200400" indent="0" algn="ctr">
+              <a:buNone/>
+              <a:defRPr>
+                <a:solidFill>
+                  <a:schemeClr val="tx1">
+                    <a:tint val="75000"/>
+                  </a:schemeClr>
+                </a:solidFill>
+              </a:defRPr>
+            </a:lvl8pPr>
+            <a:lvl9pPr marL="3657600" indent="0" algn="ctr">
+              <a:buNone/>
+              <a:defRPr>
+                <a:solidFill>
+                  <a:schemeClr val="tx1">
+                    <a:tint val="75000"/>
+                  </a:schemeClr>
+                </a:solidFill>
+              </a:defRPr>
+            </a:lvl9pPr>
+          </a:lstStyle>
+          <a:p>
+            <a:endParaRPr lang="en-US" dirty="0"/>
+          </a:p>
+        </p:txBody>
+      </p:sp>
+      <p:sp>
+        <p:nvSpPr>
+          <p:cNvPr id="8" name="TextBox 7">
+            <a:extLst>
+              <a:ext uri="{FF2B5EF4-FFF2-40B4-BE49-F238E27FC236}">
+                <a16:creationId xmlns:a16="http://schemas.microsoft.com/office/drawing/2014/main" id="{2405C5DC-0311-DD3A-1694-FF867F036145}"/>
+              </a:ext>
+            </a:extLst>
+          </p:cNvPr>
+          <p:cNvSpPr txBox="1"/>
+          <p:nvPr userDrawn="1"/>
+        </p:nvSpPr>
+        <p:spPr>
+          <a:xfrm>
+            <a:off x="7145314" y="482321"/>
+            <a:ext cx="184731" cy="369332"/>
+          </a:xfrm>
+          <a:prstGeom prst="rect">
+            <a:avLst/>
+          </a:prstGeom>
+          <a:noFill/>
+        </p:spPr>
+        <p:txBody>
+          <a:bodyPr wrap="square" rtlCol="0">
+            <a:spAutoFit/>
+          </a:bodyPr>
+          <a:lstStyle/>
+          <a:p>
+            <a:endParaRPr lang="en-GB" dirty="0"/>
+          </a:p>
+        </p:txBody>
+      </p:sp>
+    </p:spTree>
+    <p:extLst>
+      <p:ext uri="{BB962C8B-B14F-4D97-AF65-F5344CB8AC3E}">
+        <p14:creationId xmlns:p14="http://schemas.microsoft.com/office/powerpoint/2010/main" val="3032838578"/>
+      </p:ext>
+    </p:extLst>
+  </p:cSld>
+  <p:clrMapOvr>
+    <a:overrideClrMapping bg1="lt1" tx1="dk1" bg2="lt2" tx2="dk2" accent1="accent1" accent2="accent2" accent3="accent3" accent4="accent4" accent5="accent5" accent6="accent6" hlink="hlink" folHlink="folHlink"/>
+  </p:clrMapOvr>
+</p:sldLayout>
+</file>
+
+<file path=ppt/slideLayouts/slideLayout6.xml><?xml version="1.0" encoding="utf-8"?>
+<p:sldLayout xmlns:a="http://schemas.openxmlformats.org/drawingml/2006/main" xmlns:r="http://schemas.openxmlformats.org/officeDocument/2006/relationships" xmlns:p="http://schemas.openxmlformats.org/presentationml/2006/main" preserve="1" userDrawn="1">
+  <p:cSld name="Durham Text Slide - 1 col">
+    <p:bg>
+      <p:bgPr>
+        <a:solidFill>
+          <a:srgbClr val="FFFFFF"/>
+        </a:solidFill>
+        <a:effectLst/>
+      </p:bgPr>
+    </p:bg>
+    <p:spTree>
+      <p:nvGrpSpPr>
+        <p:cNvPr id="1" name=""/>
+        <p:cNvGrpSpPr/>
+        <p:nvPr/>
+      </p:nvGrpSpPr>
+      <p:grpSpPr>
+        <a:xfrm>
+          <a:off x="0" y="0"/>
+          <a:ext cx="0" cy="0"/>
+          <a:chOff x="0" y="0"/>
+          <a:chExt cx="0" cy="0"/>
+        </a:xfrm>
+      </p:grpSpPr>
+      <p:sp>
+        <p:nvSpPr>
+          <p:cNvPr id="2" name="Title 1"/>
+          <p:cNvSpPr>
+            <a:spLocks noGrp="1"/>
+          </p:cNvSpPr>
+          <p:nvPr>
+            <p:ph type="title"/>
+          </p:nvPr>
+        </p:nvSpPr>
+        <p:spPr>
+          <a:xfrm>
+            <a:off x="621553" y="277484"/>
+            <a:ext cx="7902388" cy="496239"/>
+          </a:xfrm>
+        </p:spPr>
+        <p:txBody>
+          <a:bodyPr lIns="0" tIns="0" rIns="0" bIns="0" anchor="t">
+            <a:noAutofit/>
+          </a:bodyPr>
+          <a:lstStyle>
+            <a:lvl1pPr algn="ctr">
+              <a:defRPr sz="2400" b="1">
+                <a:solidFill>
+                  <a:srgbClr val="54145A"/>
+                </a:solidFill>
+                <a:latin typeface="Arial"/>
+                <a:cs typeface="Arial"/>
+              </a:defRPr>
+            </a:lvl1pPr>
+          </a:lstStyle>
+          <a:p>
+            <a:r>
+              <a:rPr lang="en-US" dirty="0"/>
+              <a:t>Click to edit Master title style</a:t>
+            </a:r>
+          </a:p>
+        </p:txBody>
+      </p:sp>
+      <p:sp>
+        <p:nvSpPr>
+          <p:cNvPr id="4" name="Content Placeholder 3"/>
+          <p:cNvSpPr>
+            <a:spLocks noGrp="1"/>
+          </p:cNvSpPr>
+          <p:nvPr>
+            <p:ph sz="quarter" idx="11"/>
+          </p:nvPr>
+        </p:nvSpPr>
+        <p:spPr>
+          <a:xfrm>
+            <a:off x="621553" y="844062"/>
+            <a:ext cx="7902388" cy="3642528"/>
+          </a:xfrm>
+        </p:spPr>
+        <p:txBody>
+          <a:bodyPr lIns="0" tIns="0" rIns="0" bIns="0">
+            <a:noAutofit/>
+          </a:bodyPr>
+          <a:lstStyle>
+            <a:lvl1pPr marL="0" indent="0">
+              <a:spcBef>
+                <a:spcPts val="800"/>
+              </a:spcBef>
+              <a:buNone/>
+              <a:defRPr sz="1800">
+                <a:solidFill>
+                  <a:srgbClr val="002A41"/>
+                </a:solidFill>
+                <a:latin typeface="Arial"/>
+                <a:cs typeface="Arial"/>
+              </a:defRPr>
+            </a:lvl1pPr>
+            <a:lvl2pPr marL="288000" indent="-288000">
+              <a:spcBef>
+                <a:spcPts val="800"/>
+              </a:spcBef>
+              <a:buClr>
+                <a:srgbClr val="68246D"/>
+              </a:buClr>
+              <a:buFont typeface="Arial"/>
+              <a:buChar char="•"/>
+              <a:defRPr sz="1800">
+                <a:solidFill>
+                  <a:srgbClr val="002A41"/>
+                </a:solidFill>
+                <a:latin typeface="Arial"/>
+                <a:cs typeface="Arial"/>
+              </a:defRPr>
+            </a:lvl2pPr>
+            <a:lvl3pPr marL="576000" indent="-288000">
+              <a:spcBef>
+                <a:spcPts val="800"/>
+              </a:spcBef>
+              <a:buFont typeface="Lucida Grande"/>
+              <a:buChar char="–"/>
+              <a:defRPr sz="1600">
+                <a:solidFill>
+                  <a:srgbClr val="002A41"/>
+                </a:solidFill>
+                <a:latin typeface="Arial"/>
+                <a:cs typeface="Arial"/>
+              </a:defRPr>
+            </a:lvl3pPr>
+            <a:lvl4pPr>
+              <a:defRPr sz="1800">
+                <a:latin typeface="Arial"/>
+                <a:cs typeface="Arial"/>
+              </a:defRPr>
+            </a:lvl4pPr>
+            <a:lvl5pPr>
+              <a:defRPr sz="1800">
+                <a:latin typeface="Arial"/>
+                <a:cs typeface="Arial"/>
+              </a:defRPr>
+            </a:lvl5pPr>
+          </a:lstStyle>
+          <a:p>
+            <a:pPr lvl="0"/>
+            <a:r>
+              <a:rPr lang="en-US" dirty="0"/>
+              <a:t>Edit Master text styles</a:t>
+            </a:r>
+          </a:p>
+          <a:p>
+            <a:pPr lvl="1"/>
+            <a:r>
+              <a:rPr lang="en-US" dirty="0"/>
+              <a:t>Second level</a:t>
+            </a:r>
+          </a:p>
+          <a:p>
+            <a:pPr lvl="2"/>
+            <a:r>
+              <a:rPr lang="en-US" dirty="0"/>
+              <a:t>Third level</a:t>
+            </a:r>
+          </a:p>
+        </p:txBody>
+      </p:sp>
+    </p:spTree>
+    <p:extLst>
+      <p:ext uri="{BB962C8B-B14F-4D97-AF65-F5344CB8AC3E}">
+        <p14:creationId xmlns:p14="http://schemas.microsoft.com/office/powerpoint/2010/main" val="1449196509"/>
+      </p:ext>
+    </p:extLst>
+  </p:cSld>
+  <p:clrMapOvr>
+    <a:masterClrMapping/>
+  </p:clrMapOvr>
+</p:sldLayout>
+</file>
+
+<file path=ppt/slideLayouts/slideLayout7.xml><?xml version="1.0" encoding="utf-8"?>
+<p:sldLayout xmlns:a="http://schemas.openxmlformats.org/drawingml/2006/main" xmlns:r="http://schemas.openxmlformats.org/officeDocument/2006/relationships" xmlns:p="http://schemas.openxmlformats.org/presentationml/2006/main" type="title" preserve="1">
+  <p:cSld name="Durham Title Slide - Purple">
+    <p:bg>
+      <p:bgPr>
+        <a:solidFill>
+          <a:srgbClr val="FFFFFF"/>
+        </a:solidFill>
+        <a:effectLst/>
+      </p:bgPr>
+    </p:bg>
+    <p:spTree>
+      <p:nvGrpSpPr>
+        <p:cNvPr id="1" name=""/>
+        <p:cNvGrpSpPr/>
+        <p:nvPr/>
+      </p:nvGrpSpPr>
+      <p:grpSpPr>
+        <a:xfrm>
+          <a:off x="0" y="0"/>
+          <a:ext cx="0" cy="0"/>
+          <a:chOff x="0" y="0"/>
+          <a:chExt cx="0" cy="0"/>
+        </a:xfrm>
+      </p:grpSpPr>
+      <p:sp>
+        <p:nvSpPr>
+          <p:cNvPr id="2" name="Title 1"/>
+          <p:cNvSpPr>
+            <a:spLocks noGrp="1"/>
+          </p:cNvSpPr>
+          <p:nvPr>
+            <p:ph type="ctrTitle"/>
+          </p:nvPr>
+        </p:nvSpPr>
+        <p:spPr>
+          <a:xfrm>
+            <a:off x="658907" y="1252280"/>
+            <a:ext cx="7826186" cy="1102519"/>
+          </a:xfrm>
+        </p:spPr>
+        <p:txBody>
+          <a:bodyPr lIns="0" tIns="0" rIns="0" bIns="0" anchor="ctr">
+            <a:noAutofit/>
+          </a:bodyPr>
+          <a:lstStyle>
+            <a:lvl1pPr algn="ctr">
+              <a:lnSpc>
+                <a:spcPct val="85000"/>
+              </a:lnSpc>
+              <a:defRPr sz="2800" b="1">
+                <a:solidFill>
+                  <a:srgbClr val="002A41"/>
+                </a:solidFill>
+                <a:latin typeface="Arial"/>
+                <a:cs typeface="Arial"/>
+              </a:defRPr>
+            </a:lvl1pPr>
+          </a:lstStyle>
+          <a:p>
+            <a:endParaRPr lang="en-US" dirty="0"/>
+          </a:p>
+        </p:txBody>
+      </p:sp>
+      <p:sp>
+        <p:nvSpPr>
+          <p:cNvPr id="3" name="Subtitle 2"/>
+          <p:cNvSpPr>
+            <a:spLocks noGrp="1"/>
+          </p:cNvSpPr>
+          <p:nvPr>
+            <p:ph type="subTitle" idx="1"/>
+          </p:nvPr>
+        </p:nvSpPr>
+        <p:spPr>
+          <a:xfrm>
+            <a:off x="658906" y="2977658"/>
+            <a:ext cx="7826187" cy="1314450"/>
+          </a:xfrm>
+        </p:spPr>
+        <p:txBody>
+          <a:bodyPr lIns="0" tIns="0" rIns="0" bIns="0" anchor="ctr">
+            <a:noAutofit/>
+          </a:bodyPr>
+          <a:lstStyle>
+            <a:lvl1pPr marL="0" indent="0" algn="ctr">
+              <a:lnSpc>
+                <a:spcPct val="90000"/>
+              </a:lnSpc>
+              <a:buNone/>
+              <a:defRPr sz="2400">
+                <a:solidFill>
+                  <a:srgbClr val="002A41"/>
+                </a:solidFill>
+                <a:latin typeface="Arial"/>
+                <a:cs typeface="Arial"/>
+              </a:defRPr>
+            </a:lvl1pPr>
+            <a:lvl2pPr marL="457200" indent="0" algn="ctr">
+              <a:buNone/>
+              <a:defRPr>
+                <a:solidFill>
+                  <a:schemeClr val="tx1">
+                    <a:tint val="75000"/>
+                  </a:schemeClr>
+                </a:solidFill>
+              </a:defRPr>
+            </a:lvl2pPr>
+            <a:lvl3pPr marL="914400" indent="0" algn="ctr">
+              <a:buNone/>
+              <a:defRPr>
+                <a:solidFill>
+                  <a:schemeClr val="tx1">
+                    <a:tint val="75000"/>
+                  </a:schemeClr>
+                </a:solidFill>
+              </a:defRPr>
+            </a:lvl3pPr>
+            <a:lvl4pPr marL="1371600" indent="0" algn="ctr">
+              <a:buNone/>
+              <a:defRPr>
+                <a:solidFill>
+                  <a:schemeClr val="tx1">
+                    <a:tint val="75000"/>
+                  </a:schemeClr>
+                </a:solidFill>
+              </a:defRPr>
+            </a:lvl4pPr>
+            <a:lvl5pPr marL="1828800" indent="0" algn="ctr">
+              <a:buNone/>
+              <a:defRPr>
+                <a:solidFill>
+                  <a:schemeClr val="tx1">
+                    <a:tint val="75000"/>
+                  </a:schemeClr>
+                </a:solidFill>
+              </a:defRPr>
+            </a:lvl5pPr>
+            <a:lvl6pPr marL="2286000" indent="0" algn="ctr">
+              <a:buNone/>
+              <a:defRPr>
+                <a:solidFill>
+                  <a:schemeClr val="tx1">
+                    <a:tint val="75000"/>
+                  </a:schemeClr>
+                </a:solidFill>
+              </a:defRPr>
+            </a:lvl6pPr>
+            <a:lvl7pPr marL="2743200" indent="0" algn="ctr">
+              <a:buNone/>
+              <a:defRPr>
+                <a:solidFill>
+                  <a:schemeClr val="tx1">
+                    <a:tint val="75000"/>
+                  </a:schemeClr>
+                </a:solidFill>
+              </a:defRPr>
+            </a:lvl7pPr>
+            <a:lvl8pPr marL="3200400" indent="0" algn="ctr">
+              <a:buNone/>
+              <a:defRPr>
+                <a:solidFill>
+                  <a:schemeClr val="tx1">
+                    <a:tint val="75000"/>
+                  </a:schemeClr>
+                </a:solidFill>
+              </a:defRPr>
+            </a:lvl8pPr>
+            <a:lvl9pPr marL="3657600" indent="0" algn="ctr">
+              <a:buNone/>
+              <a:defRPr>
+                <a:solidFill>
+                  <a:schemeClr val="tx1">
+                    <a:tint val="75000"/>
+                  </a:schemeClr>
+                </a:solidFill>
+              </a:defRPr>
+            </a:lvl9pPr>
+          </a:lstStyle>
+          <a:p>
+            <a:endParaRPr lang="en-US" dirty="0"/>
+          </a:p>
+        </p:txBody>
+      </p:sp>
+      <p:sp>
+        <p:nvSpPr>
+          <p:cNvPr id="8" name="TextBox 7">
+            <a:extLst>
+              <a:ext uri="{FF2B5EF4-FFF2-40B4-BE49-F238E27FC236}">
+                <a16:creationId xmlns:a16="http://schemas.microsoft.com/office/drawing/2014/main" id="{2405C5DC-0311-DD3A-1694-FF867F036145}"/>
+              </a:ext>
+            </a:extLst>
+          </p:cNvPr>
+          <p:cNvSpPr txBox="1"/>
+          <p:nvPr userDrawn="1"/>
+        </p:nvSpPr>
+        <p:spPr>
+          <a:xfrm>
+            <a:off x="7145314" y="482321"/>
+            <a:ext cx="184731" cy="369332"/>
+          </a:xfrm>
+          <a:prstGeom prst="rect">
+            <a:avLst/>
+          </a:prstGeom>
+          <a:noFill/>
+        </p:spPr>
+        <p:txBody>
+          <a:bodyPr wrap="square" rtlCol="0">
+            <a:spAutoFit/>
+          </a:bodyPr>
+          <a:lstStyle/>
+          <a:p>
+            <a:endParaRPr lang="en-GB" dirty="0"/>
+          </a:p>
+        </p:txBody>
+      </p:sp>
+    </p:spTree>
+    <p:extLst>
+      <p:ext uri="{BB962C8B-B14F-4D97-AF65-F5344CB8AC3E}">
+        <p14:creationId xmlns:p14="http://schemas.microsoft.com/office/powerpoint/2010/main" val="3032838578"/>
+      </p:ext>
+    </p:extLst>
+  </p:cSld>
+  <p:clrMapOvr>
+    <a:overrideClrMapping bg1="lt1" tx1="dk1" bg2="lt2" tx2="dk2" accent1="accent1" accent2="accent2" accent3="accent3" accent4="accent4" accent5="accent5" accent6="accent6" hlink="hlink" folHlink="folHlink"/>
+  </p:clrMapOvr>
+</p:sldLayout>
+</file>
+
+<file path=ppt/slideLayouts/slideLayout8.xml><?xml version="1.0" encoding="utf-8"?>
+<p:sldLayout xmlns:a="http://schemas.openxmlformats.org/drawingml/2006/main" xmlns:r="http://schemas.openxmlformats.org/officeDocument/2006/relationships" xmlns:p="http://schemas.openxmlformats.org/presentationml/2006/main" preserve="1" userDrawn="1">
+  <p:cSld name="Durham Text Slide - 1 col">
+    <p:bg>
+      <p:bgPr>
+        <a:solidFill>
+          <a:srgbClr val="FFFFFF"/>
+        </a:solidFill>
+        <a:effectLst/>
+      </p:bgPr>
+    </p:bg>
+    <p:spTree>
+      <p:nvGrpSpPr>
+        <p:cNvPr id="1" name=""/>
+        <p:cNvGrpSpPr/>
+        <p:nvPr/>
+      </p:nvGrpSpPr>
+      <p:grpSpPr>
+        <a:xfrm>
+          <a:off x="0" y="0"/>
+          <a:ext cx="0" cy="0"/>
+          <a:chOff x="0" y="0"/>
+          <a:chExt cx="0" cy="0"/>
+        </a:xfrm>
+      </p:grpSpPr>
+      <p:sp>
+        <p:nvSpPr>
+          <p:cNvPr id="2" name="Title 1"/>
+          <p:cNvSpPr>
+            <a:spLocks noGrp="1"/>
+          </p:cNvSpPr>
+          <p:nvPr>
+            <p:ph type="title"/>
+          </p:nvPr>
+        </p:nvSpPr>
+        <p:spPr>
+          <a:xfrm>
+            <a:off x="621553" y="277484"/>
+            <a:ext cx="7902388" cy="496239"/>
+          </a:xfrm>
+        </p:spPr>
+        <p:txBody>
+          <a:bodyPr lIns="0" tIns="0" rIns="0" bIns="0" anchor="t">
+            <a:noAutofit/>
+          </a:bodyPr>
+          <a:lstStyle>
+            <a:lvl1pPr algn="ctr">
+              <a:defRPr sz="2400" b="1">
+                <a:solidFill>
+                  <a:srgbClr val="54145A"/>
+                </a:solidFill>
+                <a:latin typeface="Arial"/>
+                <a:cs typeface="Arial"/>
+              </a:defRPr>
+            </a:lvl1pPr>
+          </a:lstStyle>
+          <a:p>
+            <a:r>
+              <a:rPr lang="en-US" dirty="0"/>
+              <a:t>Click to edit Master title style</a:t>
+            </a:r>
+          </a:p>
+        </p:txBody>
+      </p:sp>
+      <p:sp>
+        <p:nvSpPr>
+          <p:cNvPr id="4" name="Content Placeholder 3"/>
+          <p:cNvSpPr>
+            <a:spLocks noGrp="1"/>
+          </p:cNvSpPr>
+          <p:nvPr>
+            <p:ph sz="quarter" idx="11"/>
+          </p:nvPr>
+        </p:nvSpPr>
+        <p:spPr>
+          <a:xfrm>
+            <a:off x="621553" y="844062"/>
+            <a:ext cx="7902388" cy="3642528"/>
+          </a:xfrm>
+        </p:spPr>
+        <p:txBody>
+          <a:bodyPr lIns="0" tIns="0" rIns="0" bIns="0">
+            <a:noAutofit/>
+          </a:bodyPr>
+          <a:lstStyle>
+            <a:lvl1pPr marL="0" indent="0">
+              <a:spcBef>
+                <a:spcPts val="800"/>
+              </a:spcBef>
+              <a:buNone/>
+              <a:defRPr sz="1800">
+                <a:solidFill>
+                  <a:srgbClr val="002A41"/>
+                </a:solidFill>
+                <a:latin typeface="Arial"/>
+                <a:cs typeface="Arial"/>
+              </a:defRPr>
+            </a:lvl1pPr>
+            <a:lvl2pPr marL="288000" indent="-288000">
+              <a:spcBef>
+                <a:spcPts val="800"/>
+              </a:spcBef>
+              <a:buClr>
+                <a:srgbClr val="68246D"/>
+              </a:buClr>
+              <a:buFont typeface="Arial"/>
+              <a:buChar char="•"/>
+              <a:defRPr sz="1800">
+                <a:solidFill>
+                  <a:srgbClr val="002A41"/>
+                </a:solidFill>
+                <a:latin typeface="Arial"/>
+                <a:cs typeface="Arial"/>
+              </a:defRPr>
+            </a:lvl2pPr>
+            <a:lvl3pPr marL="576000" indent="-288000">
+              <a:spcBef>
+                <a:spcPts val="800"/>
+              </a:spcBef>
+              <a:buFont typeface="Lucida Grande"/>
+              <a:buChar char="–"/>
+              <a:defRPr sz="1600">
+                <a:solidFill>
+                  <a:srgbClr val="002A41"/>
+                </a:solidFill>
+                <a:latin typeface="Arial"/>
+                <a:cs typeface="Arial"/>
+              </a:defRPr>
+            </a:lvl3pPr>
+            <a:lvl4pPr>
+              <a:defRPr sz="1800">
+                <a:latin typeface="Arial"/>
+                <a:cs typeface="Arial"/>
+              </a:defRPr>
+            </a:lvl4pPr>
+            <a:lvl5pPr>
+              <a:defRPr sz="1800">
+                <a:latin typeface="Arial"/>
+                <a:cs typeface="Arial"/>
+              </a:defRPr>
+            </a:lvl5pPr>
+          </a:lstStyle>
+          <a:p>
+            <a:pPr lvl="0"/>
+            <a:r>
+              <a:rPr lang="en-US" dirty="0"/>
+              <a:t>Edit Master text styles</a:t>
+            </a:r>
+          </a:p>
+          <a:p>
+            <a:pPr lvl="1"/>
+            <a:r>
+              <a:rPr lang="en-US" dirty="0"/>
+              <a:t>Second level</a:t>
+            </a:r>
+          </a:p>
+          <a:p>
+            <a:pPr lvl="2"/>
+            <a:r>
+              <a:rPr lang="en-US" dirty="0"/>
+              <a:t>Third level</a:t>
+            </a:r>
+          </a:p>
+        </p:txBody>
+      </p:sp>
+    </p:spTree>
+    <p:extLst>
+      <p:ext uri="{BB962C8B-B14F-4D97-AF65-F5344CB8AC3E}">
+        <p14:creationId xmlns:p14="http://schemas.microsoft.com/office/powerpoint/2010/main" val="1449196509"/>
+      </p:ext>
+    </p:extLst>
+  </p:cSld>
+  <p:clrMapOvr>
+    <a:masterClrMapping/>
+  </p:clrMapOvr>
+</p:sldLayout>
+</file>
+
+<file path=ppt/slideLayouts/slideLayout9.xml><?xml version="1.0" encoding="utf-8"?>
+<p:sldLayout xmlns:a="http://schemas.openxmlformats.org/drawingml/2006/main" xmlns:r="http://schemas.openxmlformats.org/officeDocument/2006/relationships" xmlns:p="http://schemas.openxmlformats.org/presentationml/2006/main" type="title" preserve="1">
+  <p:cSld name="Durham Title Slide - Purple">
+    <p:bg>
+      <p:bgPr>
+        <a:solidFill>
+          <a:srgbClr val="FFFFFF"/>
+        </a:solidFill>
+        <a:effectLst/>
+      </p:bgPr>
+    </p:bg>
+    <p:spTree>
+      <p:nvGrpSpPr>
+        <p:cNvPr id="1" name=""/>
+        <p:cNvGrpSpPr/>
+        <p:nvPr/>
+      </p:nvGrpSpPr>
+      <p:grpSpPr>
+        <a:xfrm>
+          <a:off x="0" y="0"/>
+          <a:ext cx="0" cy="0"/>
+          <a:chOff x="0" y="0"/>
+          <a:chExt cx="0" cy="0"/>
+        </a:xfrm>
+      </p:grpSpPr>
+      <p:sp>
+        <p:nvSpPr>
+          <p:cNvPr id="2" name="Title 1"/>
+          <p:cNvSpPr>
+            <a:spLocks noGrp="1"/>
+          </p:cNvSpPr>
+          <p:nvPr>
+            <p:ph type="ctrTitle"/>
+          </p:nvPr>
+        </p:nvSpPr>
+        <p:spPr>
+          <a:xfrm>
+            <a:off x="658907" y="1252280"/>
+            <a:ext cx="7826186" cy="1102519"/>
+          </a:xfrm>
+        </p:spPr>
+        <p:txBody>
+          <a:bodyPr lIns="0" tIns="0" rIns="0" bIns="0" anchor="ctr">
+            <a:noAutofit/>
+          </a:bodyPr>
+          <a:lstStyle>
+            <a:lvl1pPr algn="ctr">
+              <a:lnSpc>
+                <a:spcPct val="85000"/>
+              </a:lnSpc>
+              <a:defRPr sz="2800" b="1">
+                <a:solidFill>
+                  <a:srgbClr val="002A41"/>
+                </a:solidFill>
+                <a:latin typeface="Arial"/>
+                <a:cs typeface="Arial"/>
+              </a:defRPr>
+            </a:lvl1pPr>
+          </a:lstStyle>
+          <a:p>
+            <a:endParaRPr lang="en-US" dirty="0"/>
+          </a:p>
+        </p:txBody>
+      </p:sp>
+      <p:sp>
+        <p:nvSpPr>
+          <p:cNvPr id="3" name="Subtitle 2"/>
+          <p:cNvSpPr>
+            <a:spLocks noGrp="1"/>
+          </p:cNvSpPr>
+          <p:nvPr>
+            <p:ph type="subTitle" idx="1"/>
+          </p:nvPr>
+        </p:nvSpPr>
+        <p:spPr>
+          <a:xfrm>
+            <a:off x="658906" y="2977658"/>
+            <a:ext cx="7826187" cy="1314450"/>
+          </a:xfrm>
+        </p:spPr>
+        <p:txBody>
+          <a:bodyPr lIns="0" tIns="0" rIns="0" bIns="0" anchor="ctr">
+            <a:noAutofit/>
+          </a:bodyPr>
+          <a:lstStyle>
+            <a:lvl1pPr marL="0" indent="0" algn="ctr">
+              <a:lnSpc>
+                <a:spcPct val="90000"/>
+              </a:lnSpc>
+              <a:buNone/>
+              <a:defRPr sz="2400">
+                <a:solidFill>
+                  <a:srgbClr val="002A41"/>
+                </a:solidFill>
+                <a:latin typeface="Arial"/>
+                <a:cs typeface="Arial"/>
+              </a:defRPr>
+            </a:lvl1pPr>
+            <a:lvl2pPr marL="457200" indent="0" algn="ctr">
+              <a:buNone/>
+              <a:defRPr>
+                <a:solidFill>
+                  <a:schemeClr val="tx1">
+                    <a:tint val="75000"/>
+                  </a:schemeClr>
+                </a:solidFill>
+              </a:defRPr>
+            </a:lvl2pPr>
+            <a:lvl3pPr marL="914400" indent="0" algn="ctr">
+              <a:buNone/>
+              <a:defRPr>
+                <a:solidFill>
+                  <a:schemeClr val="tx1">
+                    <a:tint val="75000"/>
+                  </a:schemeClr>
+                </a:solidFill>
+              </a:defRPr>
+            </a:lvl3pPr>
+            <a:lvl4pPr marL="1371600" indent="0" algn="ctr">
+              <a:buNone/>
+              <a:defRPr>
+                <a:solidFill>
+                  <a:schemeClr val="tx1">
+                    <a:tint val="75000"/>
+                  </a:schemeClr>
+                </a:solidFill>
+              </a:defRPr>
+            </a:lvl4pPr>
+            <a:lvl5pPr marL="1828800" indent="0" algn="ctr">
+              <a:buNone/>
+              <a:defRPr>
+                <a:solidFill>
+                  <a:schemeClr val="tx1">
+                    <a:tint val="75000"/>
+                  </a:schemeClr>
+                </a:solidFill>
+              </a:defRPr>
+            </a:lvl5pPr>
+            <a:lvl6pPr marL="2286000" indent="0" algn="ctr">
+              <a:buNone/>
+              <a:defRPr>
+                <a:solidFill>
+                  <a:schemeClr val="tx1">
+                    <a:tint val="75000"/>
+                  </a:schemeClr>
+                </a:solidFill>
+              </a:defRPr>
+            </a:lvl6pPr>
+            <a:lvl7pPr marL="2743200" indent="0" algn="ctr">
+              <a:buNone/>
+              <a:defRPr>
+                <a:solidFill>
+                  <a:schemeClr val="tx1">
+                    <a:tint val="75000"/>
+                  </a:schemeClr>
+                </a:solidFill>
+              </a:defRPr>
+            </a:lvl7pPr>
+            <a:lvl8pPr marL="3200400" indent="0" algn="ctr">
+              <a:buNone/>
+              <a:defRPr>
+                <a:solidFill>
+                  <a:schemeClr val="tx1">
+                    <a:tint val="75000"/>
+                  </a:schemeClr>
+                </a:solidFill>
+              </a:defRPr>
+            </a:lvl8pPr>
+            <a:lvl9pPr marL="3657600" indent="0" algn="ctr">
+              <a:buNone/>
+              <a:defRPr>
+                <a:solidFill>
+                  <a:schemeClr val="tx1">
+                    <a:tint val="75000"/>
+                  </a:schemeClr>
+                </a:solidFill>
+              </a:defRPr>
+            </a:lvl9pPr>
+          </a:lstStyle>
+          <a:p>
+            <a:endParaRPr lang="en-US" dirty="0"/>
+          </a:p>
+        </p:txBody>
+      </p:sp>
+      <p:sp>
+        <p:nvSpPr>
+          <p:cNvPr id="8" name="TextBox 7">
+            <a:extLst>
+              <a:ext uri="{FF2B5EF4-FFF2-40B4-BE49-F238E27FC236}">
+                <a16:creationId xmlns:a16="http://schemas.microsoft.com/office/drawing/2014/main" id="{2405C5DC-0311-DD3A-1694-FF867F036145}"/>
+              </a:ext>
+            </a:extLst>
+          </p:cNvPr>
+          <p:cNvSpPr txBox="1"/>
+          <p:nvPr userDrawn="1"/>
+        </p:nvSpPr>
+        <p:spPr>
+          <a:xfrm>
+            <a:off x="7145314" y="482321"/>
+            <a:ext cx="184731" cy="369332"/>
+          </a:xfrm>
+          <a:prstGeom prst="rect">
+            <a:avLst/>
+          </a:prstGeom>
+          <a:noFill/>
+        </p:spPr>
+        <p:txBody>
+          <a:bodyPr wrap="square" rtlCol="0">
+            <a:spAutoFit/>
+          </a:bodyPr>
+          <a:lstStyle/>
+          <a:p>
+            <a:endParaRPr lang="en-GB" dirty="0"/>
+          </a:p>
+        </p:txBody>
+      </p:sp>
+    </p:spTree>
+    <p:extLst>
+      <p:ext uri="{BB962C8B-B14F-4D97-AF65-F5344CB8AC3E}">
+        <p14:creationId xmlns:p14="http://schemas.microsoft.com/office/powerpoint/2010/main" val="3032838578"/>
+      </p:ext>
+    </p:extLst>
+  </p:cSld>
+  <p:clrMapOvr>
+    <a:overrideClrMapping bg1="lt1" tx1="dk1" bg2="lt2" tx2="dk2" accent1="accent1" accent2="accent2" accent3="accent3" accent4="accent4" accent5="accent5" accent6="accent6" hlink="hlink" folHlink="folHlink"/>
+  </p:clrMapOvr>
+</p:sldLayout>
+</file>
+
 <file path=ppt/slideMasters/slideMaster1.xml><?xml version="1.0" encoding="utf-8"?>
 <p:sldMaster xmlns:a="http://schemas.openxmlformats.org/drawingml/2006/main" xmlns:r="http://schemas.openxmlformats.org/officeDocument/2006/relationships" xmlns:p="http://schemas.openxmlformats.org/presentationml/2006/main">
   <p:cSld>
     <p:bg>
-      <p:bgRef idx="1001">
-        <a:schemeClr val="bg1"/>
-      </p:bgRef>
+      <p:bgPr>
+        <a:solidFill>
+          <a:srgbClr val="FFFFFF"/>
+        </a:solidFill>
+        <a:effectLst/>
+      </p:bgPr>
     </p:bg>
     <p:spTree>
       <p:nvGrpSpPr>
@@ -1592,7 +3185,7 @@
           <a:p>
             <a:fld id="{E05189BA-01D0-0648-AF2A-6B4CD6B57EC9}" type="datetimeFigureOut">
               <a:rPr lang="en-US" smtClean="0"/>
-              <a:t>2/20/2026</a:t>
+              <a:t>3/17/2026</a:t>
             </a:fld>
             <a:endParaRPr lang="en-US"/>
           </a:p>
@@ -1676,6 +3269,35 @@
           </a:p>
         </p:txBody>
       </p:sp>
+      <p:sp>
+        <p:nvSpPr>
+          <p:cNvPr id="200" name="BottomAccent"/>
+          <p:cNvSpPr/>
+          <p:nvPr/>
+        </p:nvSpPr>
+        <p:spPr>
+          <a:xfrm>
+            <a:off x="0" y="5029200"/>
+            <a:ext cx="9144000" cy="114300"/>
+          </a:xfrm>
+          <a:prstGeom prst="rect">
+            <a:avLst/>
+          </a:prstGeom>
+          <a:solidFill>
+            <a:srgbClr val="C45B28"/>
+          </a:solidFill>
+          <a:ln>
+            <a:noFill/>
+          </a:ln>
+        </p:spPr>
+        <p:txBody>
+          <a:bodyPr/>
+          <a:lstStyle/>
+          <a:p>
+            <a:endParaRPr lang="en-US"/>
+          </a:p>
+        </p:txBody>
+      </p:sp>
     </p:spTree>
     <p:extLst>
       <p:ext uri="{BB962C8B-B14F-4D97-AF65-F5344CB8AC3E}">
@@ -1685,8 +3307,16 @@
   </p:cSld>
   <p:clrMap bg1="lt1" tx1="dk1" bg2="lt2" tx2="dk2" accent1="accent1" accent2="accent2" accent3="accent3" accent4="accent4" accent5="accent5" accent6="accent6" hlink="hlink" folHlink="folHlink"/>
   <p:sldLayoutIdLst>
-    <p:sldLayoutId id="2147483653" r:id="rId1"/>
-    <p:sldLayoutId id="2147483652" r:id="rId2"/>
+    <p:sldLayoutId id="2147483681" r:id="rId1"/>
+    <p:sldLayoutId id="2147483682" r:id="rId2"/>
+    <p:sldLayoutId id="2147483683" r:id="rId3"/>
+    <p:sldLayoutId id="2147483684" r:id="rId4"/>
+    <p:sldLayoutId id="2147483685" r:id="rId5"/>
+    <p:sldLayoutId id="2147483686" r:id="rId6"/>
+    <p:sldLayoutId id="2147483687" r:id="rId7"/>
+    <p:sldLayoutId id="2147483688" r:id="rId8"/>
+    <p:sldLayoutId id="2147483689" r:id="rId9"/>
+    <p:sldLayoutId id="2147483690" r:id="rId10"/>
   </p:sldLayoutIdLst>
   <p:txStyles>
     <p:titleStyle>
@@ -1697,7 +3327,7 @@
         <a:buNone/>
         <a:defRPr sz="4400" kern="1200">
           <a:solidFill>
-            <a:schemeClr val="tx1"/>
+            <a:srgbClr val="1A1A2E"/>
           </a:solidFill>
           <a:latin typeface="+mj-lt"/>
           <a:ea typeface="+mj-ea"/>
@@ -1714,7 +3344,7 @@
         <a:buChar char="•"/>
         <a:defRPr sz="3200" kern="1200">
           <a:solidFill>
-            <a:schemeClr val="tx1"/>
+            <a:srgbClr val="1A1A2E"/>
           </a:solidFill>
           <a:latin typeface="+mn-lt"/>
           <a:ea typeface="+mn-ea"/>
@@ -1729,7 +3359,7 @@
         <a:buChar char="–"/>
         <a:defRPr sz="2800" kern="1200">
           <a:solidFill>
-            <a:schemeClr val="tx1"/>
+            <a:srgbClr val="1A1A2E"/>
           </a:solidFill>
           <a:latin typeface="+mn-lt"/>
           <a:ea typeface="+mn-ea"/>
@@ -1744,7 +3374,7 @@
         <a:buChar char="•"/>
         <a:defRPr sz="2000" kern="1200">
           <a:solidFill>
-            <a:schemeClr val="tx1"/>
+            <a:srgbClr val="1A1A2E"/>
           </a:solidFill>
           <a:latin typeface="+mn-lt"/>
           <a:ea typeface="+mn-ea"/>
@@ -1759,7 +3389,7 @@
         <a:buChar char="–"/>
         <a:defRPr sz="1600" kern="1200">
           <a:solidFill>
-            <a:schemeClr val="tx1"/>
+            <a:srgbClr val="1A1A2E"/>
           </a:solidFill>
           <a:latin typeface="+mn-lt"/>
           <a:ea typeface="+mn-ea"/>
@@ -1774,7 +3404,7 @@
         <a:buChar char="»"/>
         <a:defRPr sz="1400" kern="1200">
           <a:solidFill>
-            <a:schemeClr val="tx1"/>
+            <a:srgbClr val="1A1A2E"/>
           </a:solidFill>
           <a:latin typeface="+mn-lt"/>
           <a:ea typeface="+mn-ea"/>
@@ -1849,7 +3479,7 @@
       <a:lvl1pPr marL="0" algn="l" defTabSz="457200" rtl="0" eaLnBrk="1" latinLnBrk="0" hangingPunct="1">
         <a:defRPr sz="1800" kern="1200">
           <a:solidFill>
-            <a:schemeClr val="tx1"/>
+            <a:srgbClr val="1A1A2E"/>
           </a:solidFill>
           <a:latin typeface="+mn-lt"/>
           <a:ea typeface="+mn-ea"/>
@@ -1859,7 +3489,7 @@
       <a:lvl2pPr marL="457200" algn="l" defTabSz="457200" rtl="0" eaLnBrk="1" latinLnBrk="0" hangingPunct="1">
         <a:defRPr sz="1800" kern="1200">
           <a:solidFill>
-            <a:schemeClr val="tx1"/>
+            <a:srgbClr val="1A1A2E"/>
           </a:solidFill>
           <a:latin typeface="+mn-lt"/>
           <a:ea typeface="+mn-ea"/>
@@ -1869,7 +3499,7 @@
       <a:lvl3pPr marL="914400" algn="l" defTabSz="457200" rtl="0" eaLnBrk="1" latinLnBrk="0" hangingPunct="1">
         <a:defRPr sz="1800" kern="1200">
           <a:solidFill>
-            <a:schemeClr val="tx1"/>
+            <a:srgbClr val="1A1A2E"/>
           </a:solidFill>
           <a:latin typeface="+mn-lt"/>
           <a:ea typeface="+mn-ea"/>
@@ -1879,7 +3509,7 @@
       <a:lvl4pPr marL="1371600" algn="l" defTabSz="457200" rtl="0" eaLnBrk="1" latinLnBrk="0" hangingPunct="1">
         <a:defRPr sz="1800" kern="1200">
           <a:solidFill>
-            <a:schemeClr val="tx1"/>
+            <a:srgbClr val="1A1A2E"/>
           </a:solidFill>
           <a:latin typeface="+mn-lt"/>
           <a:ea typeface="+mn-ea"/>
@@ -1889,7 +3519,7 @@
       <a:lvl5pPr marL="1828800" algn="l" defTabSz="457200" rtl="0" eaLnBrk="1" latinLnBrk="0" hangingPunct="1">
         <a:defRPr sz="1800" kern="1200">
           <a:solidFill>
-            <a:schemeClr val="tx1"/>
+            <a:srgbClr val="1A1A2E"/>
           </a:solidFill>
           <a:latin typeface="+mn-lt"/>
           <a:ea typeface="+mn-ea"/>
@@ -1944,6 +3574,16 @@
 <file path=ppt/slides/slide1.xml><?xml version="1.0" encoding="utf-8"?>
 <p:sld xmlns:a="http://schemas.openxmlformats.org/drawingml/2006/main" xmlns:r="http://schemas.openxmlformats.org/officeDocument/2006/relationships" xmlns:p="http://schemas.openxmlformats.org/presentationml/2006/main">
   <p:cSld>
+    <p:bg>
+      <p:bgPr>
+        <a:solidFill>
+          <a:srgbClr val="FFFFFF">
+            <a:alpha val="100000"/>
+          </a:srgbClr>
+        </a:solidFill>
+        <a:effectLst/>
+      </p:bgPr>
+    </p:bg>
     <p:spTree>
       <p:nvGrpSpPr>
         <p:cNvPr id="1" name=""/>
@@ -1968,13 +3608,42 @@
             <p:ph type="ctrTitle"/>
           </p:nvPr>
         </p:nvSpPr>
-        <p:spPr/>
+        <p:spPr>
+          <a:xfrm>
+            <a:off x="685800" y="1524000"/>
+            <a:ext cx="7772400" cy="1143000"/>
+          </a:xfrm>
+        </p:spPr>
         <p:txBody>
-          <a:bodyPr/>
+          <a:bodyPr anchor="ctr" anchorCtr="0">
+            <a:noAutofit/>
+          </a:bodyPr>
           <a:lstStyle/>
           <a:p>
-            <a:r>
-              <a:t>A Beginner's Guide to AI (Beyond ChatGPT)</a:t>
+            <a:pPr algn="ctr">
+              <a:buNone/>
+            </a:pPr>
+            <a:r>
+              <a:rPr lang="en-US" sz="3400" b="1" dirty="0">
+                <a:solidFill>
+                  <a:schemeClr val="dk1"/>
+                </a:solidFill>
+              </a:rPr>
+              <a:t>A Beginner's Guide to AI</a:t>
+            </a:r>
+          </a:p>
+          <a:p>
+            <a:pPr algn="ctr">
+              <a:buNone/>
+            </a:pPr>
+            <a:r>
+              <a:rPr lang="en-US" sz="2600" dirty="0">
+                <a:solidFill>
+                  <a:schemeClr val="dk1"/>
+                </a:solidFill>
+                <a:latin typeface="+mj-lt"/>
+              </a:rPr>
+              <a:t>(Beyond ChatGPT)</a:t>
             </a:r>
           </a:p>
         </p:txBody>
@@ -1991,30 +3660,70 @@
         </p:nvSpPr>
         <p:spPr>
           <a:xfrm>
-            <a:off x="514723" y="2846175"/>
-            <a:ext cx="8114553" cy="1456883"/>
+            <a:off x="685800" y="3048000"/>
+            <a:ext cx="7772400" cy="635000"/>
           </a:xfrm>
+        </p:spPr>
+        <p:txBody>
+          <a:bodyPr anchor="ctr" anchorCtr="0">
+            <a:noAutofit/>
+          </a:bodyPr>
+          <a:lstStyle/>
+          <a:p>
+            <a:pPr algn="ctr">
+              <a:buNone/>
+            </a:pPr>
+            <a:r>
+              <a:rPr lang="en-US" sz="1800" dirty="0"/>
+              <a:t>david.chivers.co.uk/</a:t>
+            </a:r>
+            <a:r>
+              <a:rPr lang="en-US" sz="1800" dirty="0" err="1"/>
+              <a:t>ai_install</a:t>
+            </a:r>
+            <a:endParaRPr lang="en-US" sz="1800" dirty="0">
+              <a:solidFill>
+                <a:schemeClr val="dk1"/>
+              </a:solidFill>
+            </a:endParaRPr>
+          </a:p>
+        </p:txBody>
+      </p:sp>
+      <p:sp>
+        <p:nvSpPr>
+          <p:cNvPr id="50" name="AccentLine"/>
+          <p:cNvSpPr/>
+          <p:nvPr/>
+        </p:nvSpPr>
+        <p:spPr>
+          <a:xfrm>
+            <a:off x="2971800" y="2914650"/>
+            <a:ext cx="3200400" cy="0"/>
+          </a:xfrm>
+          <a:prstGeom prst="line">
+            <a:avLst/>
+          </a:prstGeom>
+          <a:ln w="38100" cap="rnd">
+            <a:solidFill>
+              <a:schemeClr val="accent1"/>
+            </a:solidFill>
+            <a:round/>
+          </a:ln>
         </p:spPr>
         <p:txBody>
           <a:bodyPr/>
           <a:lstStyle/>
           <a:p>
-            <a:pPr>
-              <a:defRPr sz="2600"/>
-            </a:pPr>
-            <a:r>
-              <a:rPr dirty="0"/>
-              <a:t>How to increase your productivity</a:t>
-            </a:r>
-            <a:r>
-              <a:rPr lang="en-GB" dirty="0"/>
-              <a:t> and make AI smarter</a:t>
-            </a:r>
-            <a:endParaRPr dirty="0"/>
+            <a:endParaRPr lang="en-US"/>
           </a:p>
         </p:txBody>
       </p:sp>
     </p:spTree>
+    <p:extLst>
+      <p:ext uri="{BB962C8B-B14F-4D97-AF65-F5344CB8AC3E}">
+        <p14:creationId xmlns:p14="http://schemas.microsoft.com/office/powerpoint/2010/main" val="4276409366"/>
+      </p:ext>
+    </p:extLst>
   </p:cSld>
   <p:clrMapOvr>
     <a:masterClrMapping/>
@@ -2025,6 +3734,16 @@
 <file path=ppt/slides/slide10.xml><?xml version="1.0" encoding="utf-8"?>
 <p:sld xmlns:a="http://schemas.openxmlformats.org/drawingml/2006/main" xmlns:r="http://schemas.openxmlformats.org/officeDocument/2006/relationships" xmlns:p="http://schemas.openxmlformats.org/presentationml/2006/main">
   <p:cSld>
+    <p:bg>
+      <p:bgPr>
+        <a:solidFill>
+          <a:srgbClr val="FFFFFF">
+            <a:alpha val="100000"/>
+          </a:srgbClr>
+        </a:solidFill>
+        <a:effectLst/>
+      </p:bgPr>
+    </p:bg>
     <p:spTree>
       <p:nvGrpSpPr>
         <p:cNvPr id="1" name=""/>
@@ -2055,104 +3774,218 @@
           <a:lstStyle/>
           <a:p>
             <a:r>
-              <a:t>Multiple Agents with Clear Jobs</a:t>
+              <a:t>Example Folder Structure</a:t>
             </a:r>
           </a:p>
         </p:txBody>
       </p:sp>
       <p:sp>
         <p:nvSpPr>
-          <p:cNvPr id="3" name="Content Placeholder 2"/>
-          <p:cNvSpPr>
-            <a:spLocks noGrp="1"/>
-          </p:cNvSpPr>
-          <p:nvPr>
-            <p:ph sz="quarter" idx="11"/>
-          </p:nvPr>
+          <p:cNvPr id="3" name="TextBox 2"/>
+          <p:cNvSpPr txBox="1"/>
+          <p:nvPr/>
         </p:nvSpPr>
-        <p:spPr/>
+        <p:spPr>
+          <a:xfrm>
+            <a:off x="622300" y="838200"/>
+            <a:ext cx="7899400" cy="3644900"/>
+          </a:xfrm>
+          <a:prstGeom prst="rect">
+            <a:avLst/>
+          </a:prstGeom>
+          <a:noFill/>
+        </p:spPr>
         <p:txBody>
-          <a:bodyPr/>
+          <a:bodyPr wrap="none">
+            <a:noAutofit/>
+          </a:bodyPr>
           <a:lstStyle/>
           <a:p>
-            <a:pPr>
-              <a:defRPr sz="2100"/>
-            </a:pPr>
-            <a:r>
-              <a:rPr dirty="0"/>
-              <a:t>You can run multiple workstreams at the same time.</a:t>
-            </a:r>
-          </a:p>
-          <a:p>
-            <a:pPr>
-              <a:defRPr sz="2100"/>
-            </a:pPr>
-            <a:r>
-              <a:rPr dirty="0"/>
-              <a:t>Better results come from one clear job per agent/session</a:t>
-            </a:r>
-            <a:r>
-              <a:rPr lang="en-GB" dirty="0"/>
-              <a:t> so they can </a:t>
-            </a:r>
-            <a:r>
-              <a:rPr lang="en-GB" i="1" dirty="0"/>
-              <a:t>focus</a:t>
-            </a:r>
-            <a:r>
-              <a:rPr lang="en-GB" dirty="0"/>
-              <a:t> on one clear task.</a:t>
-            </a:r>
-            <a:endParaRPr dirty="0"/>
-          </a:p>
-          <a:p>
-            <a:pPr>
-              <a:defRPr sz="2100"/>
-            </a:pPr>
-            <a:r>
-              <a:rPr dirty="0"/>
-              <a:t>Example split:</a:t>
-            </a:r>
-          </a:p>
-          <a:p>
-            <a:pPr lvl="1">
-              <a:defRPr sz="1900"/>
-            </a:pPr>
-            <a:r>
-              <a:rPr dirty="0"/>
-              <a:t>Agent A: literature notes</a:t>
-            </a:r>
-          </a:p>
-          <a:p>
-            <a:pPr lvl="1">
-              <a:defRPr sz="1900"/>
-            </a:pPr>
-            <a:r>
-              <a:rPr dirty="0"/>
-              <a:t>Agent B: data cleaning checks</a:t>
-            </a:r>
-          </a:p>
-          <a:p>
-            <a:pPr lvl="1">
-              <a:defRPr sz="1900"/>
-            </a:pPr>
-            <a:r>
-              <a:rPr dirty="0"/>
-              <a:t>Agent C: model write-up draft</a:t>
-            </a:r>
-          </a:p>
-          <a:p>
-            <a:pPr lvl="1">
-              <a:defRPr sz="1900"/>
-            </a:pPr>
-            <a:r>
-              <a:rPr dirty="0"/>
-              <a:t>Agent D: slides and presentation edits</a:t>
+            <a:pPr marL="0" indent="0">
+              <a:lnSpc>
+                <a:spcPts val="2200"/>
+              </a:lnSpc>
+              <a:spcBef>
+                <a:spcPts val="200"/>
+              </a:spcBef>
+              <a:spcAft>
+                <a:spcPts val="200"/>
+              </a:spcAft>
+              <a:buNone/>
+            </a:pPr>
+            <a:r>
+              <a:rPr lang="en-US" sz="1800" b="1" dirty="0">
+                <a:solidFill>
+                  <a:schemeClr val="dk1"/>
+                </a:solidFill>
+                <a:latin typeface="Consolas"/>
+              </a:rPr>
+              <a:t>David / Global Folder /</a:t>
+            </a:r>
+          </a:p>
+          <a:p>
+            <a:pPr marL="457200" indent="0">
+              <a:lnSpc>
+                <a:spcPts val="2000"/>
+              </a:lnSpc>
+              <a:spcBef>
+                <a:spcPts val="100"/>
+              </a:spcBef>
+              <a:spcAft>
+                <a:spcPts val="100"/>
+              </a:spcAft>
+              <a:buNone/>
+            </a:pPr>
+            <a:r>
+              <a:rPr lang="en-US" sz="1600" dirty="0">
+                <a:solidFill>
+                  <a:schemeClr val="dk1"/>
+                </a:solidFill>
+                <a:latin typeface="Consolas"/>
+              </a:rPr>
+              <a:t>├── AGENTS.md</a:t>
+            </a:r>
+            <a:r>
+              <a:rPr lang="en-US" sz="1600" dirty="0">
+                <a:solidFill>
+                  <a:schemeClr val="dk1"/>
+                </a:solidFill>
+              </a:rPr>
+              <a:t>    Global rules for how the AI behaves</a:t>
+            </a:r>
+          </a:p>
+          <a:p>
+            <a:pPr marL="457200" indent="0">
+              <a:lnSpc>
+                <a:spcPts val="2000"/>
+              </a:lnSpc>
+              <a:spcBef>
+                <a:spcPts val="100"/>
+              </a:spcBef>
+              <a:spcAft>
+                <a:spcPts val="100"/>
+              </a:spcAft>
+              <a:buNone/>
+            </a:pPr>
+            <a:r>
+              <a:rPr lang="en-US" sz="1600" dirty="0">
+                <a:solidFill>
+                  <a:schemeClr val="dk1"/>
+                </a:solidFill>
+                <a:latin typeface="Consolas"/>
+              </a:rPr>
+              <a:t>├── project.md</a:t>
+            </a:r>
+            <a:r>
+              <a:rPr lang="en-US" sz="1600" dirty="0">
+                <a:solidFill>
+                  <a:schemeClr val="dk1"/>
+                </a:solidFill>
+              </a:rPr>
+              <a:t>   Goals, progress, and next steps</a:t>
+            </a:r>
+          </a:p>
+          <a:p>
+            <a:pPr marL="457200" indent="0">
+              <a:lnSpc>
+                <a:spcPts val="2000"/>
+              </a:lnSpc>
+              <a:spcBef>
+                <a:spcPts val="100"/>
+              </a:spcBef>
+              <a:spcAft>
+                <a:spcPts val="100"/>
+              </a:spcAft>
+              <a:buNone/>
+            </a:pPr>
+            <a:r>
+              <a:rPr lang="en-US" sz="1600" dirty="0">
+                <a:solidFill>
+                  <a:schemeClr val="dk1"/>
+                </a:solidFill>
+                <a:latin typeface="Consolas"/>
+              </a:rPr>
+              <a:t>├── Skills/</a:t>
+            </a:r>
+            <a:r>
+              <a:rPr lang="en-US" sz="1600" dirty="0">
+                <a:solidFill>
+                  <a:schemeClr val="dk1"/>
+                </a:solidFill>
+              </a:rPr>
+              <a:t>        Reusable methods for recurring tasks</a:t>
+            </a:r>
+          </a:p>
+          <a:p>
+            <a:pPr marL="457200" indent="0">
+              <a:lnSpc>
+                <a:spcPts val="2000"/>
+              </a:lnSpc>
+              <a:spcBef>
+                <a:spcPts val="100"/>
+              </a:spcBef>
+              <a:spcAft>
+                <a:spcPts val="100"/>
+              </a:spcAft>
+              <a:buNone/>
+            </a:pPr>
+            <a:r>
+              <a:rPr lang="en-US" sz="1600" dirty="0">
+                <a:solidFill>
+                  <a:schemeClr val="dk1"/>
+                </a:solidFill>
+                <a:latin typeface="Consolas"/>
+              </a:rPr>
+              <a:t>├── Agents/</a:t>
+            </a:r>
+            <a:r>
+              <a:rPr lang="en-US" sz="1600" dirty="0">
+                <a:solidFill>
+                  <a:schemeClr val="dk1"/>
+                </a:solidFill>
+              </a:rPr>
+              <a:t>       Defined roles — which agent does what</a:t>
+            </a:r>
+          </a:p>
+          <a:p>
+            <a:pPr marL="457200" indent="0">
+              <a:lnSpc>
+                <a:spcPts val="2000"/>
+              </a:lnSpc>
+              <a:spcBef>
+                <a:spcPts val="100"/>
+              </a:spcBef>
+              <a:spcAft>
+                <a:spcPts val="100"/>
+              </a:spcAft>
+              <a:buNone/>
+            </a:pPr>
+            <a:r>
+              <a:rPr lang="en-US" sz="1600" dirty="0">
+                <a:solidFill>
+                  <a:schemeClr val="dk1"/>
+                </a:solidFill>
+                <a:latin typeface="Consolas"/>
+              </a:rPr>
+              <a:t>└── projects/</a:t>
+            </a:r>
+            <a:r>
+              <a:rPr lang="en-US" sz="1600" dirty="0">
+                <a:solidFill>
+                  <a:schemeClr val="dk1"/>
+                </a:solidFill>
+              </a:rPr>
+              <a:t>     Your research projects, each with its own .md</a:t>
             </a:r>
           </a:p>
         </p:txBody>
       </p:sp>
     </p:spTree>
+    <p:extLst>
+      <p:ext uri="{BB962C8B-B14F-4D97-AF65-F5344CB8AC3E}">
+        <p14:creationId xmlns:p14="http://schemas.microsoft.com/office/powerpoint/2010/main" val="155541761"/>
+      </p:ext>
+    </p:extLst>
   </p:cSld>
   <p:clrMapOvr>
     <a:masterClrMapping/>
@@ -2163,6 +3996,16 @@
 <file path=ppt/slides/slide11.xml><?xml version="1.0" encoding="utf-8"?>
 <p:sld xmlns:a="http://schemas.openxmlformats.org/drawingml/2006/main" xmlns:r="http://schemas.openxmlformats.org/officeDocument/2006/relationships" xmlns:p="http://schemas.openxmlformats.org/presentationml/2006/main">
   <p:cSld>
+    <p:bg>
+      <p:bgPr>
+        <a:solidFill>
+          <a:srgbClr val="FFFFFF">
+            <a:alpha val="100000"/>
+          </a:srgbClr>
+        </a:solidFill>
+        <a:effectLst/>
+      </p:bgPr>
+    </p:bg>
     <p:spTree>
       <p:nvGrpSpPr>
         <p:cNvPr id="1" name=""/>
@@ -2193,7 +4036,7 @@
           <a:lstStyle/>
           <a:p>
             <a:r>
-              <a:t>Tokens, Subscriptions, and Usage Limits</a:t>
+              <a:t>Memory: Limits to Know</a:t>
             </a:r>
           </a:p>
         </p:txBody>
@@ -2210,44 +4053,142 @@
         </p:nvSpPr>
         <p:spPr/>
         <p:txBody>
-          <a:bodyPr/>
+          <a:bodyPr>
+            <a:noAutofit/>
+          </a:bodyPr>
           <a:lstStyle/>
           <a:p>
             <a:pPr>
-              <a:defRPr sz="2100"/>
-            </a:pPr>
-            <a:r>
-              <a:t>Paid plans usually include chatbot access plus coding-tool access.</a:t>
-            </a:r>
-            <a:endParaRPr lang="en-GB" dirty="0"/>
+              <a:lnSpc>
+                <a:spcPts val="2600"/>
+              </a:lnSpc>
+              <a:spcBef>
+                <a:spcPts val="400"/>
+              </a:spcBef>
+              <a:spcAft>
+                <a:spcPts val="400"/>
+              </a:spcAft>
+              <a:buFont typeface="Arial"/>
+              <a:buChar char="▸"/>
+              <a:defRPr sz="2000"/>
+            </a:pPr>
+            <a:r>
+              <a:rPr lang="en-US" sz="2000" dirty="0">
+                <a:solidFill>
+                  <a:schemeClr val="dk1"/>
+                </a:solidFill>
+              </a:rPr>
+              <a:t>AI agents have </a:t>
+            </a:r>
+            <a:r>
+              <a:rPr lang="en-US" sz="2000" b="1" dirty="0">
+                <a:solidFill>
+                  <a:schemeClr val="dk1"/>
+                </a:solidFill>
+              </a:rPr>
+              <a:t>no persistent memory</a:t>
+            </a:r>
+            <a:r>
+              <a:rPr lang="en-US" sz="2000" dirty="0">
+                <a:solidFill>
+                  <a:schemeClr val="dk1"/>
+                </a:solidFill>
+              </a:rPr>
+              <a:t> between sessions</a:t>
+            </a:r>
           </a:p>
           <a:p>
             <a:pPr>
-              <a:defRPr sz="2100"/>
-            </a:pPr>
-            <a:r>
-              <a:t>Tokens are small pieces of text the model reads and writes.</a:t>
+              <a:lnSpc>
+                <a:spcPts val="2600"/>
+              </a:lnSpc>
+              <a:spcBef>
+                <a:spcPts val="400"/>
+              </a:spcBef>
+              <a:spcAft>
+                <a:spcPts val="400"/>
+              </a:spcAft>
+              <a:buFont typeface="Arial"/>
+              <a:buChar char="▸"/>
+              <a:defRPr sz="2000"/>
+            </a:pPr>
+            <a:r>
+              <a:rPr lang="en-US" sz="2000" dirty="0">
+                <a:solidFill>
+                  <a:schemeClr val="dk1"/>
+                </a:solidFill>
+              </a:rPr>
+              <a:t>Working context is limited — early details fade in long chats</a:t>
             </a:r>
           </a:p>
           <a:p>
             <a:pPr>
-              <a:defRPr sz="2100"/>
-            </a:pPr>
-            <a:r>
-              <a:t>Your plan limits context size and total usage over time.</a:t>
+              <a:lnSpc>
+                <a:spcPts val="2600"/>
+              </a:lnSpc>
+              <a:spcBef>
+                <a:spcPts val="400"/>
+              </a:spcBef>
+              <a:spcAft>
+                <a:spcPts val="400"/>
+              </a:spcAft>
+              <a:buFont typeface="Arial"/>
+              <a:buChar char="▸"/>
+              <a:defRPr sz="2000"/>
+            </a:pPr>
+            <a:r>
+              <a:rPr lang="en-US" sz="2000" dirty="0">
+                <a:solidFill>
+                  <a:schemeClr val="dk1"/>
+                </a:solidFill>
+              </a:rPr>
+              <a:t>Every new session starts fresh — like a smart colleague reading your notes for the first time</a:t>
             </a:r>
           </a:p>
           <a:p>
             <a:pPr>
-              <a:defRPr sz="2100"/>
-            </a:pPr>
-            <a:r>
-              <a:t>So keep prompts and notes short, clear, and focused.</a:t>
+              <a:lnSpc>
+                <a:spcPts val="2600"/>
+              </a:lnSpc>
+              <a:spcBef>
+                <a:spcPts val="400"/>
+              </a:spcBef>
+              <a:spcAft>
+                <a:spcPts val="400"/>
+              </a:spcAft>
+              <a:buFont typeface="Arial"/>
+              <a:buChar char="▸"/>
+              <a:defRPr sz="2000"/>
+            </a:pPr>
+            <a:r>
+              <a:rPr lang="en-US" sz="2000" dirty="0">
+                <a:solidFill>
+                  <a:schemeClr val="dk1"/>
+                </a:solidFill>
+              </a:rPr>
+              <a:t>Solution: get the </a:t>
+            </a:r>
+            <a:r>
+              <a:rPr lang="en-US" sz="2000" dirty="0"/>
+              <a:t>AI to </a:t>
+            </a:r>
+            <a:r>
+              <a:rPr lang="en-US" sz="2000" dirty="0">
+                <a:solidFill>
+                  <a:schemeClr val="dk1"/>
+                </a:solidFill>
+              </a:rPr>
+              <a:t>write good notes (.md files) so the AI picks up where it left off</a:t>
             </a:r>
           </a:p>
         </p:txBody>
       </p:sp>
     </p:spTree>
+    <p:extLst>
+      <p:ext uri="{BB962C8B-B14F-4D97-AF65-F5344CB8AC3E}">
+        <p14:creationId xmlns:p14="http://schemas.microsoft.com/office/powerpoint/2010/main" val="1362164428"/>
+      </p:ext>
+    </p:extLst>
   </p:cSld>
   <p:clrMapOvr>
     <a:masterClrMapping/>
@@ -2255,9 +4196,19 @@
 </p:sld>
 </file>
 
-<file path=ppt/slides/slide2.xml><?xml version="1.0" encoding="utf-8"?>
+<file path=ppt/slides/slide12.xml><?xml version="1.0" encoding="utf-8"?>
 <p:sld xmlns:a="http://schemas.openxmlformats.org/drawingml/2006/main" xmlns:r="http://schemas.openxmlformats.org/officeDocument/2006/relationships" xmlns:p="http://schemas.openxmlformats.org/presentationml/2006/main">
   <p:cSld>
+    <p:bg>
+      <p:bgPr>
+        <a:solidFill>
+          <a:srgbClr val="FFFFFF">
+            <a:alpha val="100000"/>
+          </a:srgbClr>
+        </a:solidFill>
+        <a:effectLst/>
+      </p:bgPr>
+    </p:bg>
     <p:spTree>
       <p:nvGrpSpPr>
         <p:cNvPr id="1" name=""/>
@@ -2288,8 +4239,14 @@
           <a:lstStyle/>
           <a:p>
             <a:r>
-              <a:t>Economists are now using AI</a:t>
-            </a:r>
+              <a:rPr dirty="0"/>
+              <a:t>How We Create </a:t>
+            </a:r>
+            <a:r>
+              <a:rPr lang="en-GB" dirty="0"/>
+              <a:t>“Memory”</a:t>
+            </a:r>
+            <a:endParaRPr dirty="0"/>
           </a:p>
         </p:txBody>
       </p:sp>
@@ -2305,121 +4262,212 @@
         </p:nvSpPr>
         <p:spPr/>
         <p:txBody>
-          <a:bodyPr/>
+          <a:bodyPr>
+            <a:noAutofit/>
+          </a:bodyPr>
           <a:lstStyle/>
           <a:p>
             <a:pPr>
-              <a:defRPr sz="1400"/>
-            </a:pPr>
-            <a:r>
-              <a:rPr b="1" dirty="0"/>
-              <a:t>Chris Blattman (Chicago):</a:t>
+              <a:lnSpc>
+                <a:spcPts val="2200"/>
+              </a:lnSpc>
+              <a:spcBef>
+                <a:spcPts val="200"/>
+              </a:spcBef>
+              <a:spcAft>
+                <a:spcPts val="200"/>
+              </a:spcAft>
+              <a:buFont typeface="Arial"/>
+              <a:buChar char="▸"/>
+              <a:defRPr sz="1800"/>
+            </a:pPr>
+            <a:r>
+              <a:rPr lang="en-US" sz="1800" b="1" dirty="0">
+                <a:solidFill>
+                  <a:schemeClr val="dk1"/>
+                </a:solidFill>
+                <a:latin typeface="Consolas"/>
+              </a:rPr>
+              <a:t>AGENTS.md</a:t>
+            </a:r>
+            <a:r>
+              <a:rPr lang="en-US" sz="1800" dirty="0">
+                <a:solidFill>
+                  <a:schemeClr val="dk1"/>
+                </a:solidFill>
+              </a:rPr>
+              <a:t>  —  Global rules: how the AI should behave</a:t>
             </a:r>
           </a:p>
           <a:p>
             <a:pPr>
-              <a:defRPr sz="1400"/>
-            </a:pPr>
-            <a:r>
-              <a:rPr i="1" dirty="0"/>
-              <a:t>"Every week, for each of about 10 research projects, I built an automated skill where Claude Code pulls and integrates … and generates a weekly project overview with priorities and to-do."</a:t>
+              <a:lnSpc>
+                <a:spcPts val="2200"/>
+              </a:lnSpc>
+              <a:spcBef>
+                <a:spcPts val="200"/>
+              </a:spcBef>
+              <a:spcAft>
+                <a:spcPts val="200"/>
+              </a:spcAft>
+              <a:buFont typeface="Arial"/>
+              <a:buChar char="▸"/>
+              <a:defRPr sz="1800"/>
+            </a:pPr>
+            <a:r>
+              <a:rPr lang="en-US" b="1" dirty="0">
+                <a:latin typeface="Consolas"/>
+              </a:rPr>
+              <a:t>STATUS</a:t>
+            </a:r>
+            <a:r>
+              <a:rPr lang="en-US" sz="1800" b="1" dirty="0">
+                <a:solidFill>
+                  <a:schemeClr val="dk1"/>
+                </a:solidFill>
+                <a:latin typeface="Consolas"/>
+              </a:rPr>
+              <a:t>.md</a:t>
+            </a:r>
+            <a:r>
+              <a:rPr lang="en-US" sz="1800" dirty="0">
+                <a:solidFill>
+                  <a:schemeClr val="dk1"/>
+                </a:solidFill>
+              </a:rPr>
+              <a:t>  —  Goals, progress, and next steps</a:t>
             </a:r>
           </a:p>
           <a:p>
             <a:pPr>
-              <a:defRPr sz="1400"/>
-            </a:pPr>
-            <a:r>
-              <a:rPr b="1" dirty="0"/>
-              <a:t>Antonio Mele (</a:t>
-            </a:r>
-            <a:r>
-              <a:rPr lang="en-GB" b="1" dirty="0"/>
-              <a:t>LSE</a:t>
-            </a:r>
-            <a:r>
-              <a:rPr b="1" dirty="0"/>
-              <a:t>):</a:t>
+              <a:lnSpc>
+                <a:spcPts val="2200"/>
+              </a:lnSpc>
+              <a:spcBef>
+                <a:spcPts val="200"/>
+              </a:spcBef>
+              <a:spcAft>
+                <a:spcPts val="200"/>
+              </a:spcAft>
+              <a:buFont typeface="Arial"/>
+              <a:buChar char="▸"/>
+              <a:defRPr sz="1800"/>
+            </a:pPr>
+            <a:r>
+              <a:rPr lang="en-US" sz="1800" b="1" dirty="0">
+                <a:solidFill>
+                  <a:schemeClr val="dk1"/>
+                </a:solidFill>
+                <a:latin typeface="Consolas"/>
+              </a:rPr>
+              <a:t>Skills/</a:t>
+            </a:r>
+            <a:r>
+              <a:rPr lang="en-US" sz="1800" dirty="0">
+                <a:solidFill>
+                  <a:schemeClr val="dk1"/>
+                </a:solidFill>
+              </a:rPr>
+              <a:t>  —  Reusable methods (how to do recurring tasks)</a:t>
             </a:r>
           </a:p>
           <a:p>
             <a:pPr>
-              <a:defRPr sz="1400"/>
-            </a:pPr>
-            <a:r>
-              <a:rPr dirty="0"/>
-              <a:t>"…workflow transformed … 50</a:t>
-            </a:r>
-            <a:r>
-              <a:rPr lang="en-GB" dirty="0"/>
-              <a:t>x</a:t>
-            </a:r>
-            <a:r>
-              <a:rPr dirty="0"/>
-              <a:t>200</a:t>
-            </a:r>
-            <a:r>
-              <a:rPr lang="en-GB" dirty="0"/>
-              <a:t>x</a:t>
-            </a:r>
-            <a:r>
-              <a:rPr dirty="0"/>
-              <a:t> productivity multiplier…"</a:t>
+              <a:lnSpc>
+                <a:spcPts val="2200"/>
+              </a:lnSpc>
+              <a:spcBef>
+                <a:spcPts val="200"/>
+              </a:spcBef>
+              <a:spcAft>
+                <a:spcPts val="200"/>
+              </a:spcAft>
+              <a:buFont typeface="Arial"/>
+              <a:buChar char="▸"/>
+              <a:defRPr sz="1800"/>
+            </a:pPr>
+            <a:r>
+              <a:rPr lang="en-US" sz="1800" b="1" dirty="0">
+                <a:solidFill>
+                  <a:schemeClr val="dk1"/>
+                </a:solidFill>
+                <a:latin typeface="Consolas"/>
+              </a:rPr>
+              <a:t>Agents/</a:t>
+            </a:r>
+            <a:r>
+              <a:rPr lang="en-US" sz="1800" dirty="0">
+                <a:solidFill>
+                  <a:schemeClr val="dk1"/>
+                </a:solidFill>
+              </a:rPr>
+              <a:t>  —  Defined roles (which agent handles what)]</a:t>
             </a:r>
           </a:p>
           <a:p>
             <a:pPr>
-              <a:defRPr sz="1400"/>
-            </a:pPr>
-            <a:r>
-              <a:rPr b="1" dirty="0"/>
-              <a:t>Paul Novosad (</a:t>
-            </a:r>
-            <a:r>
-              <a:rPr lang="en-GB" b="1" dirty="0"/>
-              <a:t>Dartmouth</a:t>
-            </a:r>
-            <a:r>
-              <a:rPr b="1" dirty="0"/>
-              <a:t>):</a:t>
+              <a:lnSpc>
+                <a:spcPts val="2200"/>
+              </a:lnSpc>
+              <a:spcBef>
+                <a:spcPts val="200"/>
+              </a:spcBef>
+              <a:spcAft>
+                <a:spcPts val="200"/>
+              </a:spcAft>
+              <a:buFont typeface="Arial"/>
+              <a:buChar char="▸"/>
+              <a:defRPr sz="1800"/>
+            </a:pPr>
+            <a:r>
+              <a:rPr lang="en-US" sz="1800" b="1" dirty="0">
+                <a:solidFill>
+                  <a:schemeClr val="dk1"/>
+                </a:solidFill>
+                <a:latin typeface="Consolas"/>
+              </a:rPr>
+              <a:t>Projects/</a:t>
+            </a:r>
+            <a:r>
+              <a:rPr lang="en-US" sz="1800" dirty="0">
+                <a:solidFill>
+                  <a:schemeClr val="dk1"/>
+                </a:solidFill>
+              </a:rPr>
+              <a:t>  —  Each research project, with its own .md files</a:t>
             </a:r>
           </a:p>
           <a:p>
             <a:pPr>
-              <a:defRPr sz="1400"/>
-            </a:pPr>
-            <a:r>
-              <a:rPr i="1" dirty="0"/>
-              <a:t>"I wrote a decent paper with AI. It took me about 3 hours from start to finish, including an interactive choose-your-own-border-RD-adventure, it’s a what are we even doing here kind of day."</a:t>
-            </a:r>
-            <a:br>
-              <a:rPr lang="en-GB" i="1" dirty="0"/>
-            </a:br>
-            <a:br>
-              <a:rPr lang="en-GB" i="1" dirty="0"/>
-            </a:br>
-            <a:endParaRPr b="1" i="1" dirty="0"/>
-          </a:p>
-          <a:p>
-            <a:pPr>
-              <a:defRPr sz="1400"/>
-            </a:pPr>
-            <a:r>
-              <a:rPr b="1" dirty="0"/>
-              <a:t>Vibe coding: you do not need to </a:t>
-            </a:r>
-            <a:r>
-              <a:rPr lang="en-GB" b="1" dirty="0"/>
-              <a:t>know how to code,</a:t>
-            </a:r>
-            <a:r>
-              <a:rPr b="1" dirty="0"/>
-              <a:t> you can give instructions in plain English.</a:t>
+              <a:lnSpc>
+                <a:spcPts val="2200"/>
+              </a:lnSpc>
+              <a:spcBef>
+                <a:spcPts val="500"/>
+              </a:spcBef>
+              <a:spcAft>
+                <a:spcPts val="0"/>
+              </a:spcAft>
+              <a:buNone/>
+              <a:defRPr sz="1800"/>
+            </a:pPr>
+            <a:r>
+              <a:rPr lang="en-US" sz="1700" i="1" dirty="0">
+                <a:solidFill>
+                  <a:schemeClr val="dk1"/>
+                </a:solidFill>
+              </a:rPr>
+              <a:t>These files are the AI's "memory" — keep them updated and it stays on track.</a:t>
             </a:r>
           </a:p>
         </p:txBody>
       </p:sp>
     </p:spTree>
+    <p:extLst>
+      <p:ext uri="{BB962C8B-B14F-4D97-AF65-F5344CB8AC3E}">
+        <p14:creationId xmlns:p14="http://schemas.microsoft.com/office/powerpoint/2010/main" val="1013557831"/>
+      </p:ext>
+    </p:extLst>
   </p:cSld>
   <p:clrMapOvr>
     <a:masterClrMapping/>
@@ -2427,9 +4475,19 @@
 </p:sld>
 </file>
 
-<file path=ppt/slides/slide3.xml><?xml version="1.0" encoding="utf-8"?>
+<file path=ppt/slides/slide13.xml><?xml version="1.0" encoding="utf-8"?>
 <p:sld xmlns:a="http://schemas.openxmlformats.org/drawingml/2006/main" xmlns:r="http://schemas.openxmlformats.org/officeDocument/2006/relationships" xmlns:p="http://schemas.openxmlformats.org/presentationml/2006/main">
   <p:cSld>
+    <p:bg>
+      <p:bgPr>
+        <a:solidFill>
+          <a:srgbClr val="FFFFFF">
+            <a:alpha val="100000"/>
+          </a:srgbClr>
+        </a:solidFill>
+        <a:effectLst/>
+      </p:bgPr>
+    </p:bg>
     <p:spTree>
       <p:nvGrpSpPr>
         <p:cNvPr id="1" name=""/>
@@ -2460,18 +4518,9 @@
           <a:lstStyle/>
           <a:p>
             <a:r>
-              <a:rPr lang="en-GB" dirty="0"/>
-              <a:t>Example </a:t>
-            </a:r>
-            <a:r>
               <a:rPr dirty="0"/>
-              <a:t>Problem</a:t>
-            </a:r>
-            <a:r>
-              <a:rPr lang="en-GB" dirty="0"/>
-              <a:t> with ChatGPT</a:t>
-            </a:r>
-            <a:endParaRPr dirty="0"/>
+              <a:t>Agents with Clear Jobs</a:t>
+            </a:r>
           </a:p>
         </p:txBody>
       </p:sp>
@@ -2487,43 +4536,229 @@
         </p:nvSpPr>
         <p:spPr/>
         <p:txBody>
-          <a:bodyPr/>
+          <a:bodyPr>
+            <a:noAutofit/>
+          </a:bodyPr>
           <a:lstStyle/>
           <a:p>
             <a:pPr>
-              <a:defRPr sz="2200"/>
-            </a:pPr>
-            <a:r>
-              <a:rPr dirty="0"/>
-              <a:t>In chat-only mode, models can produce plausible but fake citations</a:t>
-            </a:r>
-            <a:r>
-              <a:rPr lang="en-GB" dirty="0"/>
-              <a:t> and literature.</a:t>
-            </a:r>
-            <a:endParaRPr dirty="0"/>
+              <a:lnSpc>
+                <a:spcPts val="2200"/>
+              </a:lnSpc>
+              <a:spcBef>
+                <a:spcPts val="200"/>
+              </a:spcBef>
+              <a:spcAft>
+                <a:spcPts val="200"/>
+              </a:spcAft>
+              <a:buFont typeface="Arial"/>
+              <a:buChar char="▸"/>
+              <a:defRPr sz="1900"/>
+            </a:pPr>
+            <a:r>
+              <a:rPr lang="en-US" sz="1900" dirty="0">
+                <a:solidFill>
+                  <a:schemeClr val="dk1"/>
+                </a:solidFill>
+              </a:rPr>
+              <a:t>Run multiple AI workstreams in parallel</a:t>
+            </a:r>
           </a:p>
           <a:p>
             <a:pPr>
-              <a:defRPr sz="2200"/>
-            </a:pPr>
-            <a:r>
-              <a:rPr dirty="0"/>
-              <a:t>This is risky for academic work if outputs are not verified.</a:t>
-            </a:r>
-          </a:p>
-          <a:p>
-            <a:pPr>
-              <a:defRPr sz="2200"/>
-            </a:pPr>
-            <a:r>
-              <a:rPr dirty="0"/>
-              <a:t>Typical failure: invented paper title, author list, or journal.</a:t>
+              <a:lnSpc>
+                <a:spcPts val="2200"/>
+              </a:lnSpc>
+              <a:spcBef>
+                <a:spcPts val="200"/>
+              </a:spcBef>
+              <a:spcAft>
+                <a:spcPts val="400"/>
+              </a:spcAft>
+              <a:buFont typeface="Arial"/>
+              <a:buChar char="▸"/>
+              <a:defRPr sz="1900"/>
+            </a:pPr>
+            <a:r>
+              <a:rPr lang="en-US" sz="1900" dirty="0">
+                <a:solidFill>
+                  <a:schemeClr val="dk1"/>
+                </a:solidFill>
+              </a:rPr>
+              <a:t>Best results come from </a:t>
+            </a:r>
+            <a:r>
+              <a:rPr lang="en-US" sz="1900" b="1" dirty="0">
+                <a:solidFill>
+                  <a:schemeClr val="dk1"/>
+                </a:solidFill>
+              </a:rPr>
+              <a:t>one clear task per session</a:t>
+            </a:r>
+          </a:p>
+          <a:p>
+            <a:pPr marL="457200" indent="-228600">
+              <a:lnSpc>
+                <a:spcPts val="2000"/>
+              </a:lnSpc>
+              <a:spcBef>
+                <a:spcPts val="100"/>
+              </a:spcBef>
+              <a:spcAft>
+                <a:spcPts val="100"/>
+              </a:spcAft>
+              <a:buFont typeface="Arial"/>
+              <a:buChar char="–"/>
+              <a:defRPr sz="1800"/>
+            </a:pPr>
+            <a:r>
+              <a:rPr lang="en-US" sz="1800" dirty="0">
+                <a:solidFill>
+                  <a:schemeClr val="dk1"/>
+                </a:solidFill>
+              </a:rPr>
+              <a:t>Agent A  —  Literature notes</a:t>
+            </a:r>
+          </a:p>
+          <a:p>
+            <a:pPr marL="457200" indent="-228600">
+              <a:lnSpc>
+                <a:spcPts val="2000"/>
+              </a:lnSpc>
+              <a:spcBef>
+                <a:spcPts val="100"/>
+              </a:spcBef>
+              <a:spcAft>
+                <a:spcPts val="100"/>
+              </a:spcAft>
+              <a:buFont typeface="Arial"/>
+              <a:buChar char="–"/>
+              <a:defRPr sz="1800"/>
+            </a:pPr>
+            <a:r>
+              <a:rPr lang="en-US" sz="1800" dirty="0">
+                <a:solidFill>
+                  <a:schemeClr val="dk1"/>
+                </a:solidFill>
+              </a:rPr>
+              <a:t>Agent B  —  Data cleaning</a:t>
+            </a:r>
+          </a:p>
+          <a:p>
+            <a:pPr marL="457200" indent="-228600">
+              <a:lnSpc>
+                <a:spcPts val="2000"/>
+              </a:lnSpc>
+              <a:spcBef>
+                <a:spcPts val="100"/>
+              </a:spcBef>
+              <a:spcAft>
+                <a:spcPts val="100"/>
+              </a:spcAft>
+              <a:buFont typeface="Arial"/>
+              <a:buChar char="–"/>
+              <a:defRPr sz="1800"/>
+            </a:pPr>
+            <a:r>
+              <a:rPr lang="en-US" sz="1800" dirty="0">
+                <a:solidFill>
+                  <a:schemeClr val="dk1"/>
+                </a:solidFill>
+              </a:rPr>
+              <a:t>Agent C  —  Model write-up</a:t>
+            </a:r>
+          </a:p>
+          <a:p>
+            <a:pPr marL="457200" indent="-228600">
+              <a:lnSpc>
+                <a:spcPts val="2000"/>
+              </a:lnSpc>
+              <a:spcBef>
+                <a:spcPts val="100"/>
+              </a:spcBef>
+              <a:spcAft>
+                <a:spcPts val="100"/>
+              </a:spcAft>
+              <a:buFont typeface="Arial"/>
+              <a:buChar char="–"/>
+              <a:defRPr sz="1800"/>
+            </a:pPr>
+            <a:r>
+              <a:rPr lang="en-US" sz="1800" dirty="0">
+                <a:solidFill>
+                  <a:schemeClr val="dk1"/>
+                </a:solidFill>
+              </a:rPr>
+              <a:t>Agent D  —  Slides and figures</a:t>
+            </a:r>
+          </a:p>
+          <a:p>
+            <a:pPr marL="228600">
+              <a:lnSpc>
+                <a:spcPts val="2000"/>
+              </a:lnSpc>
+              <a:spcBef>
+                <a:spcPts val="100"/>
+              </a:spcBef>
+              <a:spcAft>
+                <a:spcPts val="100"/>
+              </a:spcAft>
+              <a:defRPr sz="1800"/>
+            </a:pPr>
+            <a:endParaRPr lang="en-US" dirty="0"/>
+          </a:p>
+          <a:p>
+            <a:pPr marL="228600">
+              <a:lnSpc>
+                <a:spcPts val="2000"/>
+              </a:lnSpc>
+              <a:spcBef>
+                <a:spcPts val="100"/>
+              </a:spcBef>
+              <a:spcAft>
+                <a:spcPts val="100"/>
+              </a:spcAft>
+              <a:defRPr sz="1800"/>
+            </a:pPr>
+            <a:r>
+              <a:rPr lang="en-US" b="1" dirty="0"/>
+              <a:t>Multi-agent</a:t>
+            </a:r>
+            <a:r>
+              <a:rPr lang="en-US" dirty="0"/>
+              <a:t>: different chat sessions (make sure not to work on same file) </a:t>
+            </a:r>
+          </a:p>
+          <a:p>
+            <a:pPr marL="228600">
+              <a:lnSpc>
+                <a:spcPts val="2000"/>
+              </a:lnSpc>
+              <a:spcBef>
+                <a:spcPts val="100"/>
+              </a:spcBef>
+              <a:spcAft>
+                <a:spcPts val="100"/>
+              </a:spcAft>
+              <a:defRPr sz="1800"/>
+            </a:pPr>
+            <a:r>
+              <a:rPr lang="en-US" b="1" dirty="0"/>
+              <a:t>Sub-agent: </a:t>
+            </a:r>
+            <a:r>
+              <a:rPr lang="en-US" dirty="0"/>
+              <a:t>within same chat session (coordinates itself)</a:t>
             </a:r>
           </a:p>
         </p:txBody>
       </p:sp>
     </p:spTree>
+    <p:extLst>
+      <p:ext uri="{BB962C8B-B14F-4D97-AF65-F5344CB8AC3E}">
+        <p14:creationId xmlns:p14="http://schemas.microsoft.com/office/powerpoint/2010/main" val="3354049593"/>
+      </p:ext>
+    </p:extLst>
   </p:cSld>
   <p:clrMapOvr>
     <a:masterClrMapping/>
@@ -2531,9 +4766,19 @@
 </p:sld>
 </file>
 
-<file path=ppt/slides/slide4.xml><?xml version="1.0" encoding="utf-8"?>
+<file path=ppt/slides/slide14.xml><?xml version="1.0" encoding="utf-8"?>
 <p:sld xmlns:a="http://schemas.openxmlformats.org/drawingml/2006/main" xmlns:r="http://schemas.openxmlformats.org/officeDocument/2006/relationships" xmlns:p="http://schemas.openxmlformats.org/presentationml/2006/main">
   <p:cSld>
+    <p:bg>
+      <p:bgPr>
+        <a:solidFill>
+          <a:srgbClr val="FFFFFF">
+            <a:alpha val="100000"/>
+          </a:srgbClr>
+        </a:solidFill>
+        <a:effectLst/>
+      </p:bgPr>
+    </p:bg>
     <p:spTree>
       <p:nvGrpSpPr>
         <p:cNvPr id="1" name=""/>
@@ -2564,7 +4809,8 @@
           <a:lstStyle/>
           <a:p>
             <a:r>
-              <a:t>How AI Coding Helps: Prevent, Check, Fix</a:t>
+              <a:rPr lang="en-GB" dirty="0"/>
+              <a:t>Where You Work With AI</a:t>
             </a:r>
           </a:p>
         </p:txBody>
@@ -2581,44 +4827,295 @@
         </p:nvSpPr>
         <p:spPr/>
         <p:txBody>
-          <a:bodyPr/>
+          <a:bodyPr>
+            <a:noAutofit/>
+          </a:bodyPr>
           <a:lstStyle/>
           <a:p>
             <a:pPr>
-              <a:defRPr sz="2100"/>
-            </a:pPr>
-            <a:r>
-              <a:t>Prevent: use project rules in files (AGENTS.md, project.md, skills).</a:t>
-            </a:r>
-            <a:endParaRPr lang="en-GB" dirty="0"/>
+              <a:lnSpc>
+                <a:spcPts val="1800"/>
+              </a:lnSpc>
+              <a:spcBef>
+                <a:spcPts val="300"/>
+              </a:spcBef>
+              <a:spcAft>
+                <a:spcPts val="100"/>
+              </a:spcAft>
+              <a:buNone/>
+            </a:pPr>
+            <a:r>
+              <a:rPr lang="en-GB" sz="1800" b="1" dirty="0">
+                <a:solidFill>
+                  <a:schemeClr val="dk1"/>
+                </a:solidFill>
+              </a:rPr>
+              <a:t>Claude Cowork</a:t>
+            </a:r>
           </a:p>
           <a:p>
             <a:pPr>
-              <a:defRPr sz="2100"/>
-            </a:pPr>
-            <a:r>
-              <a:t>Check: run verification steps against local files and known references.</a:t>
+              <a:lnSpc>
+                <a:spcPts val="1800"/>
+              </a:lnSpc>
+              <a:spcBef>
+                <a:spcPts val="0"/>
+              </a:spcBef>
+              <a:spcAft>
+                <a:spcPts val="300"/>
+              </a:spcAft>
+              <a:buNone/>
+            </a:pPr>
+            <a:r>
+              <a:rPr lang="en-GB" sz="1600" dirty="0">
+                <a:solidFill>
+                  <a:schemeClr val="dk1"/>
+                </a:solidFill>
+              </a:rPr>
+              <a:t>Describe a task in plain language and the AI carries it out </a:t>
+            </a:r>
+            <a:r>
+              <a:rPr lang="en-GB" sz="1600" b="1" dirty="0">
+                <a:solidFill>
+                  <a:schemeClr val="dk1"/>
+                </a:solidFill>
+              </a:rPr>
+              <a:t>(easiest to use)</a:t>
             </a:r>
           </a:p>
           <a:p>
             <a:pPr>
-              <a:defRPr sz="2100"/>
-            </a:pPr>
-            <a:r>
-              <a:t>Fix: update notes and rerun with tighter instructions.</a:t>
-            </a:r>
+              <a:lnSpc>
+                <a:spcPts val="1800"/>
+              </a:lnSpc>
+              <a:spcBef>
+                <a:spcPts val="0"/>
+              </a:spcBef>
+              <a:spcAft>
+                <a:spcPts val="300"/>
+              </a:spcAft>
+              <a:buNone/>
+            </a:pPr>
+            <a:endParaRPr lang="en-GB" sz="1600" b="1" dirty="0">
+              <a:solidFill>
+                <a:schemeClr val="dk1"/>
+              </a:solidFill>
+            </a:endParaRPr>
           </a:p>
           <a:p>
             <a:pPr>
-              <a:defRPr sz="2100"/>
-            </a:pPr>
-            <a:r>
-              <a:t>Example: rename PDFs automatically to Author_Year_Journal.pdf.</a:t>
+              <a:lnSpc>
+                <a:spcPts val="1800"/>
+              </a:lnSpc>
+              <a:spcBef>
+                <a:spcPts val="300"/>
+              </a:spcBef>
+              <a:spcAft>
+                <a:spcPts val="100"/>
+              </a:spcAft>
+              <a:buNone/>
+            </a:pPr>
+            <a:r>
+              <a:rPr lang="en-GB" sz="1800" b="1" dirty="0">
+                <a:solidFill>
+                  <a:schemeClr val="dk1"/>
+                </a:solidFill>
+              </a:rPr>
+              <a:t>Codex / Claude Code / Antigravity IDEs</a:t>
+            </a:r>
+          </a:p>
+          <a:p>
+            <a:pPr>
+              <a:lnSpc>
+                <a:spcPts val="1800"/>
+              </a:lnSpc>
+              <a:spcBef>
+                <a:spcPts val="0"/>
+              </a:spcBef>
+              <a:spcAft>
+                <a:spcPts val="300"/>
+              </a:spcAft>
+              <a:buNone/>
+            </a:pPr>
+            <a:r>
+              <a:rPr lang="en-GB" sz="1600" dirty="0">
+                <a:solidFill>
+                  <a:schemeClr val="dk1"/>
+                </a:solidFill>
+              </a:rPr>
+              <a:t>AI coding agents that build or edit research code from instructions </a:t>
+            </a:r>
+            <a:r>
+              <a:rPr lang="en-GB" sz="1600" b="1" dirty="0">
+                <a:solidFill>
+                  <a:schemeClr val="dk1"/>
+                </a:solidFill>
+              </a:rPr>
+              <a:t>(easy to set up)</a:t>
+            </a:r>
+          </a:p>
+          <a:p>
+            <a:pPr>
+              <a:lnSpc>
+                <a:spcPts val="1800"/>
+              </a:lnSpc>
+              <a:spcBef>
+                <a:spcPts val="0"/>
+              </a:spcBef>
+              <a:spcAft>
+                <a:spcPts val="300"/>
+              </a:spcAft>
+              <a:buNone/>
+            </a:pPr>
+            <a:endParaRPr lang="en-GB" sz="1600" b="1" dirty="0">
+              <a:solidFill>
+                <a:schemeClr val="dk1"/>
+              </a:solidFill>
+            </a:endParaRPr>
+          </a:p>
+          <a:p>
+            <a:pPr>
+              <a:lnSpc>
+                <a:spcPts val="1800"/>
+              </a:lnSpc>
+              <a:spcBef>
+                <a:spcPts val="300"/>
+              </a:spcBef>
+              <a:spcAft>
+                <a:spcPts val="100"/>
+              </a:spcAft>
+              <a:buNone/>
+            </a:pPr>
+            <a:r>
+              <a:rPr lang="en-GB" sz="1800" b="1" dirty="0">
+                <a:solidFill>
+                  <a:schemeClr val="dk1"/>
+                </a:solidFill>
+              </a:rPr>
+              <a:t>Cursor / VS Code IDEs</a:t>
+            </a:r>
+          </a:p>
+          <a:p>
+            <a:pPr>
+              <a:lnSpc>
+                <a:spcPts val="1800"/>
+              </a:lnSpc>
+              <a:spcBef>
+                <a:spcPts val="0"/>
+              </a:spcBef>
+              <a:spcAft>
+                <a:spcPts val="300"/>
+              </a:spcAft>
+              <a:buNone/>
+            </a:pPr>
+            <a:r>
+              <a:rPr lang="en-GB" sz="1600" dirty="0">
+                <a:solidFill>
+                  <a:schemeClr val="dk1"/>
+                </a:solidFill>
+              </a:rPr>
+              <a:t>Code editors where you code with optional AI assistance </a:t>
+            </a:r>
+            <a:r>
+              <a:rPr lang="en-GB" sz="1600" b="1" dirty="0">
+                <a:solidFill>
+                  <a:schemeClr val="dk1"/>
+                </a:solidFill>
+              </a:rPr>
+              <a:t>(most options)</a:t>
+            </a:r>
+          </a:p>
+          <a:p>
+            <a:pPr>
+              <a:lnSpc>
+                <a:spcPts val="1800"/>
+              </a:lnSpc>
+              <a:spcBef>
+                <a:spcPts val="0"/>
+              </a:spcBef>
+              <a:spcAft>
+                <a:spcPts val="300"/>
+              </a:spcAft>
+              <a:buNone/>
+            </a:pPr>
+            <a:endParaRPr lang="en-GB" sz="1600" b="1" dirty="0">
+              <a:solidFill>
+                <a:schemeClr val="dk1"/>
+              </a:solidFill>
+            </a:endParaRPr>
+          </a:p>
+          <a:p>
+            <a:pPr>
+              <a:lnSpc>
+                <a:spcPts val="1800"/>
+              </a:lnSpc>
+              <a:spcBef>
+                <a:spcPts val="300"/>
+              </a:spcBef>
+              <a:spcAft>
+                <a:spcPts val="100"/>
+              </a:spcAft>
+              <a:buNone/>
+            </a:pPr>
+            <a:r>
+              <a:rPr lang="en-GB" sz="1800" b="1" dirty="0">
+                <a:solidFill>
+                  <a:schemeClr val="dk1"/>
+                </a:solidFill>
+              </a:rPr>
+              <a:t>Terminal (PowerShell / macOS Terminal)</a:t>
+            </a:r>
+          </a:p>
+          <a:p>
+            <a:pPr>
+              <a:lnSpc>
+                <a:spcPts val="1800"/>
+              </a:lnSpc>
+              <a:spcBef>
+                <a:spcPts val="0"/>
+              </a:spcBef>
+              <a:spcAft>
+                <a:spcPts val="0"/>
+              </a:spcAft>
+              <a:buNone/>
+            </a:pPr>
+            <a:r>
+              <a:rPr lang="en-GB" sz="1600" dirty="0">
+                <a:solidFill>
+                  <a:schemeClr val="dk1"/>
+                </a:solidFill>
+              </a:rPr>
+              <a:t>Command-line interface used to run scripts and control software directly </a:t>
+            </a:r>
+            <a:r>
+              <a:rPr lang="en-GB" sz="1600" b="1" dirty="0">
+                <a:solidFill>
+                  <a:schemeClr val="dk1"/>
+                </a:solidFill>
+              </a:rPr>
+              <a:t>(most </a:t>
+            </a:r>
+            <a:r>
+              <a:rPr lang="en-GB" sz="1600" b="1" dirty="0"/>
+              <a:t>direct</a:t>
+            </a:r>
+            <a:r>
+              <a:rPr lang="en-GB" sz="1600" b="1" dirty="0">
+                <a:solidFill>
+                  <a:schemeClr val="dk1"/>
+                </a:solidFill>
+              </a:rPr>
+              <a:t>)</a:t>
             </a:r>
           </a:p>
         </p:txBody>
       </p:sp>
     </p:spTree>
+    <p:extLst>
+      <p:ext uri="{BB962C8B-B14F-4D97-AF65-F5344CB8AC3E}">
+        <p14:creationId xmlns:p14="http://schemas.microsoft.com/office/powerpoint/2010/main" val="2188775726"/>
+      </p:ext>
+    </p:extLst>
   </p:cSld>
   <p:clrMapOvr>
     <a:masterClrMapping/>
@@ -2626,9 +5123,994 @@
 </p:sld>
 </file>
 
-<file path=ppt/slides/slide5.xml><?xml version="1.0" encoding="utf-8"?>
+<file path=ppt/slides/slide15.xml><?xml version="1.0" encoding="utf-8"?>
 <p:sld xmlns:a="http://schemas.openxmlformats.org/drawingml/2006/main" xmlns:r="http://schemas.openxmlformats.org/officeDocument/2006/relationships" xmlns:p="http://schemas.openxmlformats.org/presentationml/2006/main">
   <p:cSld>
+    <p:bg>
+      <p:bgPr>
+        <a:solidFill>
+          <a:srgbClr val="FFFFFF">
+            <a:alpha val="100000"/>
+          </a:srgbClr>
+        </a:solidFill>
+        <a:effectLst/>
+      </p:bgPr>
+    </p:bg>
+    <p:spTree>
+      <p:nvGrpSpPr>
+        <p:cNvPr id="1" name=""/>
+        <p:cNvGrpSpPr/>
+        <p:nvPr/>
+      </p:nvGrpSpPr>
+      <p:grpSpPr>
+        <a:xfrm>
+          <a:off x="0" y="0"/>
+          <a:ext cx="0" cy="0"/>
+          <a:chOff x="0" y="0"/>
+          <a:chExt cx="0" cy="0"/>
+        </a:xfrm>
+      </p:grpSpPr>
+      <p:sp>
+        <p:nvSpPr>
+          <p:cNvPr id="2" name="Title 1">
+            <a:extLst>
+              <a:ext uri="{FF2B5EF4-FFF2-40B4-BE49-F238E27FC236}">
+                <a16:creationId xmlns:a16="http://schemas.microsoft.com/office/drawing/2014/main" id="{A0E3CEE2-19C8-3053-4202-BF77C8562151}"/>
+              </a:ext>
+            </a:extLst>
+          </p:cNvPr>
+          <p:cNvSpPr>
+            <a:spLocks noGrp="1"/>
+          </p:cNvSpPr>
+          <p:nvPr>
+            <p:ph type="title"/>
+          </p:nvPr>
+        </p:nvSpPr>
+        <p:spPr/>
+        <p:txBody>
+          <a:bodyPr/>
+          <a:lstStyle/>
+          <a:p>
+            <a:r>
+              <a:rPr lang="en-GB" dirty="0"/>
+              <a:t>Tips	</a:t>
+            </a:r>
+          </a:p>
+        </p:txBody>
+      </p:sp>
+      <p:sp>
+        <p:nvSpPr>
+          <p:cNvPr id="3" name="Content Placeholder 2">
+            <a:extLst>
+              <a:ext uri="{FF2B5EF4-FFF2-40B4-BE49-F238E27FC236}">
+                <a16:creationId xmlns:a16="http://schemas.microsoft.com/office/drawing/2014/main" id="{3E2DF2AD-FF99-AC34-7A39-BE569E3279B8}"/>
+              </a:ext>
+            </a:extLst>
+          </p:cNvPr>
+          <p:cNvSpPr>
+            <a:spLocks noGrp="1"/>
+          </p:cNvSpPr>
+          <p:nvPr>
+            <p:ph sz="quarter" idx="11"/>
+          </p:nvPr>
+        </p:nvSpPr>
+        <p:spPr/>
+        <p:txBody>
+          <a:bodyPr>
+            <a:noAutofit/>
+          </a:bodyPr>
+          <a:lstStyle/>
+          <a:p>
+            <a:pPr>
+              <a:lnSpc>
+                <a:spcPts val="2600"/>
+              </a:lnSpc>
+              <a:spcBef>
+                <a:spcPts val="400"/>
+              </a:spcBef>
+              <a:spcAft>
+                <a:spcPts val="400"/>
+              </a:spcAft>
+              <a:buFont typeface="Arial"/>
+              <a:buChar char="▸"/>
+            </a:pPr>
+            <a:r>
+              <a:rPr lang="en-US" sz="2000" b="1" dirty="0"/>
+              <a:t>Be persistent</a:t>
+            </a:r>
+            <a:r>
+              <a:rPr lang="en-US" sz="2000" dirty="0"/>
+              <a:t>  —  Prompts are a conversation, </a:t>
+            </a:r>
+            <a:r>
+              <a:rPr lang="en-US" sz="2000" u="sng" dirty="0"/>
+              <a:t>not a one-shot</a:t>
+            </a:r>
+            <a:endParaRPr lang="en-US" sz="2000" b="1" u="sng" dirty="0">
+              <a:solidFill>
+                <a:schemeClr val="dk1"/>
+              </a:solidFill>
+            </a:endParaRPr>
+          </a:p>
+          <a:p>
+            <a:pPr>
+              <a:lnSpc>
+                <a:spcPts val="2600"/>
+              </a:lnSpc>
+              <a:spcBef>
+                <a:spcPts val="400"/>
+              </a:spcBef>
+              <a:spcAft>
+                <a:spcPts val="400"/>
+              </a:spcAft>
+              <a:buFont typeface="Arial"/>
+              <a:buChar char="▸"/>
+            </a:pPr>
+            <a:r>
+              <a:rPr lang="en-US" sz="2000" b="1" dirty="0">
+                <a:solidFill>
+                  <a:schemeClr val="dk1"/>
+                </a:solidFill>
+              </a:rPr>
+              <a:t>Learn by doing</a:t>
+            </a:r>
+            <a:r>
+              <a:rPr lang="en-US" sz="2000" dirty="0">
+                <a:solidFill>
+                  <a:schemeClr val="dk1"/>
+                </a:solidFill>
+              </a:rPr>
+              <a:t>  —  Start with a small, real task from your own work</a:t>
+            </a:r>
+          </a:p>
+          <a:p>
+            <a:pPr>
+              <a:lnSpc>
+                <a:spcPts val="2600"/>
+              </a:lnSpc>
+              <a:spcBef>
+                <a:spcPts val="400"/>
+              </a:spcBef>
+              <a:spcAft>
+                <a:spcPts val="400"/>
+              </a:spcAft>
+              <a:buFont typeface="Arial"/>
+              <a:buChar char="▸"/>
+            </a:pPr>
+            <a:r>
+              <a:rPr lang="en-US" sz="2000" b="1" dirty="0">
+                <a:solidFill>
+                  <a:schemeClr val="dk1"/>
+                </a:solidFill>
+              </a:rPr>
+              <a:t>Reset when stuck</a:t>
+            </a:r>
+            <a:r>
+              <a:rPr lang="en-US" sz="2000" dirty="0">
+                <a:solidFill>
+                  <a:schemeClr val="dk1"/>
+                </a:solidFill>
+              </a:rPr>
+              <a:t>  —  Close the session and start fresh</a:t>
+            </a:r>
+          </a:p>
+          <a:p>
+            <a:pPr>
+              <a:lnSpc>
+                <a:spcPts val="2600"/>
+              </a:lnSpc>
+              <a:spcBef>
+                <a:spcPts val="400"/>
+              </a:spcBef>
+              <a:spcAft>
+                <a:spcPts val="400"/>
+              </a:spcAft>
+              <a:buFont typeface="Arial"/>
+              <a:buChar char="▸"/>
+            </a:pPr>
+            <a:r>
+              <a:rPr lang="en-US" sz="2000" b="1" dirty="0">
+                <a:solidFill>
+                  <a:schemeClr val="dk1"/>
+                </a:solidFill>
+              </a:rPr>
+              <a:t>Ask the AI</a:t>
+            </a:r>
+            <a:r>
+              <a:rPr lang="en-US" sz="2000" dirty="0">
+                <a:solidFill>
+                  <a:schemeClr val="dk1"/>
+                </a:solidFill>
+              </a:rPr>
+              <a:t>  —  It can suggest approaches you haven't considered</a:t>
+            </a:r>
+          </a:p>
+          <a:p>
+            <a:pPr>
+              <a:lnSpc>
+                <a:spcPts val="2600"/>
+              </a:lnSpc>
+              <a:spcBef>
+                <a:spcPts val="400"/>
+              </a:spcBef>
+              <a:spcAft>
+                <a:spcPts val="400"/>
+              </a:spcAft>
+              <a:buFont typeface="Arial"/>
+              <a:buChar char="▸"/>
+            </a:pPr>
+            <a:r>
+              <a:rPr lang="en-US" sz="2000" b="1" dirty="0">
+                <a:solidFill>
+                  <a:schemeClr val="dk1"/>
+                </a:solidFill>
+              </a:rPr>
+              <a:t>Think in automations</a:t>
+            </a:r>
+            <a:r>
+              <a:rPr lang="en-US" sz="2000" dirty="0">
+                <a:solidFill>
+                  <a:schemeClr val="dk1"/>
+                </a:solidFill>
+              </a:rPr>
+              <a:t>  —  If you do it often, the AI can do it for you</a:t>
+            </a:r>
+          </a:p>
+          <a:p>
+            <a:pPr>
+              <a:lnSpc>
+                <a:spcPts val="2600"/>
+              </a:lnSpc>
+              <a:spcBef>
+                <a:spcPts val="400"/>
+              </a:spcBef>
+              <a:spcAft>
+                <a:spcPts val="400"/>
+              </a:spcAft>
+              <a:buFont typeface="Arial"/>
+              <a:buChar char="▸"/>
+            </a:pPr>
+            <a:r>
+              <a:rPr lang="en-US" sz="2000" b="1" dirty="0"/>
+              <a:t>Ask the AI to be its own critic </a:t>
+            </a:r>
+            <a:r>
+              <a:rPr lang="en-US" sz="2000" dirty="0"/>
+              <a:t>– “you are an AER referee…”</a:t>
+            </a:r>
+          </a:p>
+          <a:p>
+            <a:pPr>
+              <a:lnSpc>
+                <a:spcPts val="2600"/>
+              </a:lnSpc>
+              <a:spcBef>
+                <a:spcPts val="400"/>
+              </a:spcBef>
+              <a:spcAft>
+                <a:spcPts val="400"/>
+              </a:spcAft>
+              <a:buFont typeface="Arial"/>
+              <a:buChar char="▸"/>
+            </a:pPr>
+            <a:r>
+              <a:rPr lang="en-US" sz="2000" b="1" dirty="0">
+                <a:solidFill>
+                  <a:schemeClr val="dk1"/>
+                </a:solidFill>
+              </a:rPr>
+              <a:t>Plan first with the AI </a:t>
+            </a:r>
+            <a:r>
+              <a:rPr lang="en-US" sz="2000" dirty="0">
+                <a:solidFill>
+                  <a:schemeClr val="dk1"/>
+                </a:solidFill>
+              </a:rPr>
+              <a:t>–</a:t>
+            </a:r>
+            <a:r>
+              <a:rPr lang="en-US" sz="2000" b="1" dirty="0">
+                <a:solidFill>
+                  <a:schemeClr val="dk1"/>
+                </a:solidFill>
+              </a:rPr>
+              <a:t> </a:t>
+            </a:r>
+            <a:r>
+              <a:rPr lang="en-US" sz="2000" dirty="0">
+                <a:solidFill>
+                  <a:schemeClr val="dk1"/>
+                </a:solidFill>
+              </a:rPr>
+              <a:t>this helps set your AI workflow</a:t>
+            </a:r>
+            <a:endParaRPr lang="en-US" sz="2000" b="1" dirty="0">
+              <a:solidFill>
+                <a:schemeClr val="dk1"/>
+              </a:solidFill>
+            </a:endParaRPr>
+          </a:p>
+        </p:txBody>
+      </p:sp>
+    </p:spTree>
+    <p:extLst>
+      <p:ext uri="{BB962C8B-B14F-4D97-AF65-F5344CB8AC3E}">
+        <p14:creationId xmlns:p14="http://schemas.microsoft.com/office/powerpoint/2010/main" val="3150495359"/>
+      </p:ext>
+    </p:extLst>
+  </p:cSld>
+  <p:clrMapOvr>
+    <a:masterClrMapping/>
+  </p:clrMapOvr>
+</p:sld>
+</file>
+
+<file path=ppt/slides/slide16.xml><?xml version="1.0" encoding="utf-8"?>
+<p:sld xmlns:a="http://schemas.openxmlformats.org/drawingml/2006/main" xmlns:r="http://schemas.openxmlformats.org/officeDocument/2006/relationships" xmlns:p="http://schemas.openxmlformats.org/presentationml/2006/main">
+  <p:cSld>
+    <p:spTree>
+      <p:nvGrpSpPr>
+        <p:cNvPr id="1" name=""/>
+        <p:cNvGrpSpPr/>
+        <p:nvPr/>
+      </p:nvGrpSpPr>
+      <p:grpSpPr>
+        <a:xfrm>
+          <a:off x="0" y="0"/>
+          <a:ext cx="0" cy="0"/>
+          <a:chOff x="0" y="0"/>
+          <a:chExt cx="0" cy="0"/>
+        </a:xfrm>
+      </p:grpSpPr>
+      <p:sp>
+        <p:nvSpPr>
+          <p:cNvPr id="2" name="Title 1">
+            <a:extLst>
+              <a:ext uri="{FF2B5EF4-FFF2-40B4-BE49-F238E27FC236}">
+                <a16:creationId xmlns:a16="http://schemas.microsoft.com/office/drawing/2014/main" id="{E151F5FC-6B92-51B5-E788-4671E2A8420B}"/>
+              </a:ext>
+            </a:extLst>
+          </p:cNvPr>
+          <p:cNvSpPr>
+            <a:spLocks noGrp="1"/>
+          </p:cNvSpPr>
+          <p:nvPr>
+            <p:ph type="title"/>
+          </p:nvPr>
+        </p:nvSpPr>
+        <p:spPr/>
+        <p:txBody>
+          <a:bodyPr/>
+          <a:lstStyle/>
+          <a:p>
+            <a:r>
+              <a:rPr lang="en-GB" dirty="0"/>
+              <a:t>Live Demo Plan</a:t>
+            </a:r>
+          </a:p>
+        </p:txBody>
+      </p:sp>
+      <p:sp>
+        <p:nvSpPr>
+          <p:cNvPr id="3" name="Content Placeholder 2">
+            <a:extLst>
+              <a:ext uri="{FF2B5EF4-FFF2-40B4-BE49-F238E27FC236}">
+                <a16:creationId xmlns:a16="http://schemas.microsoft.com/office/drawing/2014/main" id="{7C802AB7-642B-B4AD-DE55-CC3E4F26EB7F}"/>
+              </a:ext>
+            </a:extLst>
+          </p:cNvPr>
+          <p:cNvSpPr>
+            <a:spLocks noGrp="1"/>
+          </p:cNvSpPr>
+          <p:nvPr>
+            <p:ph sz="quarter" idx="11"/>
+          </p:nvPr>
+        </p:nvSpPr>
+        <p:spPr>
+          <a:xfrm>
+            <a:off x="621553" y="844062"/>
+            <a:ext cx="7902388" cy="3851228"/>
+          </a:xfrm>
+        </p:spPr>
+        <p:txBody>
+          <a:bodyPr/>
+          <a:lstStyle/>
+          <a:p>
+            <a:pPr>
+              <a:lnSpc>
+                <a:spcPts val="2200"/>
+              </a:lnSpc>
+              <a:spcBef>
+                <a:spcPts val="200"/>
+              </a:spcBef>
+              <a:spcAft>
+                <a:spcPts val="200"/>
+              </a:spcAft>
+              <a:buNone/>
+            </a:pPr>
+            <a:r>
+              <a:rPr lang="en-US" sz="1800" dirty="0">
+                <a:solidFill>
+                  <a:schemeClr val="dk1"/>
+                </a:solidFill>
+              </a:rPr>
+              <a:t>1.  </a:t>
+            </a:r>
+            <a:r>
+              <a:rPr lang="en-US" sz="1800" i="1" dirty="0">
+                <a:solidFill>
+                  <a:schemeClr val="dk1"/>
+                </a:solidFill>
+              </a:rPr>
+              <a:t>Overview</a:t>
+            </a:r>
+            <a:r>
+              <a:rPr lang="en-US" sz="1800" dirty="0">
+                <a:solidFill>
+                  <a:schemeClr val="dk1"/>
+                </a:solidFill>
+              </a:rPr>
+              <a:t>  –  AI, IDE and working folders</a:t>
+            </a:r>
+          </a:p>
+          <a:p>
+            <a:pPr>
+              <a:lnSpc>
+                <a:spcPts val="2200"/>
+              </a:lnSpc>
+              <a:spcBef>
+                <a:spcPts val="200"/>
+              </a:spcBef>
+              <a:spcAft>
+                <a:spcPts val="200"/>
+              </a:spcAft>
+              <a:buNone/>
+            </a:pPr>
+            <a:r>
+              <a:rPr lang="en-US" sz="1800" dirty="0">
+                <a:solidFill>
+                  <a:schemeClr val="dk1"/>
+                </a:solidFill>
+              </a:rPr>
+              <a:t>2.  </a:t>
+            </a:r>
+            <a:r>
+              <a:rPr lang="en-US" sz="1800" i="1" dirty="0">
+                <a:solidFill>
+                  <a:schemeClr val="dk1"/>
+                </a:solidFill>
+              </a:rPr>
+              <a:t>Viewing</a:t>
+            </a:r>
+            <a:r>
+              <a:rPr lang="en-US" sz="1800" dirty="0">
+                <a:solidFill>
+                  <a:schemeClr val="dk1"/>
+                </a:solidFill>
+              </a:rPr>
+              <a:t>  –  .md files and PDFs</a:t>
+            </a:r>
+          </a:p>
+          <a:p>
+            <a:pPr>
+              <a:lnSpc>
+                <a:spcPts val="2200"/>
+              </a:lnSpc>
+              <a:spcBef>
+                <a:spcPts val="200"/>
+              </a:spcBef>
+              <a:spcAft>
+                <a:spcPts val="200"/>
+              </a:spcAft>
+              <a:buNone/>
+            </a:pPr>
+            <a:r>
+              <a:rPr lang="en-US" sz="1800" dirty="0">
+                <a:solidFill>
+                  <a:schemeClr val="dk1"/>
+                </a:solidFill>
+              </a:rPr>
+              <a:t>3.  </a:t>
+            </a:r>
+            <a:r>
+              <a:rPr lang="en-US" sz="1800" i="1" dirty="0">
+                <a:solidFill>
+                  <a:schemeClr val="dk1"/>
+                </a:solidFill>
+              </a:rPr>
+              <a:t>Editing</a:t>
+            </a:r>
+            <a:r>
+              <a:rPr lang="en-US" sz="1800" dirty="0">
+                <a:solidFill>
+                  <a:schemeClr val="dk1"/>
+                </a:solidFill>
+              </a:rPr>
+              <a:t>  –  documents, files and folders</a:t>
+            </a:r>
+          </a:p>
+          <a:p>
+            <a:pPr>
+              <a:lnSpc>
+                <a:spcPts val="2200"/>
+              </a:lnSpc>
+              <a:spcBef>
+                <a:spcPts val="200"/>
+              </a:spcBef>
+              <a:spcAft>
+                <a:spcPts val="200"/>
+              </a:spcAft>
+            </a:pPr>
+            <a:r>
+              <a:rPr lang="en-US" sz="1800" dirty="0">
+                <a:solidFill>
+                  <a:schemeClr val="dk1"/>
+                </a:solidFill>
+              </a:rPr>
+              <a:t>4.  </a:t>
+            </a:r>
+            <a:r>
+              <a:rPr lang="en-US" sz="1800" i="1" dirty="0">
+                <a:solidFill>
+                  <a:schemeClr val="dk1"/>
+                </a:solidFill>
+              </a:rPr>
+              <a:t>Memory</a:t>
+            </a:r>
+            <a:r>
+              <a:rPr lang="en-US" sz="1800" dirty="0">
+                <a:solidFill>
+                  <a:schemeClr val="dk1"/>
+                </a:solidFill>
+              </a:rPr>
+              <a:t>  –</a:t>
+            </a:r>
+            <a:r>
+              <a:rPr lang="en-US" dirty="0"/>
+              <a:t>how to make the AI sound like you</a:t>
+            </a:r>
+            <a:endParaRPr lang="en-US" sz="1800" dirty="0">
+              <a:solidFill>
+                <a:schemeClr val="dk1"/>
+              </a:solidFill>
+            </a:endParaRPr>
+          </a:p>
+          <a:p>
+            <a:pPr marL="342900" indent="-342900">
+              <a:lnSpc>
+                <a:spcPts val="2200"/>
+              </a:lnSpc>
+              <a:spcBef>
+                <a:spcPts val="200"/>
+              </a:spcBef>
+              <a:spcAft>
+                <a:spcPts val="200"/>
+              </a:spcAft>
+              <a:buAutoNum type="arabicPeriod" startAt="5"/>
+            </a:pPr>
+            <a:r>
+              <a:rPr lang="en-US" sz="1800" i="1" dirty="0">
+                <a:solidFill>
+                  <a:schemeClr val="dk1"/>
+                </a:solidFill>
+              </a:rPr>
+              <a:t>Agents</a:t>
+            </a:r>
+            <a:r>
+              <a:rPr lang="en-US" sz="1800" dirty="0">
+                <a:solidFill>
+                  <a:schemeClr val="dk1"/>
+                </a:solidFill>
+              </a:rPr>
+              <a:t>  –</a:t>
+            </a:r>
+            <a:r>
+              <a:rPr lang="en-US" dirty="0"/>
+              <a:t>  make a referee report of your own work</a:t>
+            </a:r>
+          </a:p>
+          <a:p>
+            <a:pPr marL="342900" indent="-342900">
+              <a:lnSpc>
+                <a:spcPts val="2200"/>
+              </a:lnSpc>
+              <a:spcBef>
+                <a:spcPts val="200"/>
+              </a:spcBef>
+              <a:spcAft>
+                <a:spcPts val="200"/>
+              </a:spcAft>
+              <a:buFont typeface="Arial"/>
+              <a:buAutoNum type="arabicPeriod" startAt="5"/>
+            </a:pPr>
+            <a:r>
+              <a:rPr lang="en-US" i="1" dirty="0"/>
+              <a:t>Skills</a:t>
+            </a:r>
+            <a:r>
+              <a:rPr lang="en-US" dirty="0"/>
+              <a:t>  –  literature review with hallucination mitigation</a:t>
+            </a:r>
+          </a:p>
+          <a:p>
+            <a:pPr marL="342900" indent="-342900">
+              <a:lnSpc>
+                <a:spcPts val="2200"/>
+              </a:lnSpc>
+              <a:spcBef>
+                <a:spcPts val="200"/>
+              </a:spcBef>
+              <a:spcAft>
+                <a:spcPts val="200"/>
+              </a:spcAft>
+              <a:buFont typeface="Arial"/>
+              <a:buAutoNum type="arabicPeriod" startAt="5"/>
+            </a:pPr>
+            <a:r>
+              <a:rPr lang="en-US" i="1" dirty="0"/>
+              <a:t>Multi-agents</a:t>
+            </a:r>
+            <a:r>
+              <a:rPr lang="en-US" dirty="0"/>
+              <a:t> – brainstorming new ideas </a:t>
+            </a:r>
+          </a:p>
+          <a:p>
+            <a:pPr>
+              <a:lnSpc>
+                <a:spcPts val="2200"/>
+              </a:lnSpc>
+              <a:spcBef>
+                <a:spcPts val="200"/>
+              </a:spcBef>
+              <a:spcAft>
+                <a:spcPts val="200"/>
+              </a:spcAft>
+              <a:buNone/>
+            </a:pPr>
+            <a:r>
+              <a:rPr lang="en-US" dirty="0"/>
+              <a:t>8</a:t>
+            </a:r>
+            <a:r>
+              <a:rPr lang="en-US" sz="1800" dirty="0">
+                <a:solidFill>
+                  <a:schemeClr val="dk1"/>
+                </a:solidFill>
+              </a:rPr>
+              <a:t>.  </a:t>
+            </a:r>
+            <a:r>
+              <a:rPr lang="en-US" sz="1800" i="1" dirty="0">
+                <a:solidFill>
+                  <a:schemeClr val="dk1"/>
+                </a:solidFill>
+              </a:rPr>
+              <a:t>Data</a:t>
+            </a:r>
+            <a:r>
+              <a:rPr lang="en-US" sz="1800" dirty="0">
+                <a:solidFill>
+                  <a:schemeClr val="dk1"/>
+                </a:solidFill>
+              </a:rPr>
+              <a:t>  –  download data, relabel automatically and make graphs</a:t>
+            </a:r>
+          </a:p>
+          <a:p>
+            <a:pPr>
+              <a:lnSpc>
+                <a:spcPts val="2200"/>
+              </a:lnSpc>
+              <a:spcBef>
+                <a:spcPts val="200"/>
+              </a:spcBef>
+              <a:spcAft>
+                <a:spcPts val="200"/>
+              </a:spcAft>
+              <a:buNone/>
+            </a:pPr>
+            <a:r>
+              <a:rPr lang="en-US" dirty="0"/>
+              <a:t>9</a:t>
+            </a:r>
+            <a:r>
+              <a:rPr lang="en-US" sz="1800" dirty="0">
+                <a:solidFill>
+                  <a:schemeClr val="dk1"/>
+                </a:solidFill>
+              </a:rPr>
+              <a:t>.  </a:t>
+            </a:r>
+            <a:r>
+              <a:rPr lang="en-US" sz="1800" i="1" dirty="0">
+                <a:solidFill>
+                  <a:schemeClr val="dk1"/>
+                </a:solidFill>
+              </a:rPr>
+              <a:t>Modelling</a:t>
+            </a:r>
+            <a:r>
+              <a:rPr lang="en-US" sz="1800" dirty="0">
+                <a:solidFill>
+                  <a:schemeClr val="dk1"/>
+                </a:solidFill>
+              </a:rPr>
+              <a:t>  –  check mathematics, reason through complex models</a:t>
+            </a:r>
+          </a:p>
+          <a:p>
+            <a:pPr>
+              <a:lnSpc>
+                <a:spcPts val="2200"/>
+              </a:lnSpc>
+              <a:spcBef>
+                <a:spcPts val="200"/>
+              </a:spcBef>
+              <a:spcAft>
+                <a:spcPts val="200"/>
+              </a:spcAft>
+              <a:buNone/>
+            </a:pPr>
+            <a:endParaRPr lang="en-US" sz="1800" dirty="0">
+              <a:solidFill>
+                <a:schemeClr val="dk1"/>
+              </a:solidFill>
+            </a:endParaRPr>
+          </a:p>
+        </p:txBody>
+      </p:sp>
+    </p:spTree>
+    <p:extLst>
+      <p:ext uri="{BB962C8B-B14F-4D97-AF65-F5344CB8AC3E}">
+        <p14:creationId xmlns:p14="http://schemas.microsoft.com/office/powerpoint/2010/main" val="2762691890"/>
+      </p:ext>
+    </p:extLst>
+  </p:cSld>
+  <p:clrMapOvr>
+    <a:masterClrMapping/>
+  </p:clrMapOvr>
+</p:sld>
+</file>
+
+<file path=ppt/slides/slide2.xml><?xml version="1.0" encoding="utf-8"?>
+<p:sld xmlns:a="http://schemas.openxmlformats.org/drawingml/2006/main" xmlns:r="http://schemas.openxmlformats.org/officeDocument/2006/relationships" xmlns:p="http://schemas.openxmlformats.org/presentationml/2006/main">
+  <p:cSld>
+    <p:spTree>
+      <p:nvGrpSpPr>
+        <p:cNvPr id="1" name="">
+          <a:extLst>
+            <a:ext uri="{FF2B5EF4-FFF2-40B4-BE49-F238E27FC236}">
+              <a16:creationId xmlns:a16="http://schemas.microsoft.com/office/drawing/2014/main" id="{00F81B78-93FE-F06E-0240-21DD2E1433EA}"/>
+            </a:ext>
+          </a:extLst>
+        </p:cNvPr>
+        <p:cNvGrpSpPr/>
+        <p:nvPr/>
+      </p:nvGrpSpPr>
+      <p:grpSpPr>
+        <a:xfrm>
+          <a:off x="0" y="0"/>
+          <a:ext cx="0" cy="0"/>
+          <a:chOff x="0" y="0"/>
+          <a:chExt cx="0" cy="0"/>
+        </a:xfrm>
+      </p:grpSpPr>
+      <p:sp>
+        <p:nvSpPr>
+          <p:cNvPr id="2" name="Title 1">
+            <a:extLst>
+              <a:ext uri="{FF2B5EF4-FFF2-40B4-BE49-F238E27FC236}">
+                <a16:creationId xmlns:a16="http://schemas.microsoft.com/office/drawing/2014/main" id="{7D248B6B-6379-E7D7-809F-979EF7000F8E}"/>
+              </a:ext>
+            </a:extLst>
+          </p:cNvPr>
+          <p:cNvSpPr>
+            <a:spLocks noGrp="1"/>
+          </p:cNvSpPr>
+          <p:nvPr>
+            <p:ph type="ctrTitle"/>
+          </p:nvPr>
+        </p:nvSpPr>
+        <p:spPr>
+          <a:xfrm>
+            <a:off x="685800" y="1524000"/>
+            <a:ext cx="7772400" cy="1143000"/>
+          </a:xfrm>
+        </p:spPr>
+        <p:txBody>
+          <a:bodyPr anchor="ctr" anchorCtr="0">
+            <a:noAutofit/>
+          </a:bodyPr>
+          <a:lstStyle/>
+          <a:p>
+            <a:pPr algn="ctr">
+              <a:buNone/>
+            </a:pPr>
+            <a:r>
+              <a:rPr lang="en-US" sz="3400" dirty="0">
+                <a:latin typeface="+mj-lt"/>
+              </a:rPr>
+              <a:t>DISCLAIMER!</a:t>
+            </a:r>
+            <a:endParaRPr lang="en-US" sz="2600" dirty="0">
+              <a:solidFill>
+                <a:schemeClr val="dk1"/>
+              </a:solidFill>
+              <a:latin typeface="+mj-lt"/>
+            </a:endParaRPr>
+          </a:p>
+        </p:txBody>
+      </p:sp>
+      <p:sp>
+        <p:nvSpPr>
+          <p:cNvPr id="50" name="AccentLine">
+            <a:extLst>
+              <a:ext uri="{FF2B5EF4-FFF2-40B4-BE49-F238E27FC236}">
+                <a16:creationId xmlns:a16="http://schemas.microsoft.com/office/drawing/2014/main" id="{6AF16E58-24DA-00A2-D5BA-D1879FBF1867}"/>
+              </a:ext>
+            </a:extLst>
+          </p:cNvPr>
+          <p:cNvSpPr/>
+          <p:nvPr/>
+        </p:nvSpPr>
+        <p:spPr>
+          <a:xfrm>
+            <a:off x="2971800" y="2914650"/>
+            <a:ext cx="3200400" cy="0"/>
+          </a:xfrm>
+          <a:prstGeom prst="line">
+            <a:avLst/>
+          </a:prstGeom>
+          <a:ln w="38100" cap="rnd">
+            <a:solidFill>
+              <a:schemeClr val="accent1"/>
+            </a:solidFill>
+            <a:round/>
+          </a:ln>
+        </p:spPr>
+        <p:txBody>
+          <a:bodyPr/>
+          <a:lstStyle/>
+          <a:p>
+            <a:endParaRPr lang="en-US"/>
+          </a:p>
+        </p:txBody>
+      </p:sp>
+    </p:spTree>
+    <p:extLst>
+      <p:ext uri="{BB962C8B-B14F-4D97-AF65-F5344CB8AC3E}">
+        <p14:creationId xmlns:p14="http://schemas.microsoft.com/office/powerpoint/2010/main" val="480724078"/>
+      </p:ext>
+    </p:extLst>
+  </p:cSld>
+  <p:clrMapOvr>
+    <a:masterClrMapping/>
+  </p:clrMapOvr>
+</p:sld>
+</file>
+
+<file path=ppt/slides/slide3.xml><?xml version="1.0" encoding="utf-8"?>
+<p:sld xmlns:a="http://schemas.openxmlformats.org/drawingml/2006/main" xmlns:r="http://schemas.openxmlformats.org/officeDocument/2006/relationships" xmlns:p="http://schemas.openxmlformats.org/presentationml/2006/main">
+  <p:cSld>
+    <p:spTree>
+      <p:nvGrpSpPr>
+        <p:cNvPr id="1" name=""/>
+        <p:cNvGrpSpPr/>
+        <p:nvPr/>
+      </p:nvGrpSpPr>
+      <p:grpSpPr>
+        <a:xfrm>
+          <a:off x="0" y="0"/>
+          <a:ext cx="0" cy="0"/>
+          <a:chOff x="0" y="0"/>
+          <a:chExt cx="0" cy="0"/>
+        </a:xfrm>
+      </p:grpSpPr>
+      <p:sp>
+        <p:nvSpPr>
+          <p:cNvPr id="2" name="Title 1">
+            <a:extLst>
+              <a:ext uri="{FF2B5EF4-FFF2-40B4-BE49-F238E27FC236}">
+                <a16:creationId xmlns:a16="http://schemas.microsoft.com/office/drawing/2014/main" id="{8A09130E-2C48-F53B-0EBA-8BF68C4149A5}"/>
+              </a:ext>
+            </a:extLst>
+          </p:cNvPr>
+          <p:cNvSpPr>
+            <a:spLocks noGrp="1"/>
+          </p:cNvSpPr>
+          <p:nvPr>
+            <p:ph type="title"/>
+          </p:nvPr>
+        </p:nvSpPr>
+        <p:spPr/>
+        <p:txBody>
+          <a:bodyPr/>
+          <a:lstStyle/>
+          <a:p>
+            <a:r>
+              <a:rPr lang="en-GB" dirty="0"/>
+              <a:t>AI is getting exponentially better</a:t>
+            </a:r>
+          </a:p>
+        </p:txBody>
+      </p:sp>
+      <p:pic>
+        <p:nvPicPr>
+          <p:cNvPr id="1026" name="Picture 2" descr="Image">
+            <a:extLst>
+              <a:ext uri="{FF2B5EF4-FFF2-40B4-BE49-F238E27FC236}">
+                <a16:creationId xmlns:a16="http://schemas.microsoft.com/office/drawing/2014/main" id="{5FA73F5E-9CBB-78D6-3394-2488BCABA6AD}"/>
+              </a:ext>
+            </a:extLst>
+          </p:cNvPr>
+          <p:cNvPicPr>
+            <a:picLocks noGrp="1" noChangeAspect="1" noChangeArrowheads="1"/>
+          </p:cNvPicPr>
+          <p:nvPr>
+            <p:ph sz="quarter" idx="11"/>
+          </p:nvPr>
+        </p:nvPicPr>
+        <p:blipFill>
+          <a:blip r:embed="rId2">
+            <a:extLst>
+              <a:ext uri="{28A0092B-C50C-407E-A947-70E740481C1C}">
+                <a14:useLocalDpi xmlns:a14="http://schemas.microsoft.com/office/drawing/2010/main" val="0"/>
+              </a:ext>
+            </a:extLst>
+          </a:blip>
+          <a:srcRect/>
+          <a:stretch>
+            <a:fillRect/>
+          </a:stretch>
+        </p:blipFill>
+        <p:spPr bwMode="auto">
+          <a:xfrm>
+            <a:off x="702973" y="844550"/>
+            <a:ext cx="7738054" cy="3641725"/>
+          </a:xfrm>
+          <a:prstGeom prst="rect">
+            <a:avLst/>
+          </a:prstGeom>
+          <a:noFill/>
+          <a:extLst>
+            <a:ext uri="{909E8E84-426E-40DD-AFC4-6F175D3DCCD1}">
+              <a14:hiddenFill xmlns:a14="http://schemas.microsoft.com/office/drawing/2010/main">
+                <a:solidFill>
+                  <a:srgbClr val="FFFFFF"/>
+                </a:solidFill>
+              </a14:hiddenFill>
+            </a:ext>
+          </a:extLst>
+        </p:spPr>
+      </p:pic>
+    </p:spTree>
+    <p:extLst>
+      <p:ext uri="{BB962C8B-B14F-4D97-AF65-F5344CB8AC3E}">
+        <p14:creationId xmlns:p14="http://schemas.microsoft.com/office/powerpoint/2010/main" val="903817875"/>
+      </p:ext>
+    </p:extLst>
+  </p:cSld>
+  <p:clrMapOvr>
+    <a:masterClrMapping/>
+  </p:clrMapOvr>
+</p:sld>
+</file>
+
+<file path=ppt/slides/slide4.xml><?xml version="1.0" encoding="utf-8"?>
+<p:sld xmlns:a="http://schemas.openxmlformats.org/drawingml/2006/main" xmlns:r="http://schemas.openxmlformats.org/officeDocument/2006/relationships" xmlns:p="http://schemas.openxmlformats.org/presentationml/2006/main">
+  <p:cSld>
+    <p:bg>
+      <p:bgPr>
+        <a:solidFill>
+          <a:srgbClr val="FFFFFF">
+            <a:alpha val="100000"/>
+          </a:srgbClr>
+        </a:solidFill>
+        <a:effectLst/>
+      </p:bgPr>
+    </p:bg>
     <p:spTree>
       <p:nvGrpSpPr>
         <p:cNvPr id="1" name=""/>
@@ -2659,7 +6141,7 @@
           <a:lstStyle/>
           <a:p>
             <a:r>
-              <a:t>Economist Software Today</a:t>
+              <a:t>Economists are now using AI</a:t>
             </a:r>
           </a:p>
         </p:txBody>
@@ -2676,51 +6158,438 @@
         </p:nvSpPr>
         <p:spPr/>
         <p:txBody>
-          <a:bodyPr/>
+          <a:bodyPr>
+            <a:noAutofit/>
+          </a:bodyPr>
           <a:lstStyle/>
           <a:p>
             <a:pPr>
-              <a:defRPr sz="2100"/>
-            </a:pPr>
-            <a:r>
-              <a:t>Writing: Word, Overleaf, LaTeX, Beamer</a:t>
+              <a:lnSpc>
+                <a:spcPts val="1600"/>
+              </a:lnSpc>
+              <a:spcBef>
+                <a:spcPts val="0"/>
+              </a:spcBef>
+              <a:spcAft>
+                <a:spcPts val="300"/>
+              </a:spcAft>
+              <a:buNone/>
+              <a:defRPr sz="1400"/>
+            </a:pPr>
+            <a:r>
+              <a:rPr lang="en-US" sz="1500" b="1" dirty="0">
+                <a:solidFill>
+                  <a:schemeClr val="dk1"/>
+                </a:solidFill>
+              </a:rPr>
+              <a:t>Chris Blattman (Chicago)</a:t>
             </a:r>
           </a:p>
           <a:p>
             <a:pPr>
-              <a:defRPr sz="2100"/>
-            </a:pPr>
-            <a:r>
-              <a:t>Data and analysis: Stata, R, Python, Excel</a:t>
+              <a:lnSpc>
+                <a:spcPts val="1500"/>
+              </a:lnSpc>
+              <a:spcBef>
+                <a:spcPts val="0"/>
+              </a:spcBef>
+              <a:spcAft>
+                <a:spcPts val="500"/>
+              </a:spcAft>
+              <a:buNone/>
+              <a:defRPr sz="1400"/>
+            </a:pPr>
+            <a:r>
+              <a:rPr lang="en-US" sz="1400" i="1" dirty="0">
+                <a:solidFill>
+                  <a:schemeClr val="dk1"/>
+                </a:solidFill>
+              </a:rPr>
+              <a:t>"For each of about 10 research projects, I built an automated skill where Claude Code pulls, integrates, and generates a weekly overview with priorities."</a:t>
             </a:r>
           </a:p>
           <a:p>
             <a:pPr>
-              <a:defRPr sz="2100"/>
-            </a:pPr>
-            <a:r>
-              <a:t>References: Zotero, Mendeley, EndNote, BibTeX</a:t>
+              <a:lnSpc>
+                <a:spcPts val="1600"/>
+              </a:lnSpc>
+              <a:spcBef>
+                <a:spcPts val="0"/>
+              </a:spcBef>
+              <a:spcAft>
+                <a:spcPts val="300"/>
+              </a:spcAft>
+              <a:buNone/>
+              <a:defRPr sz="1400"/>
+            </a:pPr>
+            <a:r>
+              <a:rPr lang="en-US" sz="1500" b="1" dirty="0">
+                <a:solidFill>
+                  <a:schemeClr val="dk1"/>
+                </a:solidFill>
+              </a:rPr>
+              <a:t>Antonio Mele (LSE)</a:t>
             </a:r>
           </a:p>
           <a:p>
             <a:pPr>
-              <a:defRPr sz="2100"/>
-            </a:pPr>
-            <a:r>
-              <a:t>Storage/versioning: local folders, cloud drives, mixed naming rules</a:t>
+              <a:lnSpc>
+                <a:spcPts val="1500"/>
+              </a:lnSpc>
+              <a:spcBef>
+                <a:spcPts val="0"/>
+              </a:spcBef>
+              <a:spcAft>
+                <a:spcPts val="500"/>
+              </a:spcAft>
+              <a:buNone/>
+              <a:defRPr sz="1400"/>
+            </a:pPr>
+            <a:r>
+              <a:rPr lang="en-US" sz="1400" i="1" dirty="0">
+                <a:solidFill>
+                  <a:schemeClr val="dk1"/>
+                </a:solidFill>
+              </a:rPr>
+              <a:t>"Workflow transformed … 50–200x productivity multiplier."</a:t>
             </a:r>
           </a:p>
           <a:p>
             <a:pPr>
-              <a:defRPr sz="2100"/>
-            </a:pPr>
-            <a:r>
-              <a:t>AI coding tools can connect these workflows with consistent file-based rules.</a:t>
+              <a:lnSpc>
+                <a:spcPts val="1600"/>
+              </a:lnSpc>
+              <a:spcBef>
+                <a:spcPts val="0"/>
+              </a:spcBef>
+              <a:spcAft>
+                <a:spcPts val="300"/>
+              </a:spcAft>
+              <a:buNone/>
+              <a:defRPr sz="1400"/>
+            </a:pPr>
+            <a:r>
+              <a:rPr lang="en-US" sz="1500" b="1" dirty="0">
+                <a:solidFill>
+                  <a:schemeClr val="dk1"/>
+                </a:solidFill>
+              </a:rPr>
+              <a:t>Paul Novosad (Dartmouth)</a:t>
+            </a:r>
+          </a:p>
+          <a:p>
+            <a:pPr>
+              <a:lnSpc>
+                <a:spcPts val="1500"/>
+              </a:lnSpc>
+              <a:spcBef>
+                <a:spcPts val="0"/>
+              </a:spcBef>
+              <a:spcAft>
+                <a:spcPts val="700"/>
+              </a:spcAft>
+              <a:buNone/>
+              <a:defRPr sz="1400"/>
+            </a:pPr>
+            <a:r>
+              <a:rPr lang="en-US" sz="1400" i="1" dirty="0">
+                <a:solidFill>
+                  <a:schemeClr val="dk1"/>
+                </a:solidFill>
+              </a:rPr>
+              <a:t>"I wrote a decent paper with AI in about 3 hours from start to finish.“</a:t>
+            </a:r>
+          </a:p>
+          <a:p>
+            <a:pPr>
+              <a:lnSpc>
+                <a:spcPts val="1500"/>
+              </a:lnSpc>
+              <a:spcBef>
+                <a:spcPts val="0"/>
+              </a:spcBef>
+              <a:spcAft>
+                <a:spcPts val="700"/>
+              </a:spcAft>
+              <a:buNone/>
+              <a:defRPr sz="1400"/>
+            </a:pPr>
+            <a:endParaRPr lang="en-US" sz="1400" i="1" dirty="0">
+              <a:solidFill>
+                <a:schemeClr val="dk1"/>
+              </a:solidFill>
+            </a:endParaRPr>
+          </a:p>
+          <a:p>
+            <a:pPr algn="ctr">
+              <a:lnSpc>
+                <a:spcPts val="1800"/>
+              </a:lnSpc>
+              <a:spcBef>
+                <a:spcPts val="200"/>
+              </a:spcBef>
+              <a:buNone/>
+              <a:defRPr sz="1400"/>
+            </a:pPr>
+            <a:endParaRPr lang="en-US" sz="1600" b="1" dirty="0">
+              <a:solidFill>
+                <a:schemeClr val="dk1"/>
+              </a:solidFill>
+            </a:endParaRPr>
+          </a:p>
+          <a:p>
+            <a:pPr algn="ctr">
+              <a:lnSpc>
+                <a:spcPts val="1800"/>
+              </a:lnSpc>
+              <a:spcBef>
+                <a:spcPts val="200"/>
+              </a:spcBef>
+              <a:buNone/>
+              <a:defRPr sz="1400"/>
+            </a:pPr>
+            <a:r>
+              <a:rPr lang="en-US" sz="2400" b="1" i="1" dirty="0"/>
+              <a:t>Vibe Coding</a:t>
+            </a:r>
+          </a:p>
+          <a:p>
+            <a:pPr algn="ctr">
+              <a:lnSpc>
+                <a:spcPts val="1800"/>
+              </a:lnSpc>
+              <a:spcBef>
+                <a:spcPts val="200"/>
+              </a:spcBef>
+              <a:buNone/>
+              <a:defRPr sz="1400"/>
+            </a:pPr>
+            <a:r>
+              <a:rPr lang="en-US" sz="1600" b="1" dirty="0">
+                <a:solidFill>
+                  <a:schemeClr val="dk1"/>
+                </a:solidFill>
+              </a:rPr>
+              <a:t>You don't need to know how to code — just give instructions in plain English</a:t>
             </a:r>
           </a:p>
         </p:txBody>
       </p:sp>
     </p:spTree>
+    <p:extLst>
+      <p:ext uri="{BB962C8B-B14F-4D97-AF65-F5344CB8AC3E}">
+        <p14:creationId xmlns:p14="http://schemas.microsoft.com/office/powerpoint/2010/main" val="2223313964"/>
+      </p:ext>
+    </p:extLst>
+  </p:cSld>
+  <p:clrMapOvr>
+    <a:masterClrMapping/>
+  </p:clrMapOvr>
+</p:sld>
+</file>
+
+<file path=ppt/slides/slide5.xml><?xml version="1.0" encoding="utf-8"?>
+<p:sld xmlns:a="http://schemas.openxmlformats.org/drawingml/2006/main" xmlns:r="http://schemas.openxmlformats.org/officeDocument/2006/relationships" xmlns:p="http://schemas.openxmlformats.org/presentationml/2006/main">
+  <p:cSld>
+    <p:bg>
+      <p:bgPr>
+        <a:solidFill>
+          <a:srgbClr val="FFFFFF">
+            <a:alpha val="100000"/>
+          </a:srgbClr>
+        </a:solidFill>
+        <a:effectLst/>
+      </p:bgPr>
+    </p:bg>
+    <p:spTree>
+      <p:nvGrpSpPr>
+        <p:cNvPr id="1" name=""/>
+        <p:cNvGrpSpPr/>
+        <p:nvPr/>
+      </p:nvGrpSpPr>
+      <p:grpSpPr>
+        <a:xfrm>
+          <a:off x="0" y="0"/>
+          <a:ext cx="0" cy="0"/>
+          <a:chOff x="0" y="0"/>
+          <a:chExt cx="0" cy="0"/>
+        </a:xfrm>
+      </p:grpSpPr>
+      <p:sp>
+        <p:nvSpPr>
+          <p:cNvPr id="2" name="Title 1"/>
+          <p:cNvSpPr>
+            <a:spLocks noGrp="1"/>
+          </p:cNvSpPr>
+          <p:nvPr>
+            <p:ph type="title"/>
+          </p:nvPr>
+        </p:nvSpPr>
+        <p:spPr/>
+        <p:txBody>
+          <a:bodyPr/>
+          <a:lstStyle/>
+          <a:p>
+            <a:r>
+              <a:rPr lang="en-GB" dirty="0"/>
+              <a:t>Example </a:t>
+            </a:r>
+            <a:r>
+              <a:rPr dirty="0"/>
+              <a:t>Problem</a:t>
+            </a:r>
+            <a:r>
+              <a:rPr lang="en-GB" dirty="0"/>
+              <a:t> with ChatGPT</a:t>
+            </a:r>
+            <a:endParaRPr dirty="0"/>
+          </a:p>
+        </p:txBody>
+      </p:sp>
+      <p:sp>
+        <p:nvSpPr>
+          <p:cNvPr id="3" name="Content Placeholder 2"/>
+          <p:cNvSpPr>
+            <a:spLocks noGrp="1"/>
+          </p:cNvSpPr>
+          <p:nvPr>
+            <p:ph sz="quarter" idx="11"/>
+          </p:nvPr>
+        </p:nvSpPr>
+        <p:spPr/>
+        <p:txBody>
+          <a:bodyPr>
+            <a:noAutofit/>
+          </a:bodyPr>
+          <a:lstStyle/>
+          <a:p>
+            <a:pPr>
+              <a:lnSpc>
+                <a:spcPts val="2600"/>
+              </a:lnSpc>
+              <a:spcBef>
+                <a:spcPts val="400"/>
+              </a:spcBef>
+              <a:spcAft>
+                <a:spcPts val="400"/>
+              </a:spcAft>
+              <a:buFont typeface="Arial"/>
+              <a:buChar char="▸"/>
+              <a:defRPr sz="2000"/>
+            </a:pPr>
+            <a:r>
+              <a:rPr lang="en-US" sz="2000" dirty="0">
+                <a:solidFill>
+                  <a:schemeClr val="dk1"/>
+                </a:solidFill>
+              </a:rPr>
+              <a:t>Chat-only models can generate </a:t>
+            </a:r>
+            <a:r>
+              <a:rPr lang="en-US" sz="2000" b="1" dirty="0">
+                <a:solidFill>
+                  <a:schemeClr val="dk1"/>
+                </a:solidFill>
+              </a:rPr>
+              <a:t>plausible but fake</a:t>
+            </a:r>
+            <a:r>
+              <a:rPr lang="en-US" sz="2000" dirty="0">
+                <a:solidFill>
+                  <a:schemeClr val="dk1"/>
+                </a:solidFill>
+              </a:rPr>
+              <a:t> citations and references</a:t>
+            </a:r>
+          </a:p>
+          <a:p>
+            <a:pPr>
+              <a:lnSpc>
+                <a:spcPts val="2600"/>
+              </a:lnSpc>
+              <a:spcBef>
+                <a:spcPts val="400"/>
+              </a:spcBef>
+              <a:spcAft>
+                <a:spcPts val="400"/>
+              </a:spcAft>
+              <a:buFont typeface="Arial"/>
+              <a:buChar char="▸"/>
+              <a:defRPr sz="2000"/>
+            </a:pPr>
+            <a:r>
+              <a:rPr lang="en-US" sz="2000" dirty="0">
+                <a:solidFill>
+                  <a:schemeClr val="dk1"/>
+                </a:solidFill>
+              </a:rPr>
+              <a:t>Risky for academic work if outputs are not verified</a:t>
+            </a:r>
+          </a:p>
+          <a:p>
+            <a:pPr>
+              <a:lnSpc>
+                <a:spcPts val="2600"/>
+              </a:lnSpc>
+              <a:spcBef>
+                <a:spcPts val="400"/>
+              </a:spcBef>
+              <a:spcAft>
+                <a:spcPts val="400"/>
+              </a:spcAft>
+              <a:buFont typeface="Arial"/>
+              <a:buChar char="▸"/>
+              <a:defRPr sz="2000"/>
+            </a:pPr>
+            <a:r>
+              <a:rPr lang="en-US" sz="2000" dirty="0">
+                <a:solidFill>
+                  <a:schemeClr val="dk1"/>
+                </a:solidFill>
+              </a:rPr>
+              <a:t>Common failure: invented paper titles, authors, or journals</a:t>
+            </a:r>
+          </a:p>
+          <a:p>
+            <a:pPr>
+              <a:lnSpc>
+                <a:spcPts val="2600"/>
+              </a:lnSpc>
+              <a:spcBef>
+                <a:spcPts val="400"/>
+              </a:spcBef>
+              <a:spcAft>
+                <a:spcPts val="400"/>
+              </a:spcAft>
+              <a:buFont typeface="Arial"/>
+              <a:buChar char="▸"/>
+              <a:defRPr sz="2000"/>
+            </a:pPr>
+            <a:r>
+              <a:rPr lang="en-US" sz="2000" dirty="0">
+                <a:solidFill>
+                  <a:schemeClr val="dk1"/>
+                </a:solidFill>
+              </a:rPr>
+              <a:t>AI coding agents solve this by working with your </a:t>
+            </a:r>
+            <a:r>
+              <a:rPr lang="en-US" sz="2000" b="1" dirty="0">
+                <a:solidFill>
+                  <a:schemeClr val="dk1"/>
+                </a:solidFill>
+              </a:rPr>
+              <a:t>actual files</a:t>
+            </a:r>
+          </a:p>
+        </p:txBody>
+      </p:sp>
+    </p:spTree>
+    <p:extLst>
+      <p:ext uri="{BB962C8B-B14F-4D97-AF65-F5344CB8AC3E}">
+        <p14:creationId xmlns:p14="http://schemas.microsoft.com/office/powerpoint/2010/main" val="1267042509"/>
+      </p:ext>
+    </p:extLst>
   </p:cSld>
   <p:clrMapOvr>
     <a:masterClrMapping/>
@@ -2731,6 +6600,1692 @@
 <file path=ppt/slides/slide6.xml><?xml version="1.0" encoding="utf-8"?>
 <p:sld xmlns:a="http://schemas.openxmlformats.org/drawingml/2006/main" xmlns:r="http://schemas.openxmlformats.org/officeDocument/2006/relationships" xmlns:p="http://schemas.openxmlformats.org/presentationml/2006/main">
   <p:cSld>
+    <p:bg>
+      <p:bgPr>
+        <a:solidFill>
+          <a:srgbClr val="FFFFFF">
+            <a:alpha val="100000"/>
+          </a:srgbClr>
+        </a:solidFill>
+        <a:effectLst/>
+      </p:bgPr>
+    </p:bg>
+    <p:spTree>
+      <p:nvGrpSpPr>
+        <p:cNvPr id="1" name=""/>
+        <p:cNvGrpSpPr/>
+        <p:nvPr/>
+      </p:nvGrpSpPr>
+      <p:grpSpPr>
+        <a:xfrm>
+          <a:off x="0" y="0"/>
+          <a:ext cx="0" cy="0"/>
+          <a:chOff x="0" y="0"/>
+          <a:chExt cx="0" cy="0"/>
+        </a:xfrm>
+      </p:grpSpPr>
+      <p:sp>
+        <p:nvSpPr>
+          <p:cNvPr id="2" name="Title 1"/>
+          <p:cNvSpPr>
+            <a:spLocks noGrp="1"/>
+          </p:cNvSpPr>
+          <p:nvPr>
+            <p:ph type="title"/>
+          </p:nvPr>
+        </p:nvSpPr>
+        <p:spPr/>
+        <p:txBody>
+          <a:bodyPr/>
+          <a:lstStyle/>
+          <a:p>
+            <a:r>
+              <a:rPr dirty="0"/>
+              <a:t>How AI Coding Helps: Prevent, Check, Fix</a:t>
+            </a:r>
+          </a:p>
+        </p:txBody>
+      </p:sp>
+      <p:sp>
+        <p:nvSpPr>
+          <p:cNvPr id="3" name="Content Placeholder 2"/>
+          <p:cNvSpPr>
+            <a:spLocks noGrp="1"/>
+          </p:cNvSpPr>
+          <p:nvPr>
+            <p:ph sz="quarter" idx="11"/>
+          </p:nvPr>
+        </p:nvSpPr>
+        <p:spPr/>
+        <p:txBody>
+          <a:bodyPr>
+            <a:noAutofit/>
+          </a:bodyPr>
+          <a:lstStyle/>
+          <a:p>
+            <a:pPr>
+              <a:lnSpc>
+                <a:spcPts val="2600"/>
+              </a:lnSpc>
+              <a:spcBef>
+                <a:spcPts val="400"/>
+              </a:spcBef>
+              <a:spcAft>
+                <a:spcPts val="400"/>
+              </a:spcAft>
+              <a:buFont typeface="Arial"/>
+              <a:buChar char="▸"/>
+              <a:defRPr sz="2000"/>
+            </a:pPr>
+            <a:r>
+              <a:rPr lang="en-US" sz="2000" b="1" dirty="0">
+                <a:solidFill>
+                  <a:schemeClr val="dk1"/>
+                </a:solidFill>
+              </a:rPr>
+              <a:t>Prevent</a:t>
+            </a:r>
+            <a:r>
+              <a:rPr lang="en-US" sz="2000" dirty="0">
+                <a:solidFill>
+                  <a:schemeClr val="dk1"/>
+                </a:solidFill>
+              </a:rPr>
+              <a:t>  —  Set rules in project files (AGENTS.md, project.md)</a:t>
+            </a:r>
+          </a:p>
+          <a:p>
+            <a:pPr>
+              <a:lnSpc>
+                <a:spcPts val="2600"/>
+              </a:lnSpc>
+              <a:spcBef>
+                <a:spcPts val="400"/>
+              </a:spcBef>
+              <a:spcAft>
+                <a:spcPts val="400"/>
+              </a:spcAft>
+              <a:buFont typeface="Arial"/>
+              <a:buChar char="▸"/>
+              <a:defRPr sz="2000"/>
+            </a:pPr>
+            <a:r>
+              <a:rPr lang="en-US" sz="2000" b="1" dirty="0">
+                <a:solidFill>
+                  <a:schemeClr val="dk1"/>
+                </a:solidFill>
+              </a:rPr>
+              <a:t>Check</a:t>
+            </a:r>
+            <a:r>
+              <a:rPr lang="en-US" sz="2000" dirty="0">
+                <a:solidFill>
+                  <a:schemeClr val="dk1"/>
+                </a:solidFill>
+              </a:rPr>
+              <a:t>  —  Verify outputs against local files and known sources</a:t>
+            </a:r>
+          </a:p>
+          <a:p>
+            <a:pPr>
+              <a:lnSpc>
+                <a:spcPts val="2600"/>
+              </a:lnSpc>
+              <a:spcBef>
+                <a:spcPts val="400"/>
+              </a:spcBef>
+              <a:spcAft>
+                <a:spcPts val="400"/>
+              </a:spcAft>
+              <a:buFont typeface="Arial"/>
+              <a:buChar char="▸"/>
+              <a:defRPr sz="2000"/>
+            </a:pPr>
+            <a:r>
+              <a:rPr lang="en-US" sz="2000" b="1" dirty="0">
+                <a:solidFill>
+                  <a:schemeClr val="dk1"/>
+                </a:solidFill>
+              </a:rPr>
+              <a:t>Fix</a:t>
+            </a:r>
+            <a:r>
+              <a:rPr lang="en-US" sz="2000" dirty="0">
+                <a:solidFill>
+                  <a:schemeClr val="dk1"/>
+                </a:solidFill>
+              </a:rPr>
+              <a:t>  —  Update instructions and rerun with tighter constraints</a:t>
+            </a:r>
+          </a:p>
+          <a:p>
+            <a:pPr>
+              <a:lnSpc>
+                <a:spcPts val="2600"/>
+              </a:lnSpc>
+              <a:spcBef>
+                <a:spcPts val="400"/>
+              </a:spcBef>
+              <a:spcAft>
+                <a:spcPts val="400"/>
+              </a:spcAft>
+              <a:buFont typeface="Arial"/>
+              <a:buChar char="▸"/>
+              <a:defRPr sz="2000"/>
+            </a:pPr>
+            <a:r>
+              <a:rPr lang="en-US" sz="2000" b="1" dirty="0"/>
+              <a:t>Result </a:t>
+            </a:r>
+            <a:r>
+              <a:rPr lang="en-US" sz="2000" dirty="0"/>
+              <a:t>— well written literature review without hallucinations</a:t>
+            </a:r>
+            <a:endParaRPr lang="en-US" sz="2000" dirty="0">
+              <a:solidFill>
+                <a:schemeClr val="dk1"/>
+              </a:solidFill>
+            </a:endParaRPr>
+          </a:p>
+        </p:txBody>
+      </p:sp>
+    </p:spTree>
+    <p:extLst>
+      <p:ext uri="{BB962C8B-B14F-4D97-AF65-F5344CB8AC3E}">
+        <p14:creationId xmlns:p14="http://schemas.microsoft.com/office/powerpoint/2010/main" val="1308782171"/>
+      </p:ext>
+    </p:extLst>
+  </p:cSld>
+  <p:clrMapOvr>
+    <a:masterClrMapping/>
+  </p:clrMapOvr>
+</p:sld>
+</file>
+
+<file path=ppt/slides/slide7.xml><?xml version="1.0" encoding="utf-8"?>
+<p:sld xmlns:a="http://schemas.openxmlformats.org/drawingml/2006/main" xmlns:r="http://schemas.openxmlformats.org/officeDocument/2006/relationships" xmlns:p="http://schemas.openxmlformats.org/presentationml/2006/main">
+  <p:cSld>
+    <p:bg>
+      <p:bgPr>
+        <a:solidFill>
+          <a:srgbClr val="FFFFFF">
+            <a:alpha val="100000"/>
+          </a:srgbClr>
+        </a:solidFill>
+        <a:effectLst/>
+      </p:bgPr>
+    </p:bg>
+    <p:spTree>
+      <p:nvGrpSpPr>
+        <p:cNvPr id="1" name=""/>
+        <p:cNvGrpSpPr/>
+        <p:nvPr/>
+      </p:nvGrpSpPr>
+      <p:grpSpPr>
+        <a:xfrm>
+          <a:off x="0" y="0"/>
+          <a:ext cx="0" cy="0"/>
+          <a:chOff x="0" y="0"/>
+          <a:chExt cx="0" cy="0"/>
+        </a:xfrm>
+      </p:grpSpPr>
+      <p:sp>
+        <p:nvSpPr>
+          <p:cNvPr id="2" name="Title 1"/>
+          <p:cNvSpPr>
+            <a:spLocks noGrp="1"/>
+          </p:cNvSpPr>
+          <p:nvPr>
+            <p:ph type="title"/>
+          </p:nvPr>
+        </p:nvSpPr>
+        <p:spPr/>
+        <p:txBody>
+          <a:bodyPr/>
+          <a:lstStyle/>
+          <a:p>
+            <a:r>
+              <a:t>Economist Software Today</a:t>
+            </a:r>
+          </a:p>
+        </p:txBody>
+      </p:sp>
+      <p:sp>
+        <p:nvSpPr>
+          <p:cNvPr id="3" name="Content Placeholder 2"/>
+          <p:cNvSpPr>
+            <a:spLocks noGrp="1"/>
+          </p:cNvSpPr>
+          <p:nvPr>
+            <p:ph sz="quarter" idx="11"/>
+          </p:nvPr>
+        </p:nvSpPr>
+        <p:spPr/>
+        <p:txBody>
+          <a:bodyPr>
+            <a:noAutofit/>
+          </a:bodyPr>
+          <a:lstStyle/>
+          <a:p>
+            <a:pPr>
+              <a:lnSpc>
+                <a:spcPts val="2400"/>
+              </a:lnSpc>
+              <a:spcBef>
+                <a:spcPts val="300"/>
+              </a:spcBef>
+              <a:spcAft>
+                <a:spcPts val="300"/>
+              </a:spcAft>
+              <a:buFont typeface="Arial"/>
+              <a:buChar char="▸"/>
+              <a:defRPr sz="1900"/>
+            </a:pPr>
+            <a:r>
+              <a:rPr lang="en-US" sz="1900" b="1" dirty="0">
+                <a:solidFill>
+                  <a:schemeClr val="dk1"/>
+                </a:solidFill>
+              </a:rPr>
+              <a:t>Writing</a:t>
+            </a:r>
+            <a:r>
+              <a:rPr lang="en-US" sz="1900" dirty="0">
+                <a:solidFill>
+                  <a:schemeClr val="dk1"/>
+                </a:solidFill>
+              </a:rPr>
+              <a:t>  —  Word, Overleaf, LaTeX, Beamer</a:t>
+            </a:r>
+          </a:p>
+          <a:p>
+            <a:pPr>
+              <a:lnSpc>
+                <a:spcPts val="2400"/>
+              </a:lnSpc>
+              <a:spcBef>
+                <a:spcPts val="300"/>
+              </a:spcBef>
+              <a:spcAft>
+                <a:spcPts val="300"/>
+              </a:spcAft>
+              <a:buFont typeface="Arial"/>
+              <a:buChar char="▸"/>
+              <a:defRPr sz="1900"/>
+            </a:pPr>
+            <a:r>
+              <a:rPr lang="en-US" sz="1900" b="1" dirty="0">
+                <a:solidFill>
+                  <a:schemeClr val="dk1"/>
+                </a:solidFill>
+              </a:rPr>
+              <a:t>Data</a:t>
+            </a:r>
+            <a:r>
+              <a:rPr lang="en-US" sz="1900" dirty="0">
+                <a:solidFill>
+                  <a:schemeClr val="dk1"/>
+                </a:solidFill>
+              </a:rPr>
+              <a:t>  —  Stata, R, Python, Excel</a:t>
+            </a:r>
+          </a:p>
+          <a:p>
+            <a:pPr>
+              <a:lnSpc>
+                <a:spcPts val="2400"/>
+              </a:lnSpc>
+              <a:spcBef>
+                <a:spcPts val="300"/>
+              </a:spcBef>
+              <a:spcAft>
+                <a:spcPts val="300"/>
+              </a:spcAft>
+              <a:buFont typeface="Arial"/>
+              <a:buChar char="▸"/>
+              <a:defRPr sz="1900"/>
+            </a:pPr>
+            <a:r>
+              <a:rPr lang="en-US" sz="1900" b="1" dirty="0"/>
+              <a:t>Coding </a:t>
+            </a:r>
+            <a:r>
+              <a:rPr lang="en-US" sz="1900" dirty="0"/>
+              <a:t>– MATLAB, C++, Fortran, Julia</a:t>
+            </a:r>
+            <a:endParaRPr lang="en-US" sz="1900" dirty="0">
+              <a:solidFill>
+                <a:schemeClr val="dk1"/>
+              </a:solidFill>
+            </a:endParaRPr>
+          </a:p>
+          <a:p>
+            <a:pPr>
+              <a:lnSpc>
+                <a:spcPts val="2400"/>
+              </a:lnSpc>
+              <a:spcBef>
+                <a:spcPts val="300"/>
+              </a:spcBef>
+              <a:spcAft>
+                <a:spcPts val="300"/>
+              </a:spcAft>
+              <a:buFont typeface="Arial"/>
+              <a:buChar char="▸"/>
+              <a:defRPr sz="1900"/>
+            </a:pPr>
+            <a:r>
+              <a:rPr lang="en-US" sz="1900" b="1" dirty="0">
+                <a:solidFill>
+                  <a:schemeClr val="dk1"/>
+                </a:solidFill>
+              </a:rPr>
+              <a:t>References</a:t>
+            </a:r>
+            <a:r>
+              <a:rPr lang="en-US" sz="1900" dirty="0">
+                <a:solidFill>
+                  <a:schemeClr val="dk1"/>
+                </a:solidFill>
+              </a:rPr>
+              <a:t>  —  Zotero, Mendeley, EndNote, BibTeX</a:t>
+            </a:r>
+          </a:p>
+          <a:p>
+            <a:pPr>
+              <a:lnSpc>
+                <a:spcPts val="2400"/>
+              </a:lnSpc>
+              <a:spcBef>
+                <a:spcPts val="300"/>
+              </a:spcBef>
+              <a:spcAft>
+                <a:spcPts val="300"/>
+              </a:spcAft>
+              <a:buFont typeface="Arial"/>
+              <a:buChar char="▸"/>
+              <a:defRPr sz="1900"/>
+            </a:pPr>
+            <a:r>
+              <a:rPr lang="en-US" sz="1900" b="1" dirty="0">
+                <a:solidFill>
+                  <a:schemeClr val="dk1"/>
+                </a:solidFill>
+              </a:rPr>
+              <a:t>Storage</a:t>
+            </a:r>
+            <a:r>
+              <a:rPr lang="en-US" sz="1900" dirty="0">
+                <a:solidFill>
+                  <a:schemeClr val="dk1"/>
+                </a:solidFill>
+              </a:rPr>
+              <a:t>  —  Local folders, cloud drives, mixed naming rules</a:t>
+            </a:r>
+          </a:p>
+          <a:p>
+            <a:pPr>
+              <a:lnSpc>
+                <a:spcPts val="2400"/>
+              </a:lnSpc>
+              <a:spcBef>
+                <a:spcPts val="600"/>
+              </a:spcBef>
+              <a:spcAft>
+                <a:spcPts val="0"/>
+              </a:spcAft>
+              <a:buNone/>
+              <a:defRPr sz="1800"/>
+            </a:pPr>
+            <a:r>
+              <a:rPr lang="en-US" sz="1800" i="1" dirty="0">
+                <a:solidFill>
+                  <a:schemeClr val="dk1"/>
+                </a:solidFill>
+              </a:rPr>
+              <a:t>AI coding agents connect these fragmented workflows with consistent, file-based rules.</a:t>
+            </a:r>
+          </a:p>
+        </p:txBody>
+      </p:sp>
+    </p:spTree>
+    <p:extLst>
+      <p:ext uri="{BB962C8B-B14F-4D97-AF65-F5344CB8AC3E}">
+        <p14:creationId xmlns:p14="http://schemas.microsoft.com/office/powerpoint/2010/main" val="2717527751"/>
+      </p:ext>
+    </p:extLst>
+  </p:cSld>
+  <p:clrMapOvr>
+    <a:masterClrMapping/>
+  </p:clrMapOvr>
+</p:sld>
+</file>
+
+<file path=ppt/slides/slide8.xml><?xml version="1.0" encoding="utf-8"?>
+<p:sld xmlns:a="http://schemas.openxmlformats.org/drawingml/2006/main" xmlns:r="http://schemas.openxmlformats.org/officeDocument/2006/relationships" xmlns:p="http://schemas.openxmlformats.org/presentationml/2006/main">
+  <p:cSld>
+    <p:bg>
+      <p:bgPr>
+        <a:solidFill>
+          <a:srgbClr val="FFFFFF">
+            <a:alpha val="100000"/>
+          </a:srgbClr>
+        </a:solidFill>
+        <a:effectLst/>
+      </p:bgPr>
+    </p:bg>
+    <p:spTree>
+      <p:nvGrpSpPr>
+        <p:cNvPr id="1" name=""/>
+        <p:cNvGrpSpPr/>
+        <p:nvPr/>
+      </p:nvGrpSpPr>
+      <p:grpSpPr>
+        <a:xfrm>
+          <a:off x="0" y="0"/>
+          <a:ext cx="0" cy="0"/>
+          <a:chOff x="0" y="0"/>
+          <a:chExt cx="0" cy="0"/>
+        </a:xfrm>
+      </p:grpSpPr>
+      <p:sp>
+        <p:nvSpPr>
+          <p:cNvPr id="2" name="Title 1">
+            <a:extLst>
+              <a:ext uri="{FF2B5EF4-FFF2-40B4-BE49-F238E27FC236}">
+                <a16:creationId xmlns:a16="http://schemas.microsoft.com/office/drawing/2014/main" id="{132432C9-3D5E-F2E5-96B9-5668308EE6E8}"/>
+              </a:ext>
+            </a:extLst>
+          </p:cNvPr>
+          <p:cNvSpPr>
+            <a:spLocks noGrp="1"/>
+          </p:cNvSpPr>
+          <p:nvPr>
+            <p:ph type="title"/>
+          </p:nvPr>
+        </p:nvSpPr>
+        <p:spPr/>
+        <p:txBody>
+          <a:bodyPr/>
+          <a:lstStyle/>
+          <a:p>
+            <a:r>
+              <a:rPr lang="en-GB" dirty="0"/>
+              <a:t>What I used AI for</a:t>
+            </a:r>
+          </a:p>
+        </p:txBody>
+      </p:sp>
+      <p:sp>
+        <p:nvSpPr>
+          <p:cNvPr id="10" name="LeftColumn"/>
+          <p:cNvSpPr txBox="1"/>
+          <p:nvPr/>
+        </p:nvSpPr>
+        <p:spPr>
+          <a:xfrm>
+            <a:off x="622300" y="863600"/>
+            <a:ext cx="3873500" cy="4000500"/>
+          </a:xfrm>
+          <a:prstGeom prst="rect">
+            <a:avLst/>
+          </a:prstGeom>
+          <a:noFill/>
+        </p:spPr>
+        <p:txBody>
+          <a:bodyPr wrap="square" lIns="36000" tIns="0" rIns="36000" bIns="0" anchor="t">
+            <a:noAutofit/>
+          </a:bodyPr>
+          <a:lstStyle/>
+          <a:p>
+            <a:pPr marL="0" indent="0">
+              <a:lnSpc>
+                <a:spcPts val="1200"/>
+              </a:lnSpc>
+              <a:spcBef>
+                <a:spcPts val="0"/>
+              </a:spcBef>
+              <a:spcAft>
+                <a:spcPts val="0"/>
+              </a:spcAft>
+              <a:buNone/>
+            </a:pPr>
+            <a:r>
+              <a:rPr lang="en-GB" sz="1400" b="1" dirty="0">
+                <a:solidFill>
+                  <a:schemeClr val="tx1"/>
+                </a:solidFill>
+              </a:rPr>
+              <a:t>1. Paper Writing &amp; Revision</a:t>
+            </a:r>
+          </a:p>
+          <a:p>
+            <a:pPr marL="100000" indent="-100000">
+              <a:lnSpc>
+                <a:spcPts val="1200"/>
+              </a:lnSpc>
+              <a:spcBef>
+                <a:spcPts val="0"/>
+              </a:spcBef>
+              <a:spcAft>
+                <a:spcPts val="0"/>
+              </a:spcAft>
+              <a:buFont typeface="Arial"/>
+              <a:buChar char="–"/>
+            </a:pPr>
+            <a:r>
+              <a:rPr lang="en-GB" sz="1200" dirty="0">
+                <a:solidFill>
+                  <a:schemeClr val="tx1"/>
+                </a:solidFill>
+              </a:rPr>
+              <a:t>LaTeX/LyX drafting, math derivations</a:t>
+            </a:r>
+          </a:p>
+          <a:p>
+            <a:pPr marL="100000" indent="-100000">
+              <a:lnSpc>
+                <a:spcPts val="1200"/>
+              </a:lnSpc>
+              <a:spcBef>
+                <a:spcPts val="0"/>
+              </a:spcBef>
+              <a:spcAft>
+                <a:spcPts val="0"/>
+              </a:spcAft>
+              <a:buFont typeface="Arial"/>
+              <a:buChar char="–"/>
+            </a:pPr>
+            <a:r>
+              <a:rPr lang="en-GB" sz="1200" dirty="0">
+                <a:solidFill>
+                  <a:schemeClr val="tx1"/>
+                </a:solidFill>
+              </a:rPr>
+              <a:t>Lit reviews w/ hallucination checks</a:t>
+            </a:r>
+          </a:p>
+          <a:p>
+            <a:pPr marL="100000" indent="-100000">
+              <a:lnSpc>
+                <a:spcPts val="1200"/>
+              </a:lnSpc>
+              <a:spcBef>
+                <a:spcPts val="0"/>
+              </a:spcBef>
+              <a:spcAft>
+                <a:spcPts val="0"/>
+              </a:spcAft>
+              <a:buFont typeface="Arial"/>
+              <a:buChar char="–"/>
+            </a:pPr>
+            <a:r>
+              <a:rPr lang="en-GB" sz="1200" dirty="0">
+                <a:solidFill>
+                  <a:schemeClr val="tx1"/>
+                </a:solidFill>
+              </a:rPr>
+              <a:t>Referee rebuttals &amp; marked-up revisions</a:t>
+            </a:r>
+          </a:p>
+          <a:p>
+            <a:pPr marL="0" indent="0">
+              <a:lnSpc>
+                <a:spcPts val="1200"/>
+              </a:lnSpc>
+              <a:spcBef>
+                <a:spcPts val="200"/>
+              </a:spcBef>
+              <a:spcAft>
+                <a:spcPts val="0"/>
+              </a:spcAft>
+              <a:buNone/>
+            </a:pPr>
+            <a:r>
+              <a:rPr lang="en-GB" sz="1400" b="1" dirty="0">
+                <a:solidFill>
+                  <a:schemeClr val="tx1"/>
+                </a:solidFill>
+              </a:rPr>
+              <a:t>2. Literature &amp; References</a:t>
+            </a:r>
+          </a:p>
+          <a:p>
+            <a:pPr marL="100000" indent="-100000">
+              <a:lnSpc>
+                <a:spcPts val="1200"/>
+              </a:lnSpc>
+              <a:spcBef>
+                <a:spcPts val="0"/>
+              </a:spcBef>
+              <a:spcAft>
+                <a:spcPts val="0"/>
+              </a:spcAft>
+              <a:buFont typeface="Arial"/>
+              <a:buChar char="–"/>
+            </a:pPr>
+            <a:r>
+              <a:rPr lang="en-GB" sz="1200" dirty="0">
+                <a:solidFill>
+                  <a:schemeClr val="tx1"/>
+                </a:solidFill>
+              </a:rPr>
+              <a:t>Scoping, synthesis &amp; mapping by method</a:t>
+            </a:r>
+          </a:p>
+          <a:p>
+            <a:pPr marL="100000" indent="-100000">
+              <a:lnSpc>
+                <a:spcPts val="1200"/>
+              </a:lnSpc>
+              <a:spcBef>
+                <a:spcPts val="0"/>
+              </a:spcBef>
+              <a:spcAft>
+                <a:spcPts val="0"/>
+              </a:spcAft>
+              <a:buFont typeface="Arial"/>
+              <a:buChar char="–"/>
+            </a:pPr>
+            <a:r>
+              <a:rPr lang="en-GB" sz="1200" dirty="0">
+                <a:solidFill>
+                  <a:schemeClr val="tx1"/>
+                </a:solidFill>
+              </a:rPr>
+              <a:t>BibTeX management &amp; citation verification</a:t>
+            </a:r>
+          </a:p>
+          <a:p>
+            <a:pPr marL="0" indent="0">
+              <a:lnSpc>
+                <a:spcPts val="1200"/>
+              </a:lnSpc>
+              <a:spcBef>
+                <a:spcPts val="200"/>
+              </a:spcBef>
+              <a:spcAft>
+                <a:spcPts val="0"/>
+              </a:spcAft>
+              <a:buNone/>
+            </a:pPr>
+            <a:r>
+              <a:rPr lang="en-GB" sz="1400" b="1" dirty="0">
+                <a:solidFill>
+                  <a:schemeClr val="tx1"/>
+                </a:solidFill>
+              </a:rPr>
+              <a:t>3. Data &amp; Empirical Work</a:t>
+            </a:r>
+          </a:p>
+          <a:p>
+            <a:pPr marL="100000" indent="-100000">
+              <a:lnSpc>
+                <a:spcPts val="1200"/>
+              </a:lnSpc>
+              <a:spcBef>
+                <a:spcPts val="0"/>
+              </a:spcBef>
+              <a:spcAft>
+                <a:spcPts val="0"/>
+              </a:spcAft>
+              <a:buFont typeface="Arial"/>
+              <a:buChar char="–"/>
+            </a:pPr>
+            <a:r>
+              <a:rPr lang="en-GB" sz="1200" dirty="0">
+                <a:solidFill>
+                  <a:schemeClr val="tx1"/>
+                </a:solidFill>
+              </a:rPr>
+              <a:t>Auto-download from Census/BLS/FRED APIs</a:t>
+            </a:r>
+          </a:p>
+          <a:p>
+            <a:pPr marL="100000" indent="-100000">
+              <a:lnSpc>
+                <a:spcPts val="1200"/>
+              </a:lnSpc>
+              <a:spcBef>
+                <a:spcPts val="0"/>
+              </a:spcBef>
+              <a:spcAft>
+                <a:spcPts val="0"/>
+              </a:spcAft>
+              <a:buFont typeface="Arial"/>
+              <a:buChar char="–"/>
+            </a:pPr>
+            <a:r>
+              <a:rPr lang="en-GB" sz="1200" dirty="0">
+                <a:solidFill>
+                  <a:schemeClr val="tx1"/>
+                </a:solidFill>
+              </a:rPr>
+              <a:t>Harmonisation, crosswalks, panel construction</a:t>
+            </a:r>
+          </a:p>
+          <a:p>
+            <a:pPr marL="100000" indent="-100000">
+              <a:lnSpc>
+                <a:spcPts val="1200"/>
+              </a:lnSpc>
+              <a:spcBef>
+                <a:spcPts val="0"/>
+              </a:spcBef>
+              <a:spcAft>
+                <a:spcPts val="0"/>
+              </a:spcAft>
+              <a:buFont typeface="Arial"/>
+              <a:buChar char="–"/>
+            </a:pPr>
+            <a:r>
+              <a:rPr lang="en-GB" sz="1200" dirty="0">
+                <a:solidFill>
+                  <a:schemeClr val="tx1"/>
+                </a:solidFill>
+              </a:rPr>
+              <a:t>ID strategy design; pilot analysis &amp; stats</a:t>
+            </a:r>
+          </a:p>
+          <a:p>
+            <a:pPr marL="0" indent="0">
+              <a:lnSpc>
+                <a:spcPts val="1200"/>
+              </a:lnSpc>
+              <a:spcBef>
+                <a:spcPts val="200"/>
+              </a:spcBef>
+              <a:spcAft>
+                <a:spcPts val="0"/>
+              </a:spcAft>
+              <a:buNone/>
+            </a:pPr>
+            <a:r>
+              <a:rPr lang="en-GB" sz="1400" b="1" dirty="0">
+                <a:solidFill>
+                  <a:schemeClr val="tx1"/>
+                </a:solidFill>
+              </a:rPr>
+              <a:t>4. Tables &amp; Figures</a:t>
+            </a:r>
+          </a:p>
+          <a:p>
+            <a:pPr marL="100000" indent="-100000">
+              <a:lnSpc>
+                <a:spcPts val="1200"/>
+              </a:lnSpc>
+              <a:spcBef>
+                <a:spcPts val="0"/>
+              </a:spcBef>
+              <a:spcAft>
+                <a:spcPts val="0"/>
+              </a:spcAft>
+              <a:buFont typeface="Arial"/>
+              <a:buChar char="–"/>
+            </a:pPr>
+            <a:r>
+              <a:rPr lang="en-GB" sz="1200" dirty="0">
+                <a:solidFill>
+                  <a:schemeClr val="tx1"/>
+                </a:solidFill>
+              </a:rPr>
+              <a:t>Pub-ready LaTeX tables; auto-generation</a:t>
+            </a:r>
+          </a:p>
+          <a:p>
+            <a:pPr marL="100000" indent="-100000">
+              <a:lnSpc>
+                <a:spcPts val="1200"/>
+              </a:lnSpc>
+              <a:spcBef>
+                <a:spcPts val="0"/>
+              </a:spcBef>
+              <a:spcAft>
+                <a:spcPts val="0"/>
+              </a:spcAft>
+              <a:buFont typeface="Arial"/>
+              <a:buChar char="–"/>
+            </a:pPr>
+            <a:r>
+              <a:rPr lang="en-GB" sz="1200" dirty="0">
+                <a:solidFill>
+                  <a:schemeClr val="tx1"/>
+                </a:solidFill>
+              </a:rPr>
+              <a:t>Time-series, IRFs, recession shading plots</a:t>
+            </a:r>
+          </a:p>
+          <a:p>
+            <a:pPr marL="0" indent="0">
+              <a:lnSpc>
+                <a:spcPts val="1200"/>
+              </a:lnSpc>
+              <a:spcBef>
+                <a:spcPts val="200"/>
+              </a:spcBef>
+              <a:spcAft>
+                <a:spcPts val="0"/>
+              </a:spcAft>
+              <a:buNone/>
+            </a:pPr>
+            <a:r>
+              <a:rPr lang="en-GB" sz="1400" b="1" dirty="0">
+                <a:solidFill>
+                  <a:schemeClr val="tx1"/>
+                </a:solidFill>
+              </a:rPr>
+              <a:t>5. Modelling &amp; Calibration</a:t>
+            </a:r>
+          </a:p>
+          <a:p>
+            <a:pPr marL="100000" indent="-100000">
+              <a:lnSpc>
+                <a:spcPts val="1200"/>
+              </a:lnSpc>
+              <a:spcBef>
+                <a:spcPts val="0"/>
+              </a:spcBef>
+              <a:spcAft>
+                <a:spcPts val="0"/>
+              </a:spcAft>
+              <a:buFont typeface="Arial"/>
+              <a:buChar char="–"/>
+            </a:pPr>
+            <a:r>
+              <a:rPr lang="en-GB" sz="1200" dirty="0">
+                <a:solidFill>
+                  <a:schemeClr val="tx1"/>
+                </a:solidFill>
+              </a:rPr>
+              <a:t>GE model design: theory, code, solver</a:t>
+            </a:r>
+          </a:p>
+          <a:p>
+            <a:pPr marL="100000" indent="-100000">
+              <a:lnSpc>
+                <a:spcPts val="1200"/>
+              </a:lnSpc>
+              <a:spcBef>
+                <a:spcPts val="0"/>
+              </a:spcBef>
+              <a:spcAft>
+                <a:spcPts val="0"/>
+              </a:spcAft>
+              <a:buFont typeface="Arial"/>
+              <a:buChar char="–"/>
+            </a:pPr>
+            <a:r>
+              <a:rPr lang="en-GB" sz="1200" dirty="0">
+                <a:solidFill>
+                  <a:schemeClr val="tx1"/>
+                </a:solidFill>
+              </a:rPr>
+              <a:t>Calibration, counterfactuals</a:t>
+            </a:r>
+            <a:endParaRPr lang="en-GB" sz="1200" dirty="0"/>
+          </a:p>
+          <a:p>
+            <a:pPr marL="100000" indent="-100000">
+              <a:lnSpc>
+                <a:spcPts val="1200"/>
+              </a:lnSpc>
+              <a:spcBef>
+                <a:spcPts val="0"/>
+              </a:spcBef>
+              <a:spcAft>
+                <a:spcPts val="0"/>
+              </a:spcAft>
+              <a:buFont typeface="Arial"/>
+              <a:buChar char="–"/>
+            </a:pPr>
+            <a:r>
+              <a:rPr lang="en-GB" sz="1200" dirty="0">
+                <a:solidFill>
+                  <a:schemeClr val="tx1"/>
+                </a:solidFill>
+              </a:rPr>
+              <a:t>Model extension brainstorming</a:t>
+            </a:r>
+          </a:p>
+          <a:p>
+            <a:pPr marL="0" indent="0">
+              <a:lnSpc>
+                <a:spcPts val="1200"/>
+              </a:lnSpc>
+              <a:spcBef>
+                <a:spcPts val="200"/>
+              </a:spcBef>
+              <a:spcAft>
+                <a:spcPts val="0"/>
+              </a:spcAft>
+              <a:buNone/>
+            </a:pPr>
+            <a:r>
+              <a:rPr lang="en-GB" sz="1400" b="1" dirty="0">
+                <a:solidFill>
+                  <a:schemeClr val="tx1"/>
+                </a:solidFill>
+              </a:rPr>
+              <a:t>6. Quality Assurance</a:t>
+            </a:r>
+          </a:p>
+          <a:p>
+            <a:pPr marL="100000" indent="-100000">
+              <a:lnSpc>
+                <a:spcPts val="1200"/>
+              </a:lnSpc>
+              <a:spcBef>
+                <a:spcPts val="0"/>
+              </a:spcBef>
+              <a:spcAft>
+                <a:spcPts val="0"/>
+              </a:spcAft>
+              <a:buFont typeface="Arial"/>
+              <a:buChar char="–"/>
+            </a:pPr>
+            <a:r>
+              <a:rPr lang="en-GB" sz="1200" dirty="0">
+                <a:solidFill>
+                  <a:schemeClr val="tx1"/>
+                </a:solidFill>
+              </a:rPr>
+              <a:t>Math audits: code vs. equations</a:t>
+            </a:r>
+          </a:p>
+          <a:p>
+            <a:pPr marL="100000" indent="-100000">
+              <a:lnSpc>
+                <a:spcPts val="1200"/>
+              </a:lnSpc>
+              <a:spcBef>
+                <a:spcPts val="0"/>
+              </a:spcBef>
+              <a:spcAft>
+                <a:spcPts val="0"/>
+              </a:spcAft>
+              <a:buFont typeface="Arial"/>
+              <a:buChar char="–"/>
+            </a:pPr>
+            <a:r>
+              <a:rPr lang="en-GB" sz="1200" dirty="0">
+                <a:solidFill>
+                  <a:schemeClr val="tx1"/>
+                </a:solidFill>
+              </a:rPr>
+              <a:t>Variable crosswalks &amp; source documentation</a:t>
+            </a:r>
+          </a:p>
+          <a:p>
+            <a:pPr marL="100000" indent="-100000">
+              <a:lnSpc>
+                <a:spcPts val="1200"/>
+              </a:lnSpc>
+              <a:spcBef>
+                <a:spcPts val="0"/>
+              </a:spcBef>
+              <a:spcAft>
+                <a:spcPts val="0"/>
+              </a:spcAft>
+              <a:buFont typeface="Arial"/>
+              <a:buChar char="–"/>
+            </a:pPr>
+            <a:r>
+              <a:rPr lang="en-GB" sz="1200" dirty="0">
+                <a:solidFill>
+                  <a:schemeClr val="tx1"/>
+                </a:solidFill>
+              </a:rPr>
+              <a:t>Table consistency checks</a:t>
+            </a:r>
+          </a:p>
+          <a:p>
+            <a:pPr marL="0" indent="0">
+              <a:lnSpc>
+                <a:spcPts val="1200"/>
+              </a:lnSpc>
+              <a:spcBef>
+                <a:spcPts val="200"/>
+              </a:spcBef>
+              <a:spcAft>
+                <a:spcPts val="0"/>
+              </a:spcAft>
+              <a:buNone/>
+            </a:pPr>
+            <a:r>
+              <a:rPr lang="en-GB" sz="1400" b="1" dirty="0">
+                <a:solidFill>
+                  <a:schemeClr val="tx1"/>
+                </a:solidFill>
+              </a:rPr>
+              <a:t>7. Presentations &amp; Slides</a:t>
+            </a:r>
+          </a:p>
+          <a:p>
+            <a:pPr marL="100000" indent="-100000">
+              <a:lnSpc>
+                <a:spcPts val="1200"/>
+              </a:lnSpc>
+              <a:spcBef>
+                <a:spcPts val="0"/>
+              </a:spcBef>
+              <a:spcAft>
+                <a:spcPts val="0"/>
+              </a:spcAft>
+              <a:buFont typeface="Arial"/>
+              <a:buChar char="–"/>
+            </a:pPr>
+            <a:r>
+              <a:rPr lang="en-GB" sz="1200" dirty="0">
+                <a:solidFill>
+                  <a:schemeClr val="tx1"/>
+                </a:solidFill>
+              </a:rPr>
+              <a:t>Beamer from paper; PPT-to-LaTeX</a:t>
+            </a:r>
+          </a:p>
+          <a:p>
+            <a:pPr marL="100000" indent="-100000">
+              <a:lnSpc>
+                <a:spcPts val="1200"/>
+              </a:lnSpc>
+              <a:spcBef>
+                <a:spcPts val="0"/>
+              </a:spcBef>
+              <a:spcAft>
+                <a:spcPts val="0"/>
+              </a:spcAft>
+              <a:buFont typeface="Arial"/>
+              <a:buChar char="–"/>
+            </a:pPr>
+            <a:r>
+              <a:rPr lang="en-GB" sz="1200" dirty="0">
+                <a:solidFill>
+                  <a:schemeClr val="tx1"/>
+                </a:solidFill>
+              </a:rPr>
+              <a:t>Figure embedding &amp; formatting</a:t>
+            </a:r>
+          </a:p>
+        </p:txBody>
+      </p:sp>
+      <p:sp>
+        <p:nvSpPr>
+          <p:cNvPr id="11" name="RightColumn"/>
+          <p:cNvSpPr txBox="1"/>
+          <p:nvPr/>
+        </p:nvSpPr>
+        <p:spPr>
+          <a:xfrm>
+            <a:off x="4699000" y="863600"/>
+            <a:ext cx="3873500" cy="4000500"/>
+          </a:xfrm>
+          <a:prstGeom prst="rect">
+            <a:avLst/>
+          </a:prstGeom>
+          <a:noFill/>
+        </p:spPr>
+        <p:txBody>
+          <a:bodyPr wrap="square" lIns="36000" tIns="0" rIns="36000" bIns="0" anchor="t">
+            <a:noAutofit/>
+          </a:bodyPr>
+          <a:lstStyle/>
+          <a:p>
+            <a:pPr marL="0" indent="0">
+              <a:lnSpc>
+                <a:spcPts val="1200"/>
+              </a:lnSpc>
+              <a:spcBef>
+                <a:spcPts val="0"/>
+              </a:spcBef>
+              <a:spcAft>
+                <a:spcPts val="0"/>
+              </a:spcAft>
+              <a:buNone/>
+            </a:pPr>
+            <a:r>
+              <a:rPr lang="en-GB" sz="1400" b="1" dirty="0">
+                <a:solidFill>
+                  <a:schemeClr val="tx1"/>
+                </a:solidFill>
+              </a:rPr>
+              <a:t>8. Collaboration &amp; Coauthorship</a:t>
+            </a:r>
+          </a:p>
+          <a:p>
+            <a:pPr marL="100000" indent="-100000">
+              <a:lnSpc>
+                <a:spcPts val="1200"/>
+              </a:lnSpc>
+              <a:spcBef>
+                <a:spcPts val="0"/>
+              </a:spcBef>
+              <a:spcAft>
+                <a:spcPts val="0"/>
+              </a:spcAft>
+              <a:buFont typeface="Arial"/>
+              <a:buChar char="–"/>
+            </a:pPr>
+            <a:r>
+              <a:rPr lang="en-GB" sz="1200" dirty="0">
+                <a:solidFill>
+                  <a:schemeClr val="tx1"/>
+                </a:solidFill>
+              </a:rPr>
+              <a:t>Handoff packages (code, docs, results)</a:t>
+            </a:r>
+          </a:p>
+          <a:p>
+            <a:pPr marL="100000" indent="-100000">
+              <a:lnSpc>
+                <a:spcPts val="1200"/>
+              </a:lnSpc>
+              <a:spcBef>
+                <a:spcPts val="0"/>
+              </a:spcBef>
+              <a:spcAft>
+                <a:spcPts val="0"/>
+              </a:spcAft>
+              <a:buFont typeface="Arial"/>
+              <a:buChar char="–"/>
+            </a:pPr>
+            <a:r>
+              <a:rPr lang="en-GB" sz="1200" dirty="0">
+                <a:solidFill>
+                  <a:schemeClr val="tx1"/>
+                </a:solidFill>
+              </a:rPr>
+              <a:t>Voice-to-prompt; research ideation</a:t>
+            </a:r>
+          </a:p>
+          <a:p>
+            <a:pPr marL="0" indent="0">
+              <a:lnSpc>
+                <a:spcPts val="1200"/>
+              </a:lnSpc>
+              <a:spcBef>
+                <a:spcPts val="200"/>
+              </a:spcBef>
+              <a:spcAft>
+                <a:spcPts val="0"/>
+              </a:spcAft>
+              <a:buNone/>
+            </a:pPr>
+            <a:r>
+              <a:rPr lang="en-GB" sz="1400" b="1" dirty="0">
+                <a:solidFill>
+                  <a:schemeClr val="tx1"/>
+                </a:solidFill>
+              </a:rPr>
+              <a:t>9. Referee Reports on Others</a:t>
+            </a:r>
+          </a:p>
+          <a:p>
+            <a:pPr marL="100000" indent="-100000">
+              <a:lnSpc>
+                <a:spcPts val="1200"/>
+              </a:lnSpc>
+              <a:spcBef>
+                <a:spcPts val="0"/>
+              </a:spcBef>
+              <a:spcAft>
+                <a:spcPts val="0"/>
+              </a:spcAft>
+              <a:buFont typeface="Arial"/>
+              <a:buChar char="–"/>
+            </a:pPr>
+            <a:r>
+              <a:rPr lang="en-GB" sz="1200" dirty="0">
+                <a:solidFill>
+                  <a:schemeClr val="tx1"/>
+                </a:solidFill>
+              </a:rPr>
+              <a:t>Structuring &amp; drafting reports</a:t>
+            </a:r>
+          </a:p>
+          <a:p>
+            <a:pPr marL="0" indent="0">
+              <a:lnSpc>
+                <a:spcPts val="1200"/>
+              </a:lnSpc>
+              <a:spcBef>
+                <a:spcPts val="200"/>
+              </a:spcBef>
+              <a:spcAft>
+                <a:spcPts val="0"/>
+              </a:spcAft>
+              <a:buNone/>
+            </a:pPr>
+            <a:r>
+              <a:rPr lang="en-GB" sz="1400" b="1" dirty="0">
+                <a:solidFill>
+                  <a:schemeClr val="tx1"/>
+                </a:solidFill>
+              </a:rPr>
+              <a:t>10. Project &amp; Repo Management</a:t>
+            </a:r>
+          </a:p>
+          <a:p>
+            <a:pPr marL="100000" indent="-100000">
+              <a:lnSpc>
+                <a:spcPts val="1200"/>
+              </a:lnSpc>
+              <a:spcBef>
+                <a:spcPts val="0"/>
+              </a:spcBef>
+              <a:spcAft>
+                <a:spcPts val="0"/>
+              </a:spcAft>
+              <a:buFont typeface="Arial"/>
+              <a:buChar char="–"/>
+            </a:pPr>
+            <a:r>
+              <a:rPr lang="en-GB" sz="1200" dirty="0">
+                <a:solidFill>
+                  <a:schemeClr val="tx1"/>
+                </a:solidFill>
+              </a:rPr>
+              <a:t>Git branching, commits, repo organisation</a:t>
+            </a:r>
+          </a:p>
+          <a:p>
+            <a:pPr marL="100000" indent="-100000">
+              <a:lnSpc>
+                <a:spcPts val="1200"/>
+              </a:lnSpc>
+              <a:spcBef>
+                <a:spcPts val="0"/>
+              </a:spcBef>
+              <a:spcAft>
+                <a:spcPts val="0"/>
+              </a:spcAft>
+              <a:buFont typeface="Arial"/>
+              <a:buChar char="–"/>
+            </a:pPr>
+            <a:r>
+              <a:rPr lang="en-GB" sz="1200" dirty="0">
+                <a:solidFill>
+                  <a:schemeClr val="tx1"/>
+                </a:solidFill>
+              </a:rPr>
+              <a:t>Folder naming conventions (01_, 02_...)</a:t>
+            </a:r>
+          </a:p>
+          <a:p>
+            <a:pPr marL="100000" indent="-100000">
+              <a:lnSpc>
+                <a:spcPts val="1200"/>
+              </a:lnSpc>
+              <a:spcBef>
+                <a:spcPts val="0"/>
+              </a:spcBef>
+              <a:spcAft>
+                <a:spcPts val="0"/>
+              </a:spcAft>
+              <a:buFont typeface="Arial"/>
+              <a:buChar char="–"/>
+            </a:pPr>
+            <a:r>
+              <a:rPr lang="en-GB" sz="1200" dirty="0">
+                <a:solidFill>
+                  <a:schemeClr val="tx1"/>
+                </a:solidFill>
+              </a:rPr>
+              <a:t>Status/memory tracking &amp; work logs</a:t>
+            </a:r>
+          </a:p>
+          <a:p>
+            <a:pPr marL="100000" indent="-100000">
+              <a:lnSpc>
+                <a:spcPts val="1200"/>
+              </a:lnSpc>
+              <a:spcBef>
+                <a:spcPts val="0"/>
+              </a:spcBef>
+              <a:spcAft>
+                <a:spcPts val="0"/>
+              </a:spcAft>
+              <a:buFont typeface="Arial"/>
+              <a:buChar char="–"/>
+            </a:pPr>
+            <a:r>
+              <a:rPr lang="en-GB" sz="1200" dirty="0">
+                <a:solidFill>
+                  <a:schemeClr val="tx1"/>
+                </a:solidFill>
+              </a:rPr>
+              <a:t>Build artifact cleanup &amp; backups</a:t>
+            </a:r>
+          </a:p>
+          <a:p>
+            <a:pPr marL="0" indent="0">
+              <a:lnSpc>
+                <a:spcPts val="1200"/>
+              </a:lnSpc>
+              <a:spcBef>
+                <a:spcPts val="200"/>
+              </a:spcBef>
+              <a:spcAft>
+                <a:spcPts val="0"/>
+              </a:spcAft>
+              <a:buNone/>
+            </a:pPr>
+            <a:r>
+              <a:rPr lang="en-GB" sz="1400" b="1" dirty="0">
+                <a:solidFill>
+                  <a:schemeClr val="tx1"/>
+                </a:solidFill>
+              </a:rPr>
+              <a:t>11. File &amp; Document Management</a:t>
+            </a:r>
+          </a:p>
+          <a:p>
+            <a:pPr marL="100000" indent="-100000">
+              <a:lnSpc>
+                <a:spcPts val="1200"/>
+              </a:lnSpc>
+              <a:spcBef>
+                <a:spcPts val="0"/>
+              </a:spcBef>
+              <a:spcAft>
+                <a:spcPts val="0"/>
+              </a:spcAft>
+              <a:buFont typeface="Arial"/>
+              <a:buChar char="–"/>
+            </a:pPr>
+            <a:r>
+              <a:rPr lang="en-GB" sz="1200" dirty="0">
+                <a:solidFill>
+                  <a:schemeClr val="tx1"/>
+                </a:solidFill>
+              </a:rPr>
+              <a:t>Auto PDF renaming (Author, Year, Title)</a:t>
+            </a:r>
+          </a:p>
+          <a:p>
+            <a:pPr marL="100000" indent="-100000">
+              <a:lnSpc>
+                <a:spcPts val="1200"/>
+              </a:lnSpc>
+              <a:spcBef>
+                <a:spcPts val="0"/>
+              </a:spcBef>
+              <a:spcAft>
+                <a:spcPts val="0"/>
+              </a:spcAft>
+              <a:buFont typeface="Arial"/>
+              <a:buChar char="–"/>
+            </a:pPr>
+            <a:r>
+              <a:rPr lang="en-GB" sz="1200" dirty="0">
+                <a:solidFill>
+                  <a:schemeClr val="tx1"/>
+                </a:solidFill>
+              </a:rPr>
+              <a:t>Literature PDF &amp; archive organisation</a:t>
+            </a:r>
+          </a:p>
+          <a:p>
+            <a:pPr marL="0" indent="0">
+              <a:lnSpc>
+                <a:spcPts val="1200"/>
+              </a:lnSpc>
+              <a:spcBef>
+                <a:spcPts val="200"/>
+              </a:spcBef>
+              <a:spcAft>
+                <a:spcPts val="0"/>
+              </a:spcAft>
+              <a:buNone/>
+            </a:pPr>
+            <a:r>
+              <a:rPr lang="en-GB" sz="1400" b="1" dirty="0">
+                <a:solidFill>
+                  <a:schemeClr val="tx1"/>
+                </a:solidFill>
+              </a:rPr>
+              <a:t>12. Teaching &amp; Outreach</a:t>
+            </a:r>
+          </a:p>
+          <a:p>
+            <a:pPr marL="100000" indent="-100000">
+              <a:lnSpc>
+                <a:spcPts val="1200"/>
+              </a:lnSpc>
+              <a:spcBef>
+                <a:spcPts val="0"/>
+              </a:spcBef>
+              <a:spcAft>
+                <a:spcPts val="0"/>
+              </a:spcAft>
+              <a:buFont typeface="Arial"/>
+              <a:buChar char="–"/>
+            </a:pPr>
+            <a:r>
+              <a:rPr lang="en-GB" sz="1200" dirty="0">
+                <a:solidFill>
+                  <a:schemeClr val="tx1"/>
+                </a:solidFill>
+              </a:rPr>
+              <a:t>HTML/JS student tools &amp; websites</a:t>
+            </a:r>
+          </a:p>
+          <a:p>
+            <a:pPr marL="100000" indent="-100000">
+              <a:lnSpc>
+                <a:spcPts val="1200"/>
+              </a:lnSpc>
+              <a:spcBef>
+                <a:spcPts val="0"/>
+              </a:spcBef>
+              <a:spcAft>
+                <a:spcPts val="0"/>
+              </a:spcAft>
+              <a:buFont typeface="Arial"/>
+              <a:buChar char="–"/>
+            </a:pPr>
+            <a:r>
+              <a:rPr lang="en-GB" sz="1200" dirty="0">
+                <a:solidFill>
+                  <a:schemeClr val="tx1"/>
+                </a:solidFill>
+              </a:rPr>
+              <a:t>Workshop materials &amp; install guides</a:t>
+            </a:r>
+          </a:p>
+          <a:p>
+            <a:pPr marL="100000" indent="-100000">
+              <a:lnSpc>
+                <a:spcPts val="1200"/>
+              </a:lnSpc>
+              <a:spcBef>
+                <a:spcPts val="0"/>
+              </a:spcBef>
+              <a:spcAft>
+                <a:spcPts val="0"/>
+              </a:spcAft>
+              <a:buFont typeface="Arial"/>
+              <a:buChar char="–"/>
+            </a:pPr>
+            <a:r>
+              <a:rPr lang="en-GB" sz="1200" dirty="0">
+                <a:solidFill>
+                  <a:schemeClr val="tx1"/>
+                </a:solidFill>
+              </a:rPr>
+              <a:t>Starter packs &amp; IDE profiles</a:t>
+            </a:r>
+          </a:p>
+          <a:p>
+            <a:pPr marL="0" indent="0">
+              <a:lnSpc>
+                <a:spcPts val="1200"/>
+              </a:lnSpc>
+              <a:spcBef>
+                <a:spcPts val="200"/>
+              </a:spcBef>
+              <a:spcAft>
+                <a:spcPts val="0"/>
+              </a:spcAft>
+              <a:buNone/>
+            </a:pPr>
+            <a:r>
+              <a:rPr lang="en-GB" sz="1400" b="1" dirty="0">
+                <a:solidFill>
+                  <a:schemeClr val="tx1"/>
+                </a:solidFill>
+              </a:rPr>
+              <a:t>13. Coding &amp; Debugging</a:t>
+            </a:r>
+          </a:p>
+          <a:p>
+            <a:pPr marL="100000" indent="-100000">
+              <a:lnSpc>
+                <a:spcPts val="1200"/>
+              </a:lnSpc>
+              <a:spcBef>
+                <a:spcPts val="0"/>
+              </a:spcBef>
+              <a:spcAft>
+                <a:spcPts val="0"/>
+              </a:spcAft>
+              <a:buFont typeface="Arial"/>
+              <a:buChar char="–"/>
+            </a:pPr>
+            <a:r>
+              <a:rPr lang="en-GB" sz="1200" dirty="0">
+                <a:solidFill>
+                  <a:schemeClr val="tx1"/>
+                </a:solidFill>
+              </a:rPr>
+              <a:t>Bug fixes: C++, Python, PS, LaTeX</a:t>
+            </a:r>
+          </a:p>
+          <a:p>
+            <a:pPr marL="100000" indent="-100000">
+              <a:lnSpc>
+                <a:spcPts val="1200"/>
+              </a:lnSpc>
+              <a:spcBef>
+                <a:spcPts val="0"/>
+              </a:spcBef>
+              <a:spcAft>
+                <a:spcPts val="0"/>
+              </a:spcAft>
+              <a:buFont typeface="Arial"/>
+              <a:buChar char="–"/>
+            </a:pPr>
+            <a:r>
+              <a:rPr lang="en-GB" sz="1200" dirty="0">
+                <a:solidFill>
+                  <a:schemeClr val="tx1"/>
+                </a:solidFill>
+              </a:rPr>
+              <a:t>Data pipeline &amp; figure scripts</a:t>
+            </a:r>
+          </a:p>
+          <a:p>
+            <a:pPr marL="100000" indent="-100000">
+              <a:lnSpc>
+                <a:spcPts val="1200"/>
+              </a:lnSpc>
+              <a:spcBef>
+                <a:spcPts val="0"/>
+              </a:spcBef>
+              <a:spcAft>
+                <a:spcPts val="0"/>
+              </a:spcAft>
+              <a:buFont typeface="Arial"/>
+              <a:buChar char="–"/>
+            </a:pPr>
+            <a:r>
+              <a:rPr lang="en-GB" sz="1200" dirty="0">
+                <a:solidFill>
+                  <a:schemeClr val="tx1"/>
+                </a:solidFill>
+              </a:rPr>
+              <a:t>Reusable AI skill packs</a:t>
+            </a:r>
+          </a:p>
+          <a:p>
+            <a:pPr>
+              <a:lnSpc>
+                <a:spcPts val="1200"/>
+              </a:lnSpc>
+              <a:spcBef>
+                <a:spcPts val="200"/>
+              </a:spcBef>
+            </a:pPr>
+            <a:r>
+              <a:rPr lang="en-GB" sz="1400" b="1" dirty="0"/>
+              <a:t>14. Writing this Presentation</a:t>
+            </a:r>
+          </a:p>
+          <a:p>
+            <a:pPr marL="100000" indent="-100000">
+              <a:lnSpc>
+                <a:spcPts val="1200"/>
+              </a:lnSpc>
+              <a:spcBef>
+                <a:spcPts val="0"/>
+              </a:spcBef>
+              <a:spcAft>
+                <a:spcPts val="0"/>
+              </a:spcAft>
+              <a:buFont typeface="Arial"/>
+              <a:buChar char="–"/>
+            </a:pPr>
+            <a:r>
+              <a:rPr lang="en-GB" sz="1200" dirty="0"/>
+              <a:t>And this bullet point</a:t>
+            </a:r>
+          </a:p>
+          <a:p>
+            <a:pPr marL="100000" indent="-100000">
+              <a:lnSpc>
+                <a:spcPts val="1200"/>
+              </a:lnSpc>
+              <a:spcBef>
+                <a:spcPts val="0"/>
+              </a:spcBef>
+              <a:spcAft>
+                <a:spcPts val="0"/>
+              </a:spcAft>
+              <a:buFont typeface="Arial"/>
+              <a:buChar char="–"/>
+            </a:pPr>
+            <a:r>
+              <a:rPr lang="en-GB" sz="1200" dirty="0"/>
+              <a:t>And this bullet point also</a:t>
+            </a:r>
+          </a:p>
+        </p:txBody>
+      </p:sp>
+    </p:spTree>
+    <p:extLst>
+      <p:ext uri="{BB962C8B-B14F-4D97-AF65-F5344CB8AC3E}">
+        <p14:creationId xmlns:p14="http://schemas.microsoft.com/office/powerpoint/2010/main" val="1265786233"/>
+      </p:ext>
+    </p:extLst>
+  </p:cSld>
+  <p:clrMapOvr>
+    <a:masterClrMapping/>
+  </p:clrMapOvr>
+</p:sld>
+</file>
+
+<file path=ppt/slides/slide9.xml><?xml version="1.0" encoding="utf-8"?>
+<p:sld xmlns:a="http://schemas.openxmlformats.org/drawingml/2006/main" xmlns:r="http://schemas.openxmlformats.org/officeDocument/2006/relationships" xmlns:p="http://schemas.openxmlformats.org/presentationml/2006/main">
+  <p:cSld>
+    <p:bg>
+      <p:bgPr>
+        <a:solidFill>
+          <a:srgbClr val="FFFFFF">
+            <a:alpha val="100000"/>
+          </a:srgbClr>
+        </a:solidFill>
+        <a:effectLst/>
+      </p:bgPr>
+    </p:bg>
     <p:spTree>
       <p:nvGrpSpPr>
         <p:cNvPr id="1" name="">
@@ -2794,8 +8349,8 @@
         </p:nvSpPr>
         <p:spPr>
           <a:xfrm>
-            <a:off x="700000" y="1400000"/>
-            <a:ext cx="1771639" cy="2677656"/>
+            <a:off x="622300" y="838200"/>
+            <a:ext cx="7899400" cy="3644900"/>
           </a:xfrm>
           <a:prstGeom prst="rect">
             <a:avLst/>
@@ -2804,425 +8359,193 @@
         </p:spPr>
         <p:txBody>
           <a:bodyPr wrap="none">
-            <a:spAutoFit/>
+            <a:noAutofit/>
           </a:bodyPr>
           <a:lstStyle/>
           <a:p>
-            <a:pPr>
-              <a:defRPr sz="2400"/>
-            </a:pPr>
-            <a:r>
-              <a:rPr lang="en-GB" dirty="0"/>
+            <a:pPr marL="0" indent="0">
+              <a:lnSpc>
+                <a:spcPts val="1800"/>
+              </a:lnSpc>
+              <a:spcBef>
+                <a:spcPts val="300"/>
+              </a:spcBef>
+              <a:spcAft>
+                <a:spcPts val="100"/>
+              </a:spcAft>
+              <a:buNone/>
+            </a:pPr>
+            <a:r>
+              <a:rPr lang="en-US" sz="2000" b="1" dirty="0">
+                <a:solidFill>
+                  <a:schemeClr val="dk1"/>
+                </a:solidFill>
+              </a:rPr>
               <a:t>Memory</a:t>
             </a:r>
           </a:p>
           <a:p>
-            <a:pPr>
-              <a:defRPr sz="2400"/>
-            </a:pPr>
-            <a:r>
-              <a:rPr lang="en-GB" dirty="0"/>
+            <a:pPr marL="0" indent="0">
+              <a:lnSpc>
+                <a:spcPts val="1600"/>
+              </a:lnSpc>
+              <a:spcBef>
+                <a:spcPts val="0"/>
+              </a:spcBef>
+              <a:spcAft>
+                <a:spcPts val="400"/>
+              </a:spcAft>
+              <a:buNone/>
+            </a:pPr>
+            <a:r>
+              <a:rPr lang="en-US" sz="1600" dirty="0">
+                <a:solidFill>
+                  <a:schemeClr val="dk1"/>
+                </a:solidFill>
+              </a:rPr>
+              <a:t>AI has no long-term memory — you provide context via files</a:t>
+            </a:r>
+          </a:p>
+          <a:p>
+            <a:pPr marL="0" indent="0">
+              <a:lnSpc>
+                <a:spcPts val="1800"/>
+              </a:lnSpc>
+              <a:spcBef>
+                <a:spcPts val="300"/>
+              </a:spcBef>
+              <a:spcAft>
+                <a:spcPts val="100"/>
+              </a:spcAft>
+              <a:buNone/>
+            </a:pPr>
+            <a:r>
+              <a:rPr lang="en-US" sz="2000" b="1" dirty="0">
+                <a:solidFill>
+                  <a:schemeClr val="dk1"/>
+                </a:solidFill>
+              </a:rPr>
               <a:t>Organisation</a:t>
             </a:r>
           </a:p>
           <a:p>
-            <a:pPr>
-              <a:defRPr sz="2400"/>
-            </a:pPr>
-            <a:r>
-              <a:rPr lang="en-GB" dirty="0"/>
+            <a:pPr marL="0" indent="0">
+              <a:lnSpc>
+                <a:spcPts val="1600"/>
+              </a:lnSpc>
+              <a:spcBef>
+                <a:spcPts val="0"/>
+              </a:spcBef>
+              <a:spcAft>
+                <a:spcPts val="400"/>
+              </a:spcAft>
+              <a:buNone/>
+            </a:pPr>
+            <a:r>
+              <a:rPr lang="en-US" sz="1600" dirty="0">
+                <a:solidFill>
+                  <a:schemeClr val="dk1"/>
+                </a:solidFill>
+              </a:rPr>
+              <a:t>Structure your project so the AI can navigate it</a:t>
+            </a:r>
+          </a:p>
+          <a:p>
+            <a:pPr marL="0" indent="0">
+              <a:lnSpc>
+                <a:spcPts val="1800"/>
+              </a:lnSpc>
+              <a:spcBef>
+                <a:spcPts val="300"/>
+              </a:spcBef>
+              <a:spcAft>
+                <a:spcPts val="100"/>
+              </a:spcAft>
+              <a:buNone/>
+            </a:pPr>
+            <a:r>
+              <a:rPr lang="en-US" sz="2000" b="1" dirty="0">
+                <a:solidFill>
+                  <a:schemeClr val="dk1"/>
+                </a:solidFill>
+              </a:rPr>
               <a:t>Focus</a:t>
             </a:r>
           </a:p>
           <a:p>
-            <a:pPr>
-              <a:defRPr sz="2400"/>
-            </a:pPr>
-            <a:r>
-              <a:rPr lang="en-GB" dirty="0"/>
+            <a:pPr marL="0" indent="0">
+              <a:lnSpc>
+                <a:spcPts val="1600"/>
+              </a:lnSpc>
+              <a:spcBef>
+                <a:spcPts val="0"/>
+              </a:spcBef>
+              <a:spcAft>
+                <a:spcPts val="400"/>
+              </a:spcAft>
+              <a:buNone/>
+            </a:pPr>
+            <a:r>
+              <a:rPr lang="en-US" sz="1600" dirty="0">
+                <a:solidFill>
+                  <a:schemeClr val="dk1"/>
+                </a:solidFill>
+              </a:rPr>
+              <a:t>One clear task per agent session gets the best results</a:t>
+            </a:r>
+          </a:p>
+          <a:p>
+            <a:pPr marL="0" indent="0">
+              <a:lnSpc>
+                <a:spcPts val="1800"/>
+              </a:lnSpc>
+              <a:spcBef>
+                <a:spcPts val="300"/>
+              </a:spcBef>
+              <a:spcAft>
+                <a:spcPts val="100"/>
+              </a:spcAft>
+              <a:buNone/>
+            </a:pPr>
+            <a:r>
+              <a:rPr lang="en-US" sz="2000" b="1" dirty="0">
+                <a:solidFill>
+                  <a:schemeClr val="dk1"/>
+                </a:solidFill>
+              </a:rPr>
               <a:t>Tokens</a:t>
             </a:r>
           </a:p>
           <a:p>
-            <a:pPr>
-              <a:defRPr sz="2400"/>
-            </a:pPr>
-            <a:endParaRPr lang="en-GB" dirty="0"/>
-          </a:p>
-          <a:p>
-            <a:pPr>
-              <a:defRPr sz="2400"/>
-            </a:pPr>
-            <a:endParaRPr lang="en-GB" dirty="0"/>
-          </a:p>
-          <a:p>
-            <a:pPr>
-              <a:defRPr sz="2400"/>
-            </a:pPr>
-            <a:endParaRPr dirty="0"/>
+            <a:pPr marL="0" indent="0">
+              <a:lnSpc>
+                <a:spcPts val="1600"/>
+              </a:lnSpc>
+              <a:spcBef>
+                <a:spcPts val="0"/>
+              </a:spcBef>
+              <a:spcAft>
+                <a:spcPts val="400"/>
+              </a:spcAft>
+              <a:buNone/>
+            </a:pPr>
+            <a:r>
+              <a:rPr lang="en-US" sz="1600" dirty="0">
+                <a:solidFill>
+                  <a:schemeClr val="dk1"/>
+                </a:solidFill>
+              </a:rPr>
+              <a:t>Everything costs tokens — keep prompts concise</a:t>
+            </a:r>
           </a:p>
         </p:txBody>
       </p:sp>
     </p:spTree>
     <p:extLst>
       <p:ext uri="{BB962C8B-B14F-4D97-AF65-F5344CB8AC3E}">
-        <p14:creationId xmlns:p14="http://schemas.microsoft.com/office/powerpoint/2010/main" val="3814786226"/>
+        <p14:creationId xmlns:p14="http://schemas.microsoft.com/office/powerpoint/2010/main" val="1599567440"/>
       </p:ext>
     </p:extLst>
-  </p:cSld>
-  <p:clrMapOvr>
-    <a:masterClrMapping/>
-  </p:clrMapOvr>
-</p:sld>
-</file>
-
-<file path=ppt/slides/slide7.xml><?xml version="1.0" encoding="utf-8"?>
-<p:sld xmlns:a="http://schemas.openxmlformats.org/drawingml/2006/main" xmlns:r="http://schemas.openxmlformats.org/officeDocument/2006/relationships" xmlns:p="http://schemas.openxmlformats.org/presentationml/2006/main">
-  <p:cSld>
-    <p:spTree>
-      <p:nvGrpSpPr>
-        <p:cNvPr id="1" name=""/>
-        <p:cNvGrpSpPr/>
-        <p:nvPr/>
-      </p:nvGrpSpPr>
-      <p:grpSpPr>
-        <a:xfrm>
-          <a:off x="0" y="0"/>
-          <a:ext cx="0" cy="0"/>
-          <a:chOff x="0" y="0"/>
-          <a:chExt cx="0" cy="0"/>
-        </a:xfrm>
-      </p:grpSpPr>
-      <p:sp>
-        <p:nvSpPr>
-          <p:cNvPr id="2" name="Title 1"/>
-          <p:cNvSpPr>
-            <a:spLocks noGrp="1"/>
-          </p:cNvSpPr>
-          <p:nvPr>
-            <p:ph type="title"/>
-          </p:nvPr>
-        </p:nvSpPr>
-        <p:spPr/>
-        <p:txBody>
-          <a:bodyPr/>
-          <a:lstStyle/>
-          <a:p>
-            <a:r>
-              <a:t>Example Folder Structure</a:t>
-            </a:r>
-          </a:p>
-        </p:txBody>
-      </p:sp>
-      <p:sp>
-        <p:nvSpPr>
-          <p:cNvPr id="3" name="TextBox 2"/>
-          <p:cNvSpPr txBox="1"/>
-          <p:nvPr/>
-        </p:nvSpPr>
-        <p:spPr>
-          <a:xfrm>
-            <a:off x="700000" y="1400000"/>
-            <a:ext cx="2793009" cy="2492990"/>
-          </a:xfrm>
-          <a:prstGeom prst="rect">
-            <a:avLst/>
-          </a:prstGeom>
-          <a:noFill/>
-        </p:spPr>
-        <p:txBody>
-          <a:bodyPr wrap="none">
-            <a:spAutoFit/>
-          </a:bodyPr>
-          <a:lstStyle/>
-          <a:p>
-            <a:pPr>
-              <a:defRPr sz="2400"/>
-            </a:pPr>
-            <a:r>
-              <a:t>David/Global Folder/</a:t>
-            </a:r>
-            <a:endParaRPr dirty="0"/>
-          </a:p>
-          <a:p>
-            <a:pPr lvl="1">
-              <a:defRPr sz="2200"/>
-            </a:pPr>
-            <a:r>
-              <a:t>AGENTS.md</a:t>
-            </a:r>
-          </a:p>
-          <a:p>
-            <a:pPr lvl="1">
-              <a:defRPr sz="2200"/>
-            </a:pPr>
-            <a:r>
-              <a:t>project.md</a:t>
-            </a:r>
-          </a:p>
-          <a:p>
-            <a:pPr lvl="1">
-              <a:defRPr sz="2200"/>
-            </a:pPr>
-            <a:r>
-              <a:t>Skills/</a:t>
-            </a:r>
-          </a:p>
-          <a:p>
-            <a:pPr lvl="1">
-              <a:defRPr sz="2200"/>
-            </a:pPr>
-            <a:r>
-              <a:t>Agents/</a:t>
-            </a:r>
-          </a:p>
-          <a:p>
-            <a:pPr lvl="1">
-              <a:defRPr sz="2200"/>
-            </a:pPr>
-            <a:r>
-              <a:t>projects/</a:t>
-            </a:r>
-          </a:p>
-        </p:txBody>
-      </p:sp>
-    </p:spTree>
-  </p:cSld>
-  <p:clrMapOvr>
-    <a:masterClrMapping/>
-  </p:clrMapOvr>
-</p:sld>
-</file>
-
-<file path=ppt/slides/slide8.xml><?xml version="1.0" encoding="utf-8"?>
-<p:sld xmlns:a="http://schemas.openxmlformats.org/drawingml/2006/main" xmlns:r="http://schemas.openxmlformats.org/officeDocument/2006/relationships" xmlns:p="http://schemas.openxmlformats.org/presentationml/2006/main">
-  <p:cSld>
-    <p:spTree>
-      <p:nvGrpSpPr>
-        <p:cNvPr id="1" name=""/>
-        <p:cNvGrpSpPr/>
-        <p:nvPr/>
-      </p:nvGrpSpPr>
-      <p:grpSpPr>
-        <a:xfrm>
-          <a:off x="0" y="0"/>
-          <a:ext cx="0" cy="0"/>
-          <a:chOff x="0" y="0"/>
-          <a:chExt cx="0" cy="0"/>
-        </a:xfrm>
-      </p:grpSpPr>
-      <p:sp>
-        <p:nvSpPr>
-          <p:cNvPr id="2" name="Title 1"/>
-          <p:cNvSpPr>
-            <a:spLocks noGrp="1"/>
-          </p:cNvSpPr>
-          <p:nvPr>
-            <p:ph type="title"/>
-          </p:nvPr>
-        </p:nvSpPr>
-        <p:spPr/>
-        <p:txBody>
-          <a:bodyPr/>
-          <a:lstStyle/>
-          <a:p>
-            <a:r>
-              <a:t>Memory: Limits to Know</a:t>
-            </a:r>
-          </a:p>
-        </p:txBody>
-      </p:sp>
-      <p:sp>
-        <p:nvSpPr>
-          <p:cNvPr id="3" name="Content Placeholder 2"/>
-          <p:cNvSpPr>
-            <a:spLocks noGrp="1"/>
-          </p:cNvSpPr>
-          <p:nvPr>
-            <p:ph sz="quarter" idx="11"/>
-          </p:nvPr>
-        </p:nvSpPr>
-        <p:spPr/>
-        <p:txBody>
-          <a:bodyPr/>
-          <a:lstStyle/>
-          <a:p>
-            <a:pPr>
-              <a:defRPr sz="2100"/>
-            </a:pPr>
-            <a:r>
-              <a:t>AI agents do not have true long-term memory.</a:t>
-            </a:r>
-          </a:p>
-          <a:p>
-            <a:pPr>
-              <a:defRPr sz="2100"/>
-            </a:pPr>
-            <a:r>
-              <a:t>They have limited short-term working context.</a:t>
-            </a:r>
-          </a:p>
-          <a:p>
-            <a:pPr>
-              <a:defRPr sz="2100"/>
-            </a:pPr>
-            <a:r>
-              <a:t>In long sessions, early details can drop out.</a:t>
-            </a:r>
-          </a:p>
-          <a:p>
-            <a:pPr>
-              <a:defRPr sz="2100"/>
-            </a:pPr>
-            <a:r>
-              <a:t>Each new chat is like a brilliant assistant who must re-read your notes.</a:t>
-            </a:r>
-          </a:p>
-        </p:txBody>
-      </p:sp>
-    </p:spTree>
-  </p:cSld>
-  <p:clrMapOvr>
-    <a:masterClrMapping/>
-  </p:clrMapOvr>
-</p:sld>
-</file>
-
-<file path=ppt/slides/slide9.xml><?xml version="1.0" encoding="utf-8"?>
-<p:sld xmlns:a="http://schemas.openxmlformats.org/drawingml/2006/main" xmlns:r="http://schemas.openxmlformats.org/officeDocument/2006/relationships" xmlns:p="http://schemas.openxmlformats.org/presentationml/2006/main">
-  <p:cSld>
-    <p:spTree>
-      <p:nvGrpSpPr>
-        <p:cNvPr id="1" name=""/>
-        <p:cNvGrpSpPr/>
-        <p:nvPr/>
-      </p:nvGrpSpPr>
-      <p:grpSpPr>
-        <a:xfrm>
-          <a:off x="0" y="0"/>
-          <a:ext cx="0" cy="0"/>
-          <a:chOff x="0" y="0"/>
-          <a:chExt cx="0" cy="0"/>
-        </a:xfrm>
-      </p:grpSpPr>
-      <p:sp>
-        <p:nvSpPr>
-          <p:cNvPr id="2" name="Title 1"/>
-          <p:cNvSpPr>
-            <a:spLocks noGrp="1"/>
-          </p:cNvSpPr>
-          <p:nvPr>
-            <p:ph type="title"/>
-          </p:nvPr>
-        </p:nvSpPr>
-        <p:spPr/>
-        <p:txBody>
-          <a:bodyPr/>
-          <a:lstStyle/>
-          <a:p>
-            <a:r>
-              <a:t>How We Create Continuity</a:t>
-            </a:r>
-          </a:p>
-        </p:txBody>
-      </p:sp>
-      <p:sp>
-        <p:nvSpPr>
-          <p:cNvPr id="3" name="Content Placeholder 2"/>
-          <p:cNvSpPr>
-            <a:spLocks noGrp="1"/>
-          </p:cNvSpPr>
-          <p:nvPr>
-            <p:ph sz="quarter" idx="11"/>
-          </p:nvPr>
-        </p:nvSpPr>
-        <p:spPr/>
-        <p:txBody>
-          <a:bodyPr/>
-          <a:lstStyle/>
-          <a:p>
-            <a:pPr>
-              <a:defRPr sz="2100"/>
-            </a:pPr>
-            <a:r>
-              <a:rPr b="1" dirty="0"/>
-              <a:t>.md files:</a:t>
-            </a:r>
-            <a:r>
-              <a:rPr dirty="0"/>
-              <a:t> plain text notes for instructions and project state.</a:t>
-            </a:r>
-          </a:p>
-          <a:p>
-            <a:pPr>
-              <a:defRPr sz="2100"/>
-            </a:pPr>
-            <a:r>
-              <a:rPr b="1" dirty="0"/>
-              <a:t>AGENTS.md:</a:t>
-            </a:r>
-            <a:r>
-              <a:rPr dirty="0"/>
-              <a:t> top-level rules for how the AI should operate.</a:t>
-            </a:r>
-          </a:p>
-          <a:p>
-            <a:pPr>
-              <a:defRPr sz="2100"/>
-            </a:pPr>
-            <a:r>
-              <a:rPr b="1" dirty="0"/>
-              <a:t>project.md:</a:t>
-            </a:r>
-            <a:r>
-              <a:rPr dirty="0"/>
-              <a:t> goals, current status, and next tasks.</a:t>
-            </a:r>
-          </a:p>
-          <a:p>
-            <a:pPr>
-              <a:defRPr sz="2100"/>
-            </a:pPr>
-            <a:r>
-              <a:rPr b="1" dirty="0"/>
-              <a:t>Skills/: </a:t>
-            </a:r>
-            <a:r>
-              <a:rPr dirty="0"/>
-              <a:t>reusable methods (how to do tasks).</a:t>
-            </a:r>
-          </a:p>
-          <a:p>
-            <a:pPr>
-              <a:defRPr sz="2100"/>
-            </a:pPr>
-            <a:r>
-              <a:rPr b="1" dirty="0"/>
-              <a:t>Agents/: </a:t>
-            </a:r>
-            <a:r>
-              <a:rPr dirty="0"/>
-              <a:t>reusable roles (which task each agent handles)</a:t>
-            </a:r>
-            <a:endParaRPr lang="en-GB" dirty="0"/>
-          </a:p>
-          <a:p>
-            <a:pPr>
-              <a:defRPr sz="2100"/>
-            </a:pPr>
-            <a:r>
-              <a:rPr lang="en-GB" b="1" dirty="0"/>
-              <a:t>Projects/: </a:t>
-            </a:r>
-            <a:r>
-              <a:rPr lang="en-GB" dirty="0"/>
-              <a:t>this where your e.g. research projects go. All global folders above apply, but also anything related to these projects will need its own .md</a:t>
-            </a:r>
-            <a:endParaRPr dirty="0"/>
-          </a:p>
-        </p:txBody>
-      </p:sp>
-    </p:spTree>
   </p:cSld>
   <p:clrMapOvr>
     <a:masterClrMapping/>
@@ -3233,36 +8556,36 @@
 <file path=ppt/theme/theme1.xml><?xml version="1.0" encoding="utf-8"?>
 <a:theme xmlns:a="http://schemas.openxmlformats.org/drawingml/2006/main" name="Office Theme">
   <a:themeElements>
-    <a:clrScheme name="Durham University">
+    <a:clrScheme name="Clean Workshop">
       <a:dk1>
-        <a:srgbClr val="002A41"/>
+        <a:srgbClr val="1A1A2E"/>
       </a:dk1>
       <a:lt1>
-        <a:sysClr val="window" lastClr="FFFFFF"/>
+        <a:srgbClr val="FFFFFF"/>
       </a:lt1>
       <a:dk2>
-        <a:srgbClr val="54145A"/>
+        <a:srgbClr val="1A1A2E"/>
       </a:dk2>
       <a:lt2>
-        <a:srgbClr val="CBA8B1"/>
+        <a:srgbClr val="F5F0EB"/>
       </a:lt2>
       <a:accent1>
-        <a:srgbClr val="00AEEF"/>
+        <a:srgbClr val="C45B28"/>
       </a:accent1>
       <a:accent2>
-        <a:srgbClr val="A5C8D0"/>
+        <a:srgbClr val="8B5E3C"/>
       </a:accent2>
       <a:accent3>
-        <a:srgbClr val="AFA961"/>
+        <a:srgbClr val="2D6B4F"/>
       </a:accent3>
       <a:accent4>
-        <a:srgbClr val="B3BDB1"/>
+        <a:srgbClr val="D4A853"/>
       </a:accent4>
       <a:accent5>
-        <a:srgbClr val="FFD53A"/>
+        <a:srgbClr val="A67B5B"/>
       </a:accent5>
       <a:accent6>
-        <a:srgbClr val="DACDA2"/>
+        <a:srgbClr val="4A6741"/>
       </a:accent6>
       <a:hlink>
         <a:srgbClr val="BE1E2D"/>
@@ -3271,9 +8594,9 @@
         <a:srgbClr val="B6AAA7"/>
       </a:folHlink>
     </a:clrScheme>
-    <a:fontScheme name="Office">
+    <a:fontScheme name="Clean Workshop">
       <a:majorFont>
-        <a:latin typeface="Calibri"/>
+        <a:latin typeface="Georgia"/>
         <a:ea typeface=""/>
         <a:cs typeface=""/>
         <a:font script="Jpan" typeface="ＭＳ Ｐゴシック"/>
@@ -3308,7 +8631,7 @@
         <a:font script="Geor" typeface="Sylfaen"/>
       </a:majorFont>
       <a:minorFont>
-        <a:latin typeface="Calibri"/>
+        <a:latin typeface="Aptos"/>
         <a:ea typeface=""/>
         <a:cs typeface=""/>
         <a:font script="Jpan" typeface="ＭＳ Ｐゴシック"/>
@@ -4170,7 +9493,38 @@
 </a:theme>
 </file>
 
+<file path=ppt/webextensions/taskpanes.xml><?xml version="1.0" encoding="utf-8"?>
+<wetp:taskpanes xmlns:wetp="http://schemas.microsoft.com/office/webextensions/taskpanes/2010/11">
+  <wetp:taskpane dockstate="right" visibility="0" width="350" row="3">
+    <wetp:webextensionref xmlns:r="http://schemas.openxmlformats.org/officeDocument/2006/relationships" r:id="rId1"/>
+  </wetp:taskpane>
+</wetp:taskpanes>
+</file>
+
+<file path=ppt/webextensions/webextension1.xml><?xml version="1.0" encoding="utf-8"?>
+<we:webextension xmlns:we="http://schemas.microsoft.com/office/webextensions/webextension/2010/11" id="{3B0EB489-9F73-4EAA-99D4-74875A592BBD}">
+  <we:reference id="wa200010001" version="1.0.0.1" store="en-US" storeType="OMEX"/>
+  <we:alternateReferences>
+    <we:reference id="wa200010001" version="1.0.0.1" store="" storeType="OMEX"/>
+  </we:alternateReferences>
+  <we:properties>
+    <we:property name="Office.AutoShowTaskpaneWithDocument" value="true"/>
+  </we:properties>
+  <we:bindings/>
+  <we:snapshot xmlns:r="http://schemas.openxmlformats.org/officeDocument/2006/relationships"/>
+</we:webextension>
+</file>
+
 <file path=customXml/item1.xml><?xml version="1.0" encoding="utf-8"?>
+<?mso-contentType ?>
+<FormTemplates xmlns="http://schemas.microsoft.com/sharepoint/v3/contenttype/forms">
+  <Display>DocumentLibraryForm</Display>
+  <Edit>DocumentLibraryForm</Edit>
+  <New>DocumentLibraryForm</New>
+</FormTemplates>
+</file>
+
+<file path=customXml/item2.xml><?xml version="1.0" encoding="utf-8"?>
 <ct:contentTypeSchema xmlns:ct="http://schemas.microsoft.com/office/2006/metadata/contentType" xmlns:ma="http://schemas.microsoft.com/office/2006/metadata/properties/metaAttributes" ct:_="" ma:_="" ma:contentTypeName="Document" ma:contentTypeID="0x0101003BCE951B1D604F47AD4EB98F3F9810DA" ma:contentTypeVersion="17" ma:contentTypeDescription="Create a new document." ma:contentTypeScope="" ma:versionID="d4663f88488be562d3f390fca421bab7">
   <xsd:schema xmlns:xsd="http://www.w3.org/2001/XMLSchema" xmlns:xs="http://www.w3.org/2001/XMLSchema" xmlns:p="http://schemas.microsoft.com/office/2006/metadata/properties" xmlns:ns2="674d51e3-3ba6-45e1-9e5a-18c440d6de5a" xmlns:ns3="8f612c8a-2dfb-4a1a-9050-5ffbd886e57b" xmlns:ns4="3bf6d2de-cfb7-466c-825b-051a8e3c8b7d" targetNamespace="http://schemas.microsoft.com/office/2006/metadata/properties" ma:root="true" ma:fieldsID="052c01f55c071f2d871bf6b211514e8a" ns2:_="" ns3:_="" ns4:_="">
     <xsd:import namespace="674d51e3-3ba6-45e1-9e5a-18c440d6de5a"/>
@@ -4424,15 +9778,6 @@
 </ct:contentTypeSchema>
 </file>
 
-<file path=customXml/item2.xml><?xml version="1.0" encoding="utf-8"?>
-<?mso-contentType ?>
-<FormTemplates xmlns="http://schemas.microsoft.com/sharepoint/v3/contenttype/forms">
-  <Display>DocumentLibraryForm</Display>
-  <Edit>DocumentLibraryForm</Edit>
-  <New>DocumentLibraryForm</New>
-</FormTemplates>
-</file>
-
 <file path=customXml/item3.xml><?xml version="1.0" encoding="utf-8"?>
 <p:properties xmlns:p="http://schemas.microsoft.com/office/2006/metadata/properties" xmlns:xsi="http://www.w3.org/2001/XMLSchema-instance" xmlns:pc="http://schemas.microsoft.com/office/infopath/2007/PartnerControls">
   <documentManagement>
@@ -4457,6 +9802,14 @@
 </file>
 
 <file path=customXml/itemProps1.xml><?xml version="1.0" encoding="utf-8"?>
+<ds:datastoreItem xmlns:ds="http://schemas.openxmlformats.org/officeDocument/2006/customXml" ds:itemID="{592A46E8-E1F1-4337-B47E-59BACB057020}">
+  <ds:schemaRefs>
+    <ds:schemaRef ds:uri="http://schemas.microsoft.com/sharepoint/v3/contenttype/forms"/>
+  </ds:schemaRefs>
+</ds:datastoreItem>
+</file>
+
+<file path=customXml/itemProps2.xml><?xml version="1.0" encoding="utf-8"?>
 <ds:datastoreItem xmlns:ds="http://schemas.openxmlformats.org/officeDocument/2006/customXml" ds:itemID="{505DD064-5E72-447A-82E3-EC274E7B6EA2}">
   <ds:schemaRefs>
     <ds:schemaRef ds:uri="http://schemas.microsoft.com/office/2006/metadata/contentType"/>
@@ -4472,14 +9825,6 @@
     <ds:schemaRef ds:uri="http://purl.org/dc/elements/1.1/"/>
     <ds:schemaRef ds:uri="http://purl.org/dc/terms/"/>
     <ds:schemaRef ds:uri="http://schemas.microsoft.com/internal/obd"/>
-  </ds:schemaRefs>
-</ds:datastoreItem>
-</file>
-
-<file path=customXml/itemProps2.xml><?xml version="1.0" encoding="utf-8"?>
-<ds:datastoreItem xmlns:ds="http://schemas.openxmlformats.org/officeDocument/2006/customXml" ds:itemID="{592A46E8-E1F1-4337-B47E-59BACB057020}">
-  <ds:schemaRefs>
-    <ds:schemaRef ds:uri="http://schemas.microsoft.com/sharepoint/v3/contenttype/forms"/>
   </ds:schemaRefs>
 </ds:datastoreItem>
 </file>
